--- a/exports/pptx/lessons/middle-module-10-herbs-aushadhi/day-06-yavani.pptx
+++ b/exports/pptx/lessons/middle-module-10-herbs-aushadhi/day-06-yavani.pptx
@@ -17,9 +17,18 @@
     <p:sldId id="265" r:id="rId11"/>
     <p:sldId id="266" r:id="rId12"/>
     <p:sldId id="267" r:id="rId13"/>
+    <p:sldId id="268" r:id="rId14"/>
+    <p:sldId id="269" r:id="rId15"/>
+    <p:sldId id="270" r:id="rId16"/>
+    <p:sldId id="271" r:id="rId17"/>
+    <p:sldId id="272" r:id="rId18"/>
+    <p:sldId id="273" r:id="rId19"/>
+    <p:sldId id="274" r:id="rId20"/>
+    <p:sldId id="275" r:id="rId21"/>
+    <p:sldId id="276" r:id="rId22"/>
   </p:sldIdLst>
   <p:notesMasterIdLst>
-    <p:notesMasterId r:id="rId14"/>
+    <p:notesMasterId r:id="rId23"/>
   </p:notesMasterIdLst>
   <p:sldSz cx="9144000" cy="5143500"/>
   <p:notesSz cx="5143500" cy="9144000"/>
@@ -819,6 +828,622 @@
 </p:notes>
 </file>
 
+<file path=ppt/notesSlides/notesSlide13.xml><?xml version="1.0" encoding="utf-8"?>
+<p:notes xmlns:a="http://schemas.openxmlformats.org/drawingml/2006/main" xmlns:r="http://schemas.openxmlformats.org/officeDocument/2006/relationships" xmlns:p="http://schemas.openxmlformats.org/presentationml/2006/main">
+  <p:cSld>
+    <p:spTree>
+      <p:nvGrpSpPr>
+        <p:cNvPr id="1" name=""/>
+        <p:cNvGrpSpPr/>
+        <p:nvPr/>
+      </p:nvGrpSpPr>
+      <p:grpSpPr>
+        <a:xfrm>
+          <a:off x="0" y="0"/>
+          <a:ext cx="0" cy="0"/>
+          <a:chOff x="0" y="0"/>
+          <a:chExt cx="0" cy="0"/>
+        </a:xfrm>
+      </p:grpSpPr>
+      <p:sp>
+        <p:nvSpPr>
+          <p:cNvPr id="2" name="Slide Image Placeholder 1"/>
+          <p:cNvSpPr>
+            <a:spLocks noGrp="1" noRot="1" noChangeAspect="1"/>
+          </p:cNvSpPr>
+          <p:nvPr>
+            <p:ph type="sldImg"/>
+          </p:nvPr>
+        </p:nvSpPr>
+        <p:spPr/>
+      </p:sp>
+      <p:sp>
+        <p:nvSpPr>
+          <p:cNvPr id="3" name="Notes Placeholder 2"/>
+          <p:cNvSpPr>
+            <a:spLocks noGrp="1"/>
+          </p:cNvSpPr>
+          <p:nvPr>
+            <p:ph type="body" idx="1"/>
+          </p:nvPr>
+        </p:nvSpPr>
+        <p:spPr/>
+        <p:txBody>
+          <a:bodyPr/>
+          <a:lstStyle/>
+          <a:p>
+            <a:r>
+              <a:rPr lang="en-US" dirty="0"/>
+              <a:t/>
+            </a:r>
+            <a:endParaRPr lang="en-US" dirty="0"/>
+          </a:p>
+        </p:txBody>
+      </p:sp>
+      <p:sp>
+        <p:nvSpPr>
+          <p:cNvPr id="4" name="Slide Number Placeholder 3"/>
+          <p:cNvSpPr>
+            <a:spLocks noGrp="1"/>
+          </p:cNvSpPr>
+          <p:nvPr>
+            <p:ph type="sldNum" sz="quarter" idx="10"/>
+          </p:nvPr>
+        </p:nvSpPr>
+        <p:spPr/>
+        <p:txBody>
+          <a:bodyPr/>
+          <a:lstStyle/>
+          <a:p>
+            <a:fld id="{F7021451-1387-4CA6-816F-3879F97B5CBC}" type="slidenum">
+              <a:rPr lang="en-US"/>
+              <a:t>13</a:t>
+            </a:fld>
+            <a:endParaRPr lang="en-US"/>
+          </a:p>
+        </p:txBody>
+      </p:sp>
+    </p:spTree>
+    <p:extLst>
+      <p:ext uri="{BB962C8B-B14F-4D97-AF65-F5344CB8AC3E}">
+        <p14:creationId xmlns:p14="http://schemas.microsoft.com/office/powerpoint/2010/main" val="1024086991"/>
+      </p:ext>
+    </p:extLst>
+  </p:cSld>
+  <p:clrMapOvr>
+    <a:masterClrMapping/>
+  </p:clrMapOvr>
+</p:notes>
+</file>
+
+<file path=ppt/notesSlides/notesSlide14.xml><?xml version="1.0" encoding="utf-8"?>
+<p:notes xmlns:a="http://schemas.openxmlformats.org/drawingml/2006/main" xmlns:r="http://schemas.openxmlformats.org/officeDocument/2006/relationships" xmlns:p="http://schemas.openxmlformats.org/presentationml/2006/main">
+  <p:cSld>
+    <p:spTree>
+      <p:nvGrpSpPr>
+        <p:cNvPr id="1" name=""/>
+        <p:cNvGrpSpPr/>
+        <p:nvPr/>
+      </p:nvGrpSpPr>
+      <p:grpSpPr>
+        <a:xfrm>
+          <a:off x="0" y="0"/>
+          <a:ext cx="0" cy="0"/>
+          <a:chOff x="0" y="0"/>
+          <a:chExt cx="0" cy="0"/>
+        </a:xfrm>
+      </p:grpSpPr>
+      <p:sp>
+        <p:nvSpPr>
+          <p:cNvPr id="2" name="Slide Image Placeholder 1"/>
+          <p:cNvSpPr>
+            <a:spLocks noGrp="1" noRot="1" noChangeAspect="1"/>
+          </p:cNvSpPr>
+          <p:nvPr>
+            <p:ph type="sldImg"/>
+          </p:nvPr>
+        </p:nvSpPr>
+        <p:spPr/>
+      </p:sp>
+      <p:sp>
+        <p:nvSpPr>
+          <p:cNvPr id="3" name="Notes Placeholder 2"/>
+          <p:cNvSpPr>
+            <a:spLocks noGrp="1"/>
+          </p:cNvSpPr>
+          <p:nvPr>
+            <p:ph type="body" idx="1"/>
+          </p:nvPr>
+        </p:nvSpPr>
+        <p:spPr/>
+        <p:txBody>
+          <a:bodyPr/>
+          <a:lstStyle/>
+          <a:p>
+            <a:r>
+              <a:rPr lang="en-US" dirty="0"/>
+              <a:t/>
+            </a:r>
+            <a:endParaRPr lang="en-US" dirty="0"/>
+          </a:p>
+        </p:txBody>
+      </p:sp>
+      <p:sp>
+        <p:nvSpPr>
+          <p:cNvPr id="4" name="Slide Number Placeholder 3"/>
+          <p:cNvSpPr>
+            <a:spLocks noGrp="1"/>
+          </p:cNvSpPr>
+          <p:nvPr>
+            <p:ph type="sldNum" sz="quarter" idx="10"/>
+          </p:nvPr>
+        </p:nvSpPr>
+        <p:spPr/>
+        <p:txBody>
+          <a:bodyPr/>
+          <a:lstStyle/>
+          <a:p>
+            <a:fld id="{F7021451-1387-4CA6-816F-3879F97B5CBC}" type="slidenum">
+              <a:rPr lang="en-US"/>
+              <a:t>14</a:t>
+            </a:fld>
+            <a:endParaRPr lang="en-US"/>
+          </a:p>
+        </p:txBody>
+      </p:sp>
+    </p:spTree>
+    <p:extLst>
+      <p:ext uri="{BB962C8B-B14F-4D97-AF65-F5344CB8AC3E}">
+        <p14:creationId xmlns:p14="http://schemas.microsoft.com/office/powerpoint/2010/main" val="1024086991"/>
+      </p:ext>
+    </p:extLst>
+  </p:cSld>
+  <p:clrMapOvr>
+    <a:masterClrMapping/>
+  </p:clrMapOvr>
+</p:notes>
+</file>
+
+<file path=ppt/notesSlides/notesSlide15.xml><?xml version="1.0" encoding="utf-8"?>
+<p:notes xmlns:a="http://schemas.openxmlformats.org/drawingml/2006/main" xmlns:r="http://schemas.openxmlformats.org/officeDocument/2006/relationships" xmlns:p="http://schemas.openxmlformats.org/presentationml/2006/main">
+  <p:cSld>
+    <p:spTree>
+      <p:nvGrpSpPr>
+        <p:cNvPr id="1" name=""/>
+        <p:cNvGrpSpPr/>
+        <p:nvPr/>
+      </p:nvGrpSpPr>
+      <p:grpSpPr>
+        <a:xfrm>
+          <a:off x="0" y="0"/>
+          <a:ext cx="0" cy="0"/>
+          <a:chOff x="0" y="0"/>
+          <a:chExt cx="0" cy="0"/>
+        </a:xfrm>
+      </p:grpSpPr>
+      <p:sp>
+        <p:nvSpPr>
+          <p:cNvPr id="2" name="Slide Image Placeholder 1"/>
+          <p:cNvSpPr>
+            <a:spLocks noGrp="1" noRot="1" noChangeAspect="1"/>
+          </p:cNvSpPr>
+          <p:nvPr>
+            <p:ph type="sldImg"/>
+          </p:nvPr>
+        </p:nvSpPr>
+        <p:spPr/>
+      </p:sp>
+      <p:sp>
+        <p:nvSpPr>
+          <p:cNvPr id="3" name="Notes Placeholder 2"/>
+          <p:cNvSpPr>
+            <a:spLocks noGrp="1"/>
+          </p:cNvSpPr>
+          <p:nvPr>
+            <p:ph type="body" idx="1"/>
+          </p:nvPr>
+        </p:nvSpPr>
+        <p:spPr/>
+        <p:txBody>
+          <a:bodyPr/>
+          <a:lstStyle/>
+          <a:p>
+            <a:r>
+              <a:rPr lang="en-US" dirty="0"/>
+              <a:t/>
+            </a:r>
+            <a:endParaRPr lang="en-US" dirty="0"/>
+          </a:p>
+        </p:txBody>
+      </p:sp>
+      <p:sp>
+        <p:nvSpPr>
+          <p:cNvPr id="4" name="Slide Number Placeholder 3"/>
+          <p:cNvSpPr>
+            <a:spLocks noGrp="1"/>
+          </p:cNvSpPr>
+          <p:nvPr>
+            <p:ph type="sldNum" sz="quarter" idx="10"/>
+          </p:nvPr>
+        </p:nvSpPr>
+        <p:spPr/>
+        <p:txBody>
+          <a:bodyPr/>
+          <a:lstStyle/>
+          <a:p>
+            <a:fld id="{F7021451-1387-4CA6-816F-3879F97B5CBC}" type="slidenum">
+              <a:rPr lang="en-US"/>
+              <a:t>15</a:t>
+            </a:fld>
+            <a:endParaRPr lang="en-US"/>
+          </a:p>
+        </p:txBody>
+      </p:sp>
+    </p:spTree>
+    <p:extLst>
+      <p:ext uri="{BB962C8B-B14F-4D97-AF65-F5344CB8AC3E}">
+        <p14:creationId xmlns:p14="http://schemas.microsoft.com/office/powerpoint/2010/main" val="1024086991"/>
+      </p:ext>
+    </p:extLst>
+  </p:cSld>
+  <p:clrMapOvr>
+    <a:masterClrMapping/>
+  </p:clrMapOvr>
+</p:notes>
+</file>
+
+<file path=ppt/notesSlides/notesSlide16.xml><?xml version="1.0" encoding="utf-8"?>
+<p:notes xmlns:a="http://schemas.openxmlformats.org/drawingml/2006/main" xmlns:r="http://schemas.openxmlformats.org/officeDocument/2006/relationships" xmlns:p="http://schemas.openxmlformats.org/presentationml/2006/main">
+  <p:cSld>
+    <p:spTree>
+      <p:nvGrpSpPr>
+        <p:cNvPr id="1" name=""/>
+        <p:cNvGrpSpPr/>
+        <p:nvPr/>
+      </p:nvGrpSpPr>
+      <p:grpSpPr>
+        <a:xfrm>
+          <a:off x="0" y="0"/>
+          <a:ext cx="0" cy="0"/>
+          <a:chOff x="0" y="0"/>
+          <a:chExt cx="0" cy="0"/>
+        </a:xfrm>
+      </p:grpSpPr>
+      <p:sp>
+        <p:nvSpPr>
+          <p:cNvPr id="2" name="Slide Image Placeholder 1"/>
+          <p:cNvSpPr>
+            <a:spLocks noGrp="1" noRot="1" noChangeAspect="1"/>
+          </p:cNvSpPr>
+          <p:nvPr>
+            <p:ph type="sldImg"/>
+          </p:nvPr>
+        </p:nvSpPr>
+        <p:spPr/>
+      </p:sp>
+      <p:sp>
+        <p:nvSpPr>
+          <p:cNvPr id="3" name="Notes Placeholder 2"/>
+          <p:cNvSpPr>
+            <a:spLocks noGrp="1"/>
+          </p:cNvSpPr>
+          <p:nvPr>
+            <p:ph type="body" idx="1"/>
+          </p:nvPr>
+        </p:nvSpPr>
+        <p:spPr/>
+        <p:txBody>
+          <a:bodyPr/>
+          <a:lstStyle/>
+          <a:p>
+            <a:r>
+              <a:rPr lang="en-US" dirty="0"/>
+              <a:t/>
+            </a:r>
+            <a:endParaRPr lang="en-US" dirty="0"/>
+          </a:p>
+        </p:txBody>
+      </p:sp>
+      <p:sp>
+        <p:nvSpPr>
+          <p:cNvPr id="4" name="Slide Number Placeholder 3"/>
+          <p:cNvSpPr>
+            <a:spLocks noGrp="1"/>
+          </p:cNvSpPr>
+          <p:nvPr>
+            <p:ph type="sldNum" sz="quarter" idx="10"/>
+          </p:nvPr>
+        </p:nvSpPr>
+        <p:spPr/>
+        <p:txBody>
+          <a:bodyPr/>
+          <a:lstStyle/>
+          <a:p>
+            <a:fld id="{F7021451-1387-4CA6-816F-3879F97B5CBC}" type="slidenum">
+              <a:rPr lang="en-US"/>
+              <a:t>16</a:t>
+            </a:fld>
+            <a:endParaRPr lang="en-US"/>
+          </a:p>
+        </p:txBody>
+      </p:sp>
+    </p:spTree>
+    <p:extLst>
+      <p:ext uri="{BB962C8B-B14F-4D97-AF65-F5344CB8AC3E}">
+        <p14:creationId xmlns:p14="http://schemas.microsoft.com/office/powerpoint/2010/main" val="1024086991"/>
+      </p:ext>
+    </p:extLst>
+  </p:cSld>
+  <p:clrMapOvr>
+    <a:masterClrMapping/>
+  </p:clrMapOvr>
+</p:notes>
+</file>
+
+<file path=ppt/notesSlides/notesSlide17.xml><?xml version="1.0" encoding="utf-8"?>
+<p:notes xmlns:a="http://schemas.openxmlformats.org/drawingml/2006/main" xmlns:r="http://schemas.openxmlformats.org/officeDocument/2006/relationships" xmlns:p="http://schemas.openxmlformats.org/presentationml/2006/main">
+  <p:cSld>
+    <p:spTree>
+      <p:nvGrpSpPr>
+        <p:cNvPr id="1" name=""/>
+        <p:cNvGrpSpPr/>
+        <p:nvPr/>
+      </p:nvGrpSpPr>
+      <p:grpSpPr>
+        <a:xfrm>
+          <a:off x="0" y="0"/>
+          <a:ext cx="0" cy="0"/>
+          <a:chOff x="0" y="0"/>
+          <a:chExt cx="0" cy="0"/>
+        </a:xfrm>
+      </p:grpSpPr>
+      <p:sp>
+        <p:nvSpPr>
+          <p:cNvPr id="2" name="Slide Image Placeholder 1"/>
+          <p:cNvSpPr>
+            <a:spLocks noGrp="1" noRot="1" noChangeAspect="1"/>
+          </p:cNvSpPr>
+          <p:nvPr>
+            <p:ph type="sldImg"/>
+          </p:nvPr>
+        </p:nvSpPr>
+        <p:spPr/>
+      </p:sp>
+      <p:sp>
+        <p:nvSpPr>
+          <p:cNvPr id="3" name="Notes Placeholder 2"/>
+          <p:cNvSpPr>
+            <a:spLocks noGrp="1"/>
+          </p:cNvSpPr>
+          <p:nvPr>
+            <p:ph type="body" idx="1"/>
+          </p:nvPr>
+        </p:nvSpPr>
+        <p:spPr/>
+        <p:txBody>
+          <a:bodyPr/>
+          <a:lstStyle/>
+          <a:p>
+            <a:r>
+              <a:rPr lang="en-US" dirty="0"/>
+              <a:t/>
+            </a:r>
+            <a:endParaRPr lang="en-US" dirty="0"/>
+          </a:p>
+        </p:txBody>
+      </p:sp>
+      <p:sp>
+        <p:nvSpPr>
+          <p:cNvPr id="4" name="Slide Number Placeholder 3"/>
+          <p:cNvSpPr>
+            <a:spLocks noGrp="1"/>
+          </p:cNvSpPr>
+          <p:nvPr>
+            <p:ph type="sldNum" sz="quarter" idx="10"/>
+          </p:nvPr>
+        </p:nvSpPr>
+        <p:spPr/>
+        <p:txBody>
+          <a:bodyPr/>
+          <a:lstStyle/>
+          <a:p>
+            <a:fld id="{F7021451-1387-4CA6-816F-3879F97B5CBC}" type="slidenum">
+              <a:rPr lang="en-US"/>
+              <a:t>17</a:t>
+            </a:fld>
+            <a:endParaRPr lang="en-US"/>
+          </a:p>
+        </p:txBody>
+      </p:sp>
+    </p:spTree>
+    <p:extLst>
+      <p:ext uri="{BB962C8B-B14F-4D97-AF65-F5344CB8AC3E}">
+        <p14:creationId xmlns:p14="http://schemas.microsoft.com/office/powerpoint/2010/main" val="1024086991"/>
+      </p:ext>
+    </p:extLst>
+  </p:cSld>
+  <p:clrMapOvr>
+    <a:masterClrMapping/>
+  </p:clrMapOvr>
+</p:notes>
+</file>
+
+<file path=ppt/notesSlides/notesSlide18.xml><?xml version="1.0" encoding="utf-8"?>
+<p:notes xmlns:a="http://schemas.openxmlformats.org/drawingml/2006/main" xmlns:r="http://schemas.openxmlformats.org/officeDocument/2006/relationships" xmlns:p="http://schemas.openxmlformats.org/presentationml/2006/main">
+  <p:cSld>
+    <p:spTree>
+      <p:nvGrpSpPr>
+        <p:cNvPr id="1" name=""/>
+        <p:cNvGrpSpPr/>
+        <p:nvPr/>
+      </p:nvGrpSpPr>
+      <p:grpSpPr>
+        <a:xfrm>
+          <a:off x="0" y="0"/>
+          <a:ext cx="0" cy="0"/>
+          <a:chOff x="0" y="0"/>
+          <a:chExt cx="0" cy="0"/>
+        </a:xfrm>
+      </p:grpSpPr>
+      <p:sp>
+        <p:nvSpPr>
+          <p:cNvPr id="2" name="Slide Image Placeholder 1"/>
+          <p:cNvSpPr>
+            <a:spLocks noGrp="1" noRot="1" noChangeAspect="1"/>
+          </p:cNvSpPr>
+          <p:nvPr>
+            <p:ph type="sldImg"/>
+          </p:nvPr>
+        </p:nvSpPr>
+        <p:spPr/>
+      </p:sp>
+      <p:sp>
+        <p:nvSpPr>
+          <p:cNvPr id="3" name="Notes Placeholder 2"/>
+          <p:cNvSpPr>
+            <a:spLocks noGrp="1"/>
+          </p:cNvSpPr>
+          <p:nvPr>
+            <p:ph type="body" idx="1"/>
+          </p:nvPr>
+        </p:nvSpPr>
+        <p:spPr/>
+        <p:txBody>
+          <a:bodyPr/>
+          <a:lstStyle/>
+          <a:p>
+            <a:r>
+              <a:rPr lang="en-US" dirty="0"/>
+              <a:t/>
+            </a:r>
+            <a:endParaRPr lang="en-US" dirty="0"/>
+          </a:p>
+        </p:txBody>
+      </p:sp>
+      <p:sp>
+        <p:nvSpPr>
+          <p:cNvPr id="4" name="Slide Number Placeholder 3"/>
+          <p:cNvSpPr>
+            <a:spLocks noGrp="1"/>
+          </p:cNvSpPr>
+          <p:nvPr>
+            <p:ph type="sldNum" sz="quarter" idx="10"/>
+          </p:nvPr>
+        </p:nvSpPr>
+        <p:spPr/>
+        <p:txBody>
+          <a:bodyPr/>
+          <a:lstStyle/>
+          <a:p>
+            <a:fld id="{F7021451-1387-4CA6-816F-3879F97B5CBC}" type="slidenum">
+              <a:rPr lang="en-US"/>
+              <a:t>18</a:t>
+            </a:fld>
+            <a:endParaRPr lang="en-US"/>
+          </a:p>
+        </p:txBody>
+      </p:sp>
+    </p:spTree>
+    <p:extLst>
+      <p:ext uri="{BB962C8B-B14F-4D97-AF65-F5344CB8AC3E}">
+        <p14:creationId xmlns:p14="http://schemas.microsoft.com/office/powerpoint/2010/main" val="1024086991"/>
+      </p:ext>
+    </p:extLst>
+  </p:cSld>
+  <p:clrMapOvr>
+    <a:masterClrMapping/>
+  </p:clrMapOvr>
+</p:notes>
+</file>
+
+<file path=ppt/notesSlides/notesSlide19.xml><?xml version="1.0" encoding="utf-8"?>
+<p:notes xmlns:a="http://schemas.openxmlformats.org/drawingml/2006/main" xmlns:r="http://schemas.openxmlformats.org/officeDocument/2006/relationships" xmlns:p="http://schemas.openxmlformats.org/presentationml/2006/main">
+  <p:cSld>
+    <p:spTree>
+      <p:nvGrpSpPr>
+        <p:cNvPr id="1" name=""/>
+        <p:cNvGrpSpPr/>
+        <p:nvPr/>
+      </p:nvGrpSpPr>
+      <p:grpSpPr>
+        <a:xfrm>
+          <a:off x="0" y="0"/>
+          <a:ext cx="0" cy="0"/>
+          <a:chOff x="0" y="0"/>
+          <a:chExt cx="0" cy="0"/>
+        </a:xfrm>
+      </p:grpSpPr>
+      <p:sp>
+        <p:nvSpPr>
+          <p:cNvPr id="2" name="Slide Image Placeholder 1"/>
+          <p:cNvSpPr>
+            <a:spLocks noGrp="1" noRot="1" noChangeAspect="1"/>
+          </p:cNvSpPr>
+          <p:nvPr>
+            <p:ph type="sldImg"/>
+          </p:nvPr>
+        </p:nvSpPr>
+        <p:spPr/>
+      </p:sp>
+      <p:sp>
+        <p:nvSpPr>
+          <p:cNvPr id="3" name="Notes Placeholder 2"/>
+          <p:cNvSpPr>
+            <a:spLocks noGrp="1"/>
+          </p:cNvSpPr>
+          <p:nvPr>
+            <p:ph type="body" idx="1"/>
+          </p:nvPr>
+        </p:nvSpPr>
+        <p:spPr/>
+        <p:txBody>
+          <a:bodyPr/>
+          <a:lstStyle/>
+          <a:p>
+            <a:r>
+              <a:rPr lang="en-US" dirty="0"/>
+              <a:t/>
+            </a:r>
+            <a:endParaRPr lang="en-US" dirty="0"/>
+          </a:p>
+        </p:txBody>
+      </p:sp>
+      <p:sp>
+        <p:nvSpPr>
+          <p:cNvPr id="4" name="Slide Number Placeholder 3"/>
+          <p:cNvSpPr>
+            <a:spLocks noGrp="1"/>
+          </p:cNvSpPr>
+          <p:nvPr>
+            <p:ph type="sldNum" sz="quarter" idx="10"/>
+          </p:nvPr>
+        </p:nvSpPr>
+        <p:spPr/>
+        <p:txBody>
+          <a:bodyPr/>
+          <a:lstStyle/>
+          <a:p>
+            <a:fld id="{F7021451-1387-4CA6-816F-3879F97B5CBC}" type="slidenum">
+              <a:rPr lang="en-US"/>
+              <a:t>19</a:t>
+            </a:fld>
+            <a:endParaRPr lang="en-US"/>
+          </a:p>
+        </p:txBody>
+      </p:sp>
+    </p:spTree>
+    <p:extLst>
+      <p:ext uri="{BB962C8B-B14F-4D97-AF65-F5344CB8AC3E}">
+        <p14:creationId xmlns:p14="http://schemas.microsoft.com/office/powerpoint/2010/main" val="1024086991"/>
+      </p:ext>
+    </p:extLst>
+  </p:cSld>
+  <p:clrMapOvr>
+    <a:masterClrMapping/>
+  </p:clrMapOvr>
+</p:notes>
+</file>
+
 <file path=ppt/notesSlides/notesSlide2.xml><?xml version="1.0" encoding="utf-8"?>
 <p:notes xmlns:a="http://schemas.openxmlformats.org/drawingml/2006/main" xmlns:r="http://schemas.openxmlformats.org/officeDocument/2006/relationships" xmlns:p="http://schemas.openxmlformats.org/presentationml/2006/main">
   <p:cSld>
@@ -889,6 +1514,182 @@
             <a:fld id="{F7021451-1387-4CA6-816F-3879F97B5CBC}" type="slidenum">
               <a:rPr lang="en-US"/>
               <a:t>2</a:t>
+            </a:fld>
+            <a:endParaRPr lang="en-US"/>
+          </a:p>
+        </p:txBody>
+      </p:sp>
+    </p:spTree>
+    <p:extLst>
+      <p:ext uri="{BB962C8B-B14F-4D97-AF65-F5344CB8AC3E}">
+        <p14:creationId xmlns:p14="http://schemas.microsoft.com/office/powerpoint/2010/main" val="1024086991"/>
+      </p:ext>
+    </p:extLst>
+  </p:cSld>
+  <p:clrMapOvr>
+    <a:masterClrMapping/>
+  </p:clrMapOvr>
+</p:notes>
+</file>
+
+<file path=ppt/notesSlides/notesSlide20.xml><?xml version="1.0" encoding="utf-8"?>
+<p:notes xmlns:a="http://schemas.openxmlformats.org/drawingml/2006/main" xmlns:r="http://schemas.openxmlformats.org/officeDocument/2006/relationships" xmlns:p="http://schemas.openxmlformats.org/presentationml/2006/main">
+  <p:cSld>
+    <p:spTree>
+      <p:nvGrpSpPr>
+        <p:cNvPr id="1" name=""/>
+        <p:cNvGrpSpPr/>
+        <p:nvPr/>
+      </p:nvGrpSpPr>
+      <p:grpSpPr>
+        <a:xfrm>
+          <a:off x="0" y="0"/>
+          <a:ext cx="0" cy="0"/>
+          <a:chOff x="0" y="0"/>
+          <a:chExt cx="0" cy="0"/>
+        </a:xfrm>
+      </p:grpSpPr>
+      <p:sp>
+        <p:nvSpPr>
+          <p:cNvPr id="2" name="Slide Image Placeholder 1"/>
+          <p:cNvSpPr>
+            <a:spLocks noGrp="1" noRot="1" noChangeAspect="1"/>
+          </p:cNvSpPr>
+          <p:nvPr>
+            <p:ph type="sldImg"/>
+          </p:nvPr>
+        </p:nvSpPr>
+        <p:spPr/>
+      </p:sp>
+      <p:sp>
+        <p:nvSpPr>
+          <p:cNvPr id="3" name="Notes Placeholder 2"/>
+          <p:cNvSpPr>
+            <a:spLocks noGrp="1"/>
+          </p:cNvSpPr>
+          <p:nvPr>
+            <p:ph type="body" idx="1"/>
+          </p:nvPr>
+        </p:nvSpPr>
+        <p:spPr/>
+        <p:txBody>
+          <a:bodyPr/>
+          <a:lstStyle/>
+          <a:p>
+            <a:r>
+              <a:rPr lang="en-US" dirty="0"/>
+              <a:t/>
+            </a:r>
+            <a:endParaRPr lang="en-US" dirty="0"/>
+          </a:p>
+        </p:txBody>
+      </p:sp>
+      <p:sp>
+        <p:nvSpPr>
+          <p:cNvPr id="4" name="Slide Number Placeholder 3"/>
+          <p:cNvSpPr>
+            <a:spLocks noGrp="1"/>
+          </p:cNvSpPr>
+          <p:nvPr>
+            <p:ph type="sldNum" sz="quarter" idx="10"/>
+          </p:nvPr>
+        </p:nvSpPr>
+        <p:spPr/>
+        <p:txBody>
+          <a:bodyPr/>
+          <a:lstStyle/>
+          <a:p>
+            <a:fld id="{F7021451-1387-4CA6-816F-3879F97B5CBC}" type="slidenum">
+              <a:rPr lang="en-US"/>
+              <a:t>20</a:t>
+            </a:fld>
+            <a:endParaRPr lang="en-US"/>
+          </a:p>
+        </p:txBody>
+      </p:sp>
+    </p:spTree>
+    <p:extLst>
+      <p:ext uri="{BB962C8B-B14F-4D97-AF65-F5344CB8AC3E}">
+        <p14:creationId xmlns:p14="http://schemas.microsoft.com/office/powerpoint/2010/main" val="1024086991"/>
+      </p:ext>
+    </p:extLst>
+  </p:cSld>
+  <p:clrMapOvr>
+    <a:masterClrMapping/>
+  </p:clrMapOvr>
+</p:notes>
+</file>
+
+<file path=ppt/notesSlides/notesSlide21.xml><?xml version="1.0" encoding="utf-8"?>
+<p:notes xmlns:a="http://schemas.openxmlformats.org/drawingml/2006/main" xmlns:r="http://schemas.openxmlformats.org/officeDocument/2006/relationships" xmlns:p="http://schemas.openxmlformats.org/presentationml/2006/main">
+  <p:cSld>
+    <p:spTree>
+      <p:nvGrpSpPr>
+        <p:cNvPr id="1" name=""/>
+        <p:cNvGrpSpPr/>
+        <p:nvPr/>
+      </p:nvGrpSpPr>
+      <p:grpSpPr>
+        <a:xfrm>
+          <a:off x="0" y="0"/>
+          <a:ext cx="0" cy="0"/>
+          <a:chOff x="0" y="0"/>
+          <a:chExt cx="0" cy="0"/>
+        </a:xfrm>
+      </p:grpSpPr>
+      <p:sp>
+        <p:nvSpPr>
+          <p:cNvPr id="2" name="Slide Image Placeholder 1"/>
+          <p:cNvSpPr>
+            <a:spLocks noGrp="1" noRot="1" noChangeAspect="1"/>
+          </p:cNvSpPr>
+          <p:nvPr>
+            <p:ph type="sldImg"/>
+          </p:nvPr>
+        </p:nvSpPr>
+        <p:spPr/>
+      </p:sp>
+      <p:sp>
+        <p:nvSpPr>
+          <p:cNvPr id="3" name="Notes Placeholder 2"/>
+          <p:cNvSpPr>
+            <a:spLocks noGrp="1"/>
+          </p:cNvSpPr>
+          <p:nvPr>
+            <p:ph type="body" idx="1"/>
+          </p:nvPr>
+        </p:nvSpPr>
+        <p:spPr/>
+        <p:txBody>
+          <a:bodyPr/>
+          <a:lstStyle/>
+          <a:p>
+            <a:r>
+              <a:rPr lang="en-US" dirty="0"/>
+              <a:t/>
+            </a:r>
+            <a:endParaRPr lang="en-US" dirty="0"/>
+          </a:p>
+        </p:txBody>
+      </p:sp>
+      <p:sp>
+        <p:nvSpPr>
+          <p:cNvPr id="4" name="Slide Number Placeholder 3"/>
+          <p:cNvSpPr>
+            <a:spLocks noGrp="1"/>
+          </p:cNvSpPr>
+          <p:nvPr>
+            <p:ph type="sldNum" sz="quarter" idx="10"/>
+          </p:nvPr>
+        </p:nvSpPr>
+        <p:spPr/>
+        <p:txBody>
+          <a:bodyPr/>
+          <a:lstStyle/>
+          <a:p>
+            <a:fld id="{F7021451-1387-4CA6-816F-3879F97B5CBC}" type="slidenum">
+              <a:rPr lang="en-US"/>
+              <a:t>21</a:t>
             </a:fld>
             <a:endParaRPr lang="en-US"/>
           </a:p>
@@ -2140,240 +2941,6 @@
         </p:nvSpPr>
         <p:spPr>
           <a:xfrm>
-            <a:off x="406301" y="1223963"/>
-            <a:ext cx="8498026" cy="274290"/>
-          </a:xfrm>
-          <a:prstGeom prst="rect">
-            <a:avLst/>
-          </a:prstGeom>
-          <a:noFill/>
-          <a:ln/>
-        </p:spPr>
-        <p:txBody>
-          <a:bodyPr wrap="square" lIns="0" tIns="0" rIns="0" bIns="0" rtlCol="0" anchor="t"/>
-          <a:lstStyle/>
-          <a:p>
-            <a:pPr algn="l" indent="0" marL="0">
-              <a:lnSpc>
-                <a:spcPts val="2160"/>
-              </a:lnSpc>
-              <a:spcBef>
-                <a:spcPts val="600"/>
-              </a:spcBef>
-              <a:spcAft>
-                <a:spcPts val="800"/>
-              </a:spcAft>
-              <a:buNone/>
-            </a:pPr>
-            <a:r>
-              <a:rPr lang="en-US" sz="1800" b="1" dirty="0">
-                <a:solidFill>
-                  <a:srgbClr val="FE4447"/>
-                </a:solidFill>
-                <a:latin typeface="Georgia" pitchFamily="34" charset="0"/>
-                <a:ea typeface="Georgia" pitchFamily="34" charset="-122"/>
-                <a:cs typeface="Georgia" pitchFamily="34" charset="-120"/>
-              </a:rPr>
-              <a:t>Learning objective</a:t>
-            </a:r>
-            <a:endParaRPr lang="en-US" sz="1800" dirty="0"/>
-          </a:p>
-        </p:txBody>
-      </p:sp>
-      <p:sp>
-        <p:nvSpPr>
-          <p:cNvPr id="6" name="Text 4"/>
-          <p:cNvSpPr/>
-          <p:nvPr/>
-        </p:nvSpPr>
-        <p:spPr>
-          <a:xfrm>
-            <a:off x="406301" y="1637854"/>
-            <a:ext cx="8498026" cy="426541"/>
-          </a:xfrm>
-          <a:prstGeom prst="rect">
-            <a:avLst/>
-          </a:prstGeom>
-          <a:noFill/>
-          <a:ln/>
-        </p:spPr>
-        <p:txBody>
-          <a:bodyPr wrap="square" lIns="0" tIns="0" rIns="0" bIns="0" rtlCol="0" anchor="t"/>
-          <a:lstStyle/>
-          <a:p>
-            <a:pPr algn="l" indent="0" marL="0">
-              <a:lnSpc>
-                <a:spcPts val="1680"/>
-              </a:lnSpc>
-              <a:spcBef>
-                <a:spcPts val="300"/>
-              </a:spcBef>
-              <a:spcAft>
-                <a:spcPts val="300"/>
-              </a:spcAft>
-              <a:buNone/>
-            </a:pPr>
-            <a:r>
-              <a:rPr lang="en-US" sz="1200" dirty="0">
-                <a:solidFill>
-                  <a:srgbClr val="1C2833"/>
-                </a:solidFill>
-                <a:latin typeface="Arial" pitchFamily="34" charset="0"/>
-                <a:ea typeface="Arial" pitchFamily="34" charset="-122"/>
-                <a:cs typeface="Arial" pitchFamily="34" charset="-120"/>
-              </a:rPr>
-              <a:t>By the end of this lesson, students can identify </a:t>
-            </a:r>
-            <a:pPr algn="l" indent="0" marL="0">
-              <a:lnSpc>
-                <a:spcPts val="1680"/>
-              </a:lnSpc>
-              <a:spcBef>
-                <a:spcPts val="300"/>
-              </a:spcBef>
-              <a:spcAft>
-                <a:spcPts val="300"/>
-              </a:spcAft>
-              <a:buNone/>
-            </a:pPr>
-            <a:r>
-              <a:rPr lang="en-US" sz="1200" i="1" dirty="0">
-                <a:solidFill>
-                  <a:srgbClr val="1C2833"/>
-                </a:solidFill>
-                <a:latin typeface="Arial" pitchFamily="34" charset="0"/>
-                <a:ea typeface="Arial" pitchFamily="34" charset="-122"/>
-                <a:cs typeface="Arial" pitchFamily="34" charset="-120"/>
-              </a:rPr>
-              <a:t>yavānī</a:t>
-            </a:r>
-            <a:pPr algn="l" indent="0" marL="0">
-              <a:lnSpc>
-                <a:spcPts val="1680"/>
-              </a:lnSpc>
-              <a:spcBef>
-                <a:spcPts val="300"/>
-              </a:spcBef>
-              <a:spcAft>
-                <a:spcPts val="300"/>
-              </a:spcAft>
-              <a:buNone/>
-            </a:pPr>
-            <a:r>
-              <a:rPr lang="en-US" sz="1200" dirty="0">
-                <a:solidFill>
-                  <a:srgbClr val="1C2833"/>
-                </a:solidFill>
-                <a:latin typeface="Arial" pitchFamily="34" charset="0"/>
-                <a:ea typeface="Arial" pitchFamily="34" charset="-122"/>
-                <a:cs typeface="Arial" pitchFamily="34" charset="-120"/>
-              </a:rPr>
-              <a:t> (</a:t>
-            </a:r>
-            <a:pPr algn="l" indent="0" marL="0">
-              <a:lnSpc>
-                <a:spcPts val="1680"/>
-              </a:lnSpc>
-              <a:spcBef>
-                <a:spcPts val="300"/>
-              </a:spcBef>
-              <a:spcAft>
-                <a:spcPts val="300"/>
-              </a:spcAft>
-              <a:buNone/>
-            </a:pPr>
-            <a:r>
-              <a:rPr lang="en-US" sz="1200" i="1" dirty="0">
-                <a:solidFill>
-                  <a:srgbClr val="1C2833"/>
-                </a:solidFill>
-                <a:latin typeface="Arial" pitchFamily="34" charset="0"/>
-                <a:ea typeface="Arial" pitchFamily="34" charset="-122"/>
-                <a:cs typeface="Arial" pitchFamily="34" charset="-120"/>
-              </a:rPr>
-              <a:t>Trachyspermum ammi</a:t>
-            </a:r>
-            <a:pPr algn="l" indent="0" marL="0">
-              <a:lnSpc>
-                <a:spcPts val="1680"/>
-              </a:lnSpc>
-              <a:spcBef>
-                <a:spcPts val="300"/>
-              </a:spcBef>
-              <a:spcAft>
-                <a:spcPts val="300"/>
-              </a:spcAft>
-              <a:buNone/>
-            </a:pPr>
-            <a:r>
-              <a:rPr lang="en-US" sz="1200" dirty="0">
-                <a:solidFill>
-                  <a:srgbClr val="1C2833"/>
-                </a:solidFill>
-                <a:latin typeface="Arial" pitchFamily="34" charset="0"/>
-                <a:ea typeface="Arial" pitchFamily="34" charset="-122"/>
-                <a:cs typeface="Arial" pitchFamily="34" charset="-120"/>
-              </a:rPr>
-              <a:t>) by seed appearance and crushed-seed smell, name </a:t>
-            </a:r>
-            <a:pPr algn="l" indent="0" marL="0">
-              <a:lnSpc>
-                <a:spcPts val="1680"/>
-              </a:lnSpc>
-              <a:spcBef>
-                <a:spcPts val="300"/>
-              </a:spcBef>
-              <a:spcAft>
-                <a:spcPts val="300"/>
-              </a:spcAft>
-              <a:buNone/>
-            </a:pPr>
-            <a:r>
-              <a:rPr lang="en-US" sz="1200" b="1" dirty="0">
-                <a:solidFill>
-                  <a:srgbClr val="1C2833"/>
-                </a:solidFill>
-                <a:latin typeface="Arial" pitchFamily="34" charset="0"/>
-                <a:ea typeface="Arial" pitchFamily="34" charset="-122"/>
-                <a:cs typeface="Arial" pitchFamily="34" charset="-120"/>
-              </a:rPr>
-              <a:t>thymol</a:t>
-            </a:r>
-            <a:pPr algn="l" indent="0" marL="0">
-              <a:lnSpc>
-                <a:spcPts val="1680"/>
-              </a:lnSpc>
-              <a:spcBef>
-                <a:spcPts val="300"/>
-              </a:spcBef>
-              <a:spcAft>
-                <a:spcPts val="300"/>
-              </a:spcAft>
-              <a:buNone/>
-            </a:pPr>
-            <a:r>
-              <a:rPr lang="en-US" sz="1200" dirty="0">
-                <a:solidFill>
-                  <a:srgbClr val="1C2833"/>
-                </a:solidFill>
-                <a:latin typeface="Arial" pitchFamily="34" charset="0"/>
-                <a:ea typeface="Arial" pitchFamily="34" charset="-122"/>
-                <a:cs typeface="Arial" pitchFamily="34" charset="-120"/>
-              </a:rPr>
-              <a:t> as the principal volatile, and describe one common culinary use linked to traditional digestive support.</a:t>
-            </a:r>
-            <a:endParaRPr lang="en-US" sz="1200" dirty="0"/>
-          </a:p>
-        </p:txBody>
-      </p:sp>
-      <p:sp>
-        <p:nvSpPr>
-          <p:cNvPr id="7" name="Text 5"/>
-          <p:cNvSpPr/>
-          <p:nvPr/>
-        </p:nvSpPr>
-        <p:spPr>
-          <a:xfrm>
             <a:off x="406301" y="4434929"/>
             <a:ext cx="8498026" cy="213271"/>
           </a:xfrm>
@@ -2518,7 +3085,7 @@
                 <a:ea typeface="Georgia" pitchFamily="34" charset="-122"/>
                 <a:cs typeface="Georgia" pitchFamily="34" charset="-120"/>
               </a:rPr>
-              <a:t>Differentiation</a:t>
+              <a:t>Core (20 min) (cont.)</a:t>
             </a:r>
             <a:endParaRPr lang="en-US" sz="1800" dirty="0"/>
           </a:p>
@@ -2533,7 +3100,7 @@
         <p:spPr>
           <a:xfrm>
             <a:off x="634901" y="883593"/>
-            <a:ext cx="8102798" cy="937022"/>
+            <a:ext cx="8102798" cy="281880"/>
           </a:xfrm>
           <a:prstGeom prst="rect">
             <a:avLst/>
@@ -2564,70 +3131,32 @@
                 <a:ea typeface="Arial" pitchFamily="34" charset="-122"/>
                 <a:cs typeface="Arial" pitchFamily="34" charset="-120"/>
               </a:rPr>
-              <a:t>One tier up:</a:t>
-            </a:r>
-            <a:pPr algn="l" indent="0" marL="0">
-              <a:lnSpc>
-                <a:spcPts val="1620"/>
-              </a:lnSpc>
-              <a:spcAft>
-                <a:spcPts val="300"/>
-              </a:spcAft>
-              <a:buNone/>
-            </a:pPr>
-            <a:r>
-              <a:rPr lang="en-US" sz="1200" dirty="0">
-                <a:solidFill>
-                  <a:srgbClr val="1C2833"/>
-                </a:solidFill>
-                <a:latin typeface="Arial" pitchFamily="34" charset="0"/>
-                <a:ea typeface="Arial" pitchFamily="34" charset="-122"/>
-                <a:cs typeface="Arial" pitchFamily="34" charset="-120"/>
-              </a:rPr>
-              <a:t> </a:t>
-            </a:r>
-            <a:pPr algn="l" indent="0" marL="0">
-              <a:lnSpc>
-                <a:spcPts val="1620"/>
-              </a:lnSpc>
-              <a:spcAft>
-                <a:spcPts val="300"/>
-              </a:spcAft>
-              <a:buNone/>
-            </a:pPr>
-            <a:r>
-              <a:rPr lang="en-US" sz="1200" i="1" dirty="0">
-                <a:solidFill>
-                  <a:srgbClr val="1C2833"/>
-                </a:solidFill>
-                <a:latin typeface="Arial" pitchFamily="34" charset="0"/>
-                <a:ea typeface="Arial" pitchFamily="34" charset="-122"/>
-                <a:cs typeface="Arial" pitchFamily="34" charset="-120"/>
-              </a:rPr>
-              <a:t>Convergent chemistry</a:t>
-            </a:r>
-            <a:pPr algn="l" indent="0" marL="0">
-              <a:lnSpc>
-                <a:spcPts val="1620"/>
-              </a:lnSpc>
-              <a:spcAft>
-                <a:spcPts val="300"/>
-              </a:spcAft>
-              <a:buNone/>
-            </a:pPr>
-            <a:r>
-              <a:rPr lang="en-US" sz="1200" dirty="0">
-                <a:solidFill>
-                  <a:srgbClr val="1C2833"/>
-                </a:solidFill>
-                <a:latin typeface="Arial" pitchFamily="34" charset="0"/>
-                <a:ea typeface="Arial" pitchFamily="34" charset="-122"/>
-                <a:cs typeface="Arial" pitchFamily="34" charset="-120"/>
-              </a:rPr>
-              <a:t> — find one other example of two unrelated plant families producing the same compound (e.g. cinnamaldehyde in cinnamon and in some flowers; geraniol in geranium, lemongrass, rose). Sketch the molecular structure of thymol if you can.</a:t>
+              <a:t>Traditional use — culinary, not medicinal.</a:t>
             </a:r>
             <a:endParaRPr lang="en-US" sz="1200" dirty="0"/>
           </a:p>
+        </p:txBody>
+      </p:sp>
+      <p:sp>
+        <p:nvSpPr>
+          <p:cNvPr id="5" name="Text 3"/>
+          <p:cNvSpPr/>
+          <p:nvPr/>
+        </p:nvSpPr>
+        <p:spPr>
+          <a:xfrm>
+            <a:off x="634901" y="1266974"/>
+            <a:ext cx="8102798" cy="1180802"/>
+          </a:xfrm>
+          <a:prstGeom prst="rect">
+            <a:avLst/>
+          </a:prstGeom>
+          <a:noFill/>
+          <a:ln/>
+        </p:spPr>
+        <p:txBody>
+          <a:bodyPr wrap="square" lIns="0" tIns="0" rIns="0" bIns="0" rtlCol="0" anchor="t"/>
+          <a:lstStyle/>
           <a:p>
             <a:pPr algn="l" marL="342900" indent="-342900">
               <a:lnSpc>
@@ -2640,6 +3169,30 @@
               <a:buChar char="•"/>
             </a:pPr>
             <a:r>
+              <a:rPr lang="en-US" sz="1200" dirty="0">
+                <a:solidFill>
+                  <a:srgbClr val="1C2833"/>
+                </a:solidFill>
+                <a:latin typeface="Arial" pitchFamily="34" charset="0"/>
+                <a:ea typeface="Arial" pitchFamily="34" charset="-122"/>
+                <a:cs typeface="Arial" pitchFamily="34" charset="-120"/>
+              </a:rPr>
+              <a:t>Tempered into hot oil at the start of cooking parathas, kachoris, savoury snacks.</a:t>
+            </a:r>
+            <a:endParaRPr lang="en-US" sz="1200" dirty="0"/>
+          </a:p>
+          <a:p>
+            <a:pPr algn="l" marL="342900" indent="-342900">
+              <a:lnSpc>
+                <a:spcPts val="1620"/>
+              </a:lnSpc>
+              <a:spcAft>
+                <a:spcPts val="300"/>
+              </a:spcAft>
+              <a:buSzPct val="100000"/>
+              <a:buChar char="•"/>
+            </a:pPr>
+            <a:r>
               <a:rPr lang="en-US" sz="1200" b="1" dirty="0">
                 <a:solidFill>
                   <a:srgbClr val="1C2833"/>
@@ -2648,7 +3201,7 @@
                 <a:ea typeface="Arial" pitchFamily="34" charset="-122"/>
                 <a:cs typeface="Arial" pitchFamily="34" charset="-120"/>
               </a:rPr>
-              <a:t>One tier down:</a:t>
+              <a:t>Ajwain water</a:t>
             </a:r>
             <a:pPr algn="l" indent="0" marL="0">
               <a:lnSpc>
@@ -2668,15 +3221,39 @@
                 <a:ea typeface="Arial" pitchFamily="34" charset="-122"/>
                 <a:cs typeface="Arial" pitchFamily="34" charset="-120"/>
               </a:rPr>
-              <a:t> Focus on identifying ajwain seeds by smell and naming the compound "thymol."</a:t>
+              <a:t> — a common Indian household remedy: 1 tsp ajwain steeped in 200 ml hot water for 5–10 minutes, strained, drunk warm. Used for indigestion, bloating, mild stomach discomfort.</a:t>
             </a:r>
             <a:endParaRPr lang="en-US" sz="1200" dirty="0"/>
           </a:p>
-        </p:txBody>
-      </p:sp>
-      <p:sp>
-        <p:nvSpPr>
-          <p:cNvPr id="5" name="Text 3"/>
+          <a:p>
+            <a:pPr algn="l" marL="342900" indent="-342900">
+              <a:lnSpc>
+                <a:spcPts val="1620"/>
+              </a:lnSpc>
+              <a:spcAft>
+                <a:spcPts val="300"/>
+              </a:spcAft>
+              <a:buSzPct val="100000"/>
+              <a:buChar char="•"/>
+            </a:pPr>
+            <a:r>
+              <a:rPr lang="en-US" sz="1200" dirty="0">
+                <a:solidFill>
+                  <a:srgbClr val="1C2833"/>
+                </a:solidFill>
+                <a:latin typeface="Arial" pitchFamily="34" charset="0"/>
+                <a:ea typeface="Arial" pitchFamily="34" charset="-122"/>
+                <a:cs typeface="Arial" pitchFamily="34" charset="-120"/>
+              </a:rPr>
+              <a:t>Often added to flour-based foods that are heavy on starch (parathas, samosas) — the carminative effect helps with the digestive load.</a:t>
+            </a:r>
+            <a:endParaRPr lang="en-US" sz="1200" dirty="0"/>
+          </a:p>
+        </p:txBody>
+      </p:sp>
+      <p:sp>
+        <p:nvSpPr>
+          <p:cNvPr id="6" name="Text 4"/>
           <p:cNvSpPr/>
           <p:nvPr/>
         </p:nvSpPr>
@@ -2826,7 +3403,7 @@
                 <a:ea typeface="Georgia" pitchFamily="34" charset="-122"/>
                 <a:cs typeface="Georgia" pitchFamily="34" charset="-120"/>
               </a:rPr>
-              <a:t>Teacher notes</a:t>
+              <a:t>Core (20 min) (cont.)</a:t>
             </a:r>
             <a:endParaRPr lang="en-US" sz="1800" dirty="0"/>
           </a:p>
@@ -2840,8 +3417,8 @@
         </p:nvSpPr>
         <p:spPr>
           <a:xfrm>
-            <a:off x="406301" y="870942"/>
-            <a:ext cx="8498026" cy="1066354"/>
+            <a:off x="634901" y="883593"/>
+            <a:ext cx="8102798" cy="281880"/>
           </a:xfrm>
           <a:prstGeom prst="rect">
             <a:avLst/>
@@ -2853,13 +3430,77 @@
           <a:bodyPr wrap="square" lIns="0" tIns="0" rIns="0" bIns="0" rtlCol="0" anchor="t"/>
           <a:lstStyle/>
           <a:p>
-            <a:pPr algn="l" indent="0" marL="0">
-              <a:lnSpc>
-                <a:spcPts val="1680"/>
-              </a:lnSpc>
-              <a:spcBef>
-                <a:spcPts val="300"/>
-              </a:spcBef>
+            <a:pPr algn="l" marL="342900" indent="-342900">
+              <a:lnSpc>
+                <a:spcPts val="1620"/>
+              </a:lnSpc>
+              <a:spcAft>
+                <a:spcPts val="300"/>
+              </a:spcAft>
+              <a:buSzPct val="100000"/>
+              <a:buChar char="•"/>
+            </a:pPr>
+            <a:r>
+              <a:rPr lang="en-US" sz="1200" b="1" dirty="0">
+                <a:solidFill>
+                  <a:srgbClr val="1C2833"/>
+                </a:solidFill>
+                <a:latin typeface="Arial" pitchFamily="34" charset="0"/>
+                <a:ea typeface="Arial" pitchFamily="34" charset="-122"/>
+                <a:cs typeface="Arial" pitchFamily="34" charset="-120"/>
+              </a:rPr>
+              <a:t>Honest evidence summary.</a:t>
+            </a:r>
+            <a:endParaRPr lang="en-US" sz="1200" dirty="0"/>
+          </a:p>
+        </p:txBody>
+      </p:sp>
+      <p:sp>
+        <p:nvSpPr>
+          <p:cNvPr id="5" name="Text 3"/>
+          <p:cNvSpPr/>
+          <p:nvPr/>
+        </p:nvSpPr>
+        <p:spPr>
+          <a:xfrm>
+            <a:off x="634901" y="1266974"/>
+            <a:ext cx="8102798" cy="1386483"/>
+          </a:xfrm>
+          <a:prstGeom prst="rect">
+            <a:avLst/>
+          </a:prstGeom>
+          <a:noFill/>
+          <a:ln/>
+        </p:spPr>
+        <p:txBody>
+          <a:bodyPr wrap="square" lIns="0" tIns="0" rIns="0" bIns="0" rtlCol="0" anchor="t"/>
+          <a:lstStyle/>
+          <a:p>
+            <a:pPr algn="l" marL="342900" indent="-342900">
+              <a:lnSpc>
+                <a:spcPts val="1620"/>
+              </a:lnSpc>
+              <a:spcAft>
+                <a:spcPts val="300"/>
+              </a:spcAft>
+              <a:buSzPct val="100000"/>
+              <a:buChar char="•"/>
+            </a:pPr>
+            <a:r>
+              <a:rPr lang="en-US" sz="1200" b="1" dirty="0">
+                <a:solidFill>
+                  <a:srgbClr val="1C2833"/>
+                </a:solidFill>
+                <a:latin typeface="Arial" pitchFamily="34" charset="0"/>
+                <a:ea typeface="Arial" pitchFamily="34" charset="-122"/>
+                <a:cs typeface="Arial" pitchFamily="34" charset="-120"/>
+              </a:rPr>
+              <a:t>Mechanism evidence:</a:t>
+            </a:r>
+            <a:pPr algn="l" indent="0" marL="0">
+              <a:lnSpc>
+                <a:spcPts val="1620"/>
+              </a:lnSpc>
               <a:spcAft>
                 <a:spcPts val="300"/>
               </a:spcAft>
@@ -2874,19 +3515,20 @@
                 <a:ea typeface="Arial" pitchFamily="34" charset="-122"/>
                 <a:cs typeface="Arial" pitchFamily="34" charset="-120"/>
               </a:rPr>
-              <a:t>– The </a:t>
-            </a:r>
-            <a:pPr algn="l" indent="0" marL="0">
-              <a:lnSpc>
-                <a:spcPts val="1680"/>
-              </a:lnSpc>
-              <a:spcBef>
-                <a:spcPts val="300"/>
-              </a:spcBef>
-              <a:spcAft>
-                <a:spcPts val="300"/>
-              </a:spcAft>
-              <a:buNone/>
+              <a:t> thymol relaxes gut smooth muscle and has antimicrobial action. Well established at the lab level.</a:t>
+            </a:r>
+            <a:endParaRPr lang="en-US" sz="1200" dirty="0"/>
+          </a:p>
+          <a:p>
+            <a:pPr algn="l" marL="342900" indent="-342900">
+              <a:lnSpc>
+                <a:spcPts val="1620"/>
+              </a:lnSpc>
+              <a:spcAft>
+                <a:spcPts val="300"/>
+              </a:spcAft>
+              <a:buSzPct val="100000"/>
+              <a:buChar char="•"/>
             </a:pPr>
             <a:r>
               <a:rPr lang="en-US" sz="1200" b="1" dirty="0">
@@ -2897,15 +3539,12 @@
                 <a:ea typeface="Arial" pitchFamily="34" charset="-122"/>
                 <a:cs typeface="Arial" pitchFamily="34" charset="-120"/>
               </a:rPr>
-              <a:t>crushed-seed smell intensification</a:t>
-            </a:r>
-            <a:pPr algn="l" indent="0" marL="0">
-              <a:lnSpc>
-                <a:spcPts val="1680"/>
-              </a:lnSpc>
-              <a:spcBef>
-                <a:spcPts val="300"/>
-              </a:spcBef>
+              <a:t>Clinical evidence:</a:t>
+            </a:r>
+            <a:pPr algn="l" indent="0" marL="0">
+              <a:lnSpc>
+                <a:spcPts val="1620"/>
+              </a:lnSpc>
               <a:spcAft>
                 <a:spcPts val="300"/>
               </a:spcAft>
@@ -2920,15 +3559,139 @@
                 <a:ea typeface="Arial" pitchFamily="34" charset="-122"/>
                 <a:cs typeface="Arial" pitchFamily="34" charset="-120"/>
               </a:rPr>
-              <a:t> is the most memorable hands-on of the day. Make sure every student gets to crush their own seeds. The "oh wow" reaction is the lesson. – The Indian-borage / ajwain-leaf confusion is real and you'll get questions. Acknowledge — "the leaf you find in shops is from a different plant that smells similar" — but don't make the module about taxonomy. – The ajwain-water demo is one of the safer cooking-adjacent demos. Even so: don't have students drink from a shared glass. Demonstrate; don't distribute.</a:t>
+              <a:t> for </a:t>
+            </a:r>
+            <a:pPr algn="l" indent="0" marL="0">
+              <a:lnSpc>
+                <a:spcPts val="1620"/>
+              </a:lnSpc>
+              <a:spcAft>
+                <a:spcPts val="300"/>
+              </a:spcAft>
+              <a:buNone/>
+            </a:pPr>
+            <a:r>
+              <a:rPr lang="en-US" sz="1200" i="1" dirty="0">
+                <a:solidFill>
+                  <a:srgbClr val="1C2833"/>
+                </a:solidFill>
+                <a:latin typeface="Arial" pitchFamily="34" charset="0"/>
+                <a:ea typeface="Arial" pitchFamily="34" charset="-122"/>
+                <a:cs typeface="Arial" pitchFamily="34" charset="-120"/>
+              </a:rPr>
+              <a:t>general indigestion / dyspepsia</a:t>
+            </a:r>
+            <a:pPr algn="l" indent="0" marL="0">
+              <a:lnSpc>
+                <a:spcPts val="1620"/>
+              </a:lnSpc>
+              <a:spcAft>
+                <a:spcPts val="300"/>
+              </a:spcAft>
+              <a:buNone/>
+            </a:pPr>
+            <a:r>
+              <a:rPr lang="en-US" sz="1200" dirty="0">
+                <a:solidFill>
+                  <a:srgbClr val="1C2833"/>
+                </a:solidFill>
+                <a:latin typeface="Arial" pitchFamily="34" charset="0"/>
+                <a:ea typeface="Arial" pitchFamily="34" charset="-122"/>
+                <a:cs typeface="Arial" pitchFamily="34" charset="-120"/>
+              </a:rPr>
+              <a:t>, the clinical trial picture is small but generally positive for thymol-containing preparations.</a:t>
             </a:r>
             <a:endParaRPr lang="en-US" sz="1200" dirty="0"/>
           </a:p>
-        </p:txBody>
-      </p:sp>
-      <p:sp>
-        <p:nvSpPr>
-          <p:cNvPr id="5" name="Text 3"/>
+          <a:p>
+            <a:pPr algn="l" marL="342900" indent="-342900">
+              <a:lnSpc>
+                <a:spcPts val="1620"/>
+              </a:lnSpc>
+              <a:spcAft>
+                <a:spcPts val="300"/>
+              </a:spcAft>
+              <a:buSzPct val="100000"/>
+              <a:buChar char="•"/>
+            </a:pPr>
+            <a:r>
+              <a:rPr lang="en-US" sz="1200" b="1" dirty="0">
+                <a:solidFill>
+                  <a:srgbClr val="1C2833"/>
+                </a:solidFill>
+                <a:latin typeface="Arial" pitchFamily="34" charset="0"/>
+                <a:ea typeface="Arial" pitchFamily="34" charset="-122"/>
+                <a:cs typeface="Arial" pitchFamily="34" charset="-120"/>
+              </a:rPr>
+              <a:t>Cautions:</a:t>
+            </a:r>
+            <a:pPr algn="l" indent="0" marL="0">
+              <a:lnSpc>
+                <a:spcPts val="1620"/>
+              </a:lnSpc>
+              <a:spcAft>
+                <a:spcPts val="300"/>
+              </a:spcAft>
+              <a:buNone/>
+            </a:pPr>
+            <a:r>
+              <a:rPr lang="en-US" sz="1200" dirty="0">
+                <a:solidFill>
+                  <a:srgbClr val="1C2833"/>
+                </a:solidFill>
+                <a:latin typeface="Arial" pitchFamily="34" charset="0"/>
+                <a:ea typeface="Arial" pitchFamily="34" charset="-122"/>
+                <a:cs typeface="Arial" pitchFamily="34" charset="-120"/>
+              </a:rPr>
+              <a:t> essential oils made from ajwain are extremely concentrated — multi-fold more thymol per drop than the whole spice. </a:t>
+            </a:r>
+            <a:pPr algn="l" indent="0" marL="0">
+              <a:lnSpc>
+                <a:spcPts val="1620"/>
+              </a:lnSpc>
+              <a:spcAft>
+                <a:spcPts val="300"/>
+              </a:spcAft>
+              <a:buNone/>
+            </a:pPr>
+            <a:r>
+              <a:rPr lang="en-US" sz="1200" b="1" dirty="0">
+                <a:solidFill>
+                  <a:srgbClr val="1C2833"/>
+                </a:solidFill>
+                <a:latin typeface="Arial" pitchFamily="34" charset="0"/>
+                <a:ea typeface="Arial" pitchFamily="34" charset="-122"/>
+                <a:cs typeface="Arial" pitchFamily="34" charset="-120"/>
+              </a:rPr>
+              <a:t>Not for ingestion at school age.</a:t>
+            </a:r>
+            <a:pPr algn="l" indent="0" marL="0">
+              <a:lnSpc>
+                <a:spcPts val="1620"/>
+              </a:lnSpc>
+              <a:spcAft>
+                <a:spcPts val="300"/>
+              </a:spcAft>
+              <a:buNone/>
+            </a:pPr>
+            <a:r>
+              <a:rPr lang="en-US" sz="1200" dirty="0">
+                <a:solidFill>
+                  <a:srgbClr val="1C2833"/>
+                </a:solidFill>
+                <a:latin typeface="Arial" pitchFamily="34" charset="0"/>
+                <a:ea typeface="Arial" pitchFamily="34" charset="-122"/>
+                <a:cs typeface="Arial" pitchFamily="34" charset="-120"/>
+              </a:rPr>
+              <a:t> The whole seed in food is a different scale entirely.</a:t>
+            </a:r>
+            <a:endParaRPr lang="en-US" sz="1200" dirty="0"/>
+          </a:p>
+        </p:txBody>
+      </p:sp>
+      <p:sp>
+        <p:nvSpPr>
+          <p:cNvPr id="6" name="Text 4"/>
           <p:cNvSpPr/>
           <p:nvPr/>
         </p:nvSpPr>
@@ -3078,7 +3841,7 @@
                 <a:ea typeface="Georgia" pitchFamily="34" charset="-122"/>
                 <a:cs typeface="Georgia" pitchFamily="34" charset="-120"/>
               </a:rPr>
-              <a:t>Citation(s) used in this lesson</a:t>
+              <a:t>Core (20 min) (cont.)</a:t>
             </a:r>
             <a:endParaRPr lang="en-US" sz="1800" dirty="0"/>
           </a:p>
@@ -3092,8 +3855,8 @@
         </p:nvSpPr>
         <p:spPr>
           <a:xfrm>
-            <a:off x="406301" y="870942"/>
-            <a:ext cx="8498026" cy="639812"/>
+            <a:off x="634901" y="883593"/>
+            <a:ext cx="8102798" cy="487561"/>
           </a:xfrm>
           <a:prstGeom prst="rect">
             <a:avLst/>
@@ -3105,13 +3868,31 @@
           <a:bodyPr wrap="square" lIns="0" tIns="0" rIns="0" bIns="0" rtlCol="0" anchor="t"/>
           <a:lstStyle/>
           <a:p>
-            <a:pPr algn="l" indent="0" marL="0">
-              <a:lnSpc>
-                <a:spcPts val="1680"/>
-              </a:lnSpc>
-              <a:spcBef>
-                <a:spcPts val="300"/>
-              </a:spcBef>
+            <a:pPr algn="l" marL="342900" indent="-342900">
+              <a:lnSpc>
+                <a:spcPts val="1620"/>
+              </a:lnSpc>
+              <a:spcAft>
+                <a:spcPts val="300"/>
+              </a:spcAft>
+              <a:buSzPct val="100000"/>
+              <a:buChar char="•"/>
+            </a:pPr>
+            <a:r>
+              <a:rPr lang="en-US" sz="1200" b="1" dirty="0">
+                <a:solidFill>
+                  <a:srgbClr val="1C2833"/>
+                </a:solidFill>
+                <a:latin typeface="Arial" pitchFamily="34" charset="0"/>
+                <a:ea typeface="Arial" pitchFamily="34" charset="-122"/>
+                <a:cs typeface="Arial" pitchFamily="34" charset="-120"/>
+              </a:rPr>
+              <a:t>The doṣa frame.</a:t>
+            </a:r>
+            <a:pPr algn="l" indent="0" marL="0">
+              <a:lnSpc>
+                <a:spcPts val="1620"/>
+              </a:lnSpc>
               <a:spcAft>
                 <a:spcPts val="300"/>
               </a:spcAft>
@@ -3126,15 +3907,12 @@
                 <a:ea typeface="Arial" pitchFamily="34" charset="-122"/>
                 <a:cs typeface="Arial" pitchFamily="34" charset="-120"/>
               </a:rPr>
-              <a:t>– Thymol as principal volatile in </a:t>
-            </a:r>
-            <a:pPr algn="l" indent="0" marL="0">
-              <a:lnSpc>
-                <a:spcPts val="1680"/>
-              </a:lnSpc>
-              <a:spcBef>
-                <a:spcPts val="300"/>
-              </a:spcBef>
+              <a:t> </a:t>
+            </a:r>
+            <a:pPr algn="l" indent="0" marL="0">
+              <a:lnSpc>
+                <a:spcPts val="1620"/>
+              </a:lnSpc>
               <a:spcAft>
                 <a:spcPts val="300"/>
               </a:spcAft>
@@ -3149,15 +3927,12 @@
                 <a:ea typeface="Arial" pitchFamily="34" charset="-122"/>
                 <a:cs typeface="Arial" pitchFamily="34" charset="-120"/>
               </a:rPr>
-              <a:t>Trachyspermum ammi</a:t>
-            </a:r>
-            <a:pPr algn="l" indent="0" marL="0">
-              <a:lnSpc>
-                <a:spcPts val="1680"/>
-              </a:lnSpc>
-              <a:spcBef>
-                <a:spcPts val="300"/>
-              </a:spcBef>
+              <a:t>Yavānī</a:t>
+            </a:r>
+            <a:pPr algn="l" indent="0" marL="0">
+              <a:lnSpc>
+                <a:spcPts val="1620"/>
+              </a:lnSpc>
               <a:spcAft>
                 <a:spcPts val="300"/>
               </a:spcAft>
@@ -3172,7 +3947,207 @@
                 <a:ea typeface="Arial" pitchFamily="34" charset="-122"/>
                 <a:cs typeface="Arial" pitchFamily="34" charset="-120"/>
               </a:rPr>
-              <a:t>: standard ethnopharmacology / phytochemistry reference. – Carminative mechanism of thymol: well-established at lab level; clinical evidence reviewed in standard ethnopharmacology journals. No specific paper cited.</a:t>
+              <a:t> is </a:t>
+            </a:r>
+            <a:pPr algn="l" indent="0" marL="0">
+              <a:lnSpc>
+                <a:spcPts val="1620"/>
+              </a:lnSpc>
+              <a:spcAft>
+                <a:spcPts val="300"/>
+              </a:spcAft>
+              <a:buNone/>
+            </a:pPr>
+            <a:r>
+              <a:rPr lang="en-US" sz="1200" i="1" dirty="0">
+                <a:solidFill>
+                  <a:srgbClr val="1C2833"/>
+                </a:solidFill>
+                <a:latin typeface="Arial" pitchFamily="34" charset="0"/>
+                <a:ea typeface="Arial" pitchFamily="34" charset="-122"/>
+                <a:cs typeface="Arial" pitchFamily="34" charset="-120"/>
+              </a:rPr>
+              <a:t>kaṭu</a:t>
+            </a:r>
+            <a:pPr algn="l" indent="0" marL="0">
+              <a:lnSpc>
+                <a:spcPts val="1620"/>
+              </a:lnSpc>
+              <a:spcAft>
+                <a:spcPts val="300"/>
+              </a:spcAft>
+              <a:buNone/>
+            </a:pPr>
+            <a:r>
+              <a:rPr lang="en-US" sz="1200" dirty="0">
+                <a:solidFill>
+                  <a:srgbClr val="1C2833"/>
+                </a:solidFill>
+                <a:latin typeface="Arial" pitchFamily="34" charset="0"/>
+                <a:ea typeface="Arial" pitchFamily="34" charset="-122"/>
+                <a:cs typeface="Arial" pitchFamily="34" charset="-120"/>
+              </a:rPr>
+              <a:t> (pungent) and </a:t>
+            </a:r>
+            <a:pPr algn="l" indent="0" marL="0">
+              <a:lnSpc>
+                <a:spcPts val="1620"/>
+              </a:lnSpc>
+              <a:spcAft>
+                <a:spcPts val="300"/>
+              </a:spcAft>
+              <a:buNone/>
+            </a:pPr>
+            <a:r>
+              <a:rPr lang="en-US" sz="1200" i="1" dirty="0">
+                <a:solidFill>
+                  <a:srgbClr val="1C2833"/>
+                </a:solidFill>
+                <a:latin typeface="Arial" pitchFamily="34" charset="0"/>
+                <a:ea typeface="Arial" pitchFamily="34" charset="-122"/>
+                <a:cs typeface="Arial" pitchFamily="34" charset="-120"/>
+              </a:rPr>
+              <a:t>tikta</a:t>
+            </a:r>
+            <a:pPr algn="l" indent="0" marL="0">
+              <a:lnSpc>
+                <a:spcPts val="1620"/>
+              </a:lnSpc>
+              <a:spcAft>
+                <a:spcPts val="300"/>
+              </a:spcAft>
+              <a:buNone/>
+            </a:pPr>
+            <a:r>
+              <a:rPr lang="en-US" sz="1200" dirty="0">
+                <a:solidFill>
+                  <a:srgbClr val="1C2833"/>
+                </a:solidFill>
+                <a:latin typeface="Arial" pitchFamily="34" charset="0"/>
+                <a:ea typeface="Arial" pitchFamily="34" charset="-122"/>
+                <a:cs typeface="Arial" pitchFamily="34" charset="-120"/>
+              </a:rPr>
+              <a:t> (bitter), </a:t>
+            </a:r>
+            <a:pPr algn="l" indent="0" marL="0">
+              <a:lnSpc>
+                <a:spcPts val="1620"/>
+              </a:lnSpc>
+              <a:spcAft>
+                <a:spcPts val="300"/>
+              </a:spcAft>
+              <a:buNone/>
+            </a:pPr>
+            <a:r>
+              <a:rPr lang="en-US" sz="1200" i="1" dirty="0">
+                <a:solidFill>
+                  <a:srgbClr val="1C2833"/>
+                </a:solidFill>
+                <a:latin typeface="Arial" pitchFamily="34" charset="0"/>
+                <a:ea typeface="Arial" pitchFamily="34" charset="-122"/>
+                <a:cs typeface="Arial" pitchFamily="34" charset="-120"/>
+              </a:rPr>
+              <a:t>uṣṇa</a:t>
+            </a:r>
+            <a:pPr algn="l" indent="0" marL="0">
+              <a:lnSpc>
+                <a:spcPts val="1620"/>
+              </a:lnSpc>
+              <a:spcAft>
+                <a:spcPts val="300"/>
+              </a:spcAft>
+              <a:buNone/>
+            </a:pPr>
+            <a:r>
+              <a:rPr lang="en-US" sz="1200" dirty="0">
+                <a:solidFill>
+                  <a:srgbClr val="1C2833"/>
+                </a:solidFill>
+                <a:latin typeface="Arial" pitchFamily="34" charset="0"/>
+                <a:ea typeface="Arial" pitchFamily="34" charset="-122"/>
+                <a:cs typeface="Arial" pitchFamily="34" charset="-120"/>
+              </a:rPr>
+              <a:t> (heating). Considered to balance </a:t>
+            </a:r>
+            <a:pPr algn="l" indent="0" marL="0">
+              <a:lnSpc>
+                <a:spcPts val="1620"/>
+              </a:lnSpc>
+              <a:spcAft>
+                <a:spcPts val="300"/>
+              </a:spcAft>
+              <a:buNone/>
+            </a:pPr>
+            <a:r>
+              <a:rPr lang="en-US" sz="1200" i="1" dirty="0">
+                <a:solidFill>
+                  <a:srgbClr val="1C2833"/>
+                </a:solidFill>
+                <a:latin typeface="Arial" pitchFamily="34" charset="0"/>
+                <a:ea typeface="Arial" pitchFamily="34" charset="-122"/>
+                <a:cs typeface="Arial" pitchFamily="34" charset="-120"/>
+              </a:rPr>
+              <a:t>vāta</a:t>
+            </a:r>
+            <a:pPr algn="l" indent="0" marL="0">
+              <a:lnSpc>
+                <a:spcPts val="1620"/>
+              </a:lnSpc>
+              <a:spcAft>
+                <a:spcPts val="300"/>
+              </a:spcAft>
+              <a:buNone/>
+            </a:pPr>
+            <a:r>
+              <a:rPr lang="en-US" sz="1200" dirty="0">
+                <a:solidFill>
+                  <a:srgbClr val="1C2833"/>
+                </a:solidFill>
+                <a:latin typeface="Arial" pitchFamily="34" charset="0"/>
+                <a:ea typeface="Arial" pitchFamily="34" charset="-122"/>
+                <a:cs typeface="Arial" pitchFamily="34" charset="-120"/>
+              </a:rPr>
+              <a:t> and </a:t>
+            </a:r>
+            <a:pPr algn="l" indent="0" marL="0">
+              <a:lnSpc>
+                <a:spcPts val="1620"/>
+              </a:lnSpc>
+              <a:spcAft>
+                <a:spcPts val="300"/>
+              </a:spcAft>
+              <a:buNone/>
+            </a:pPr>
+            <a:r>
+              <a:rPr lang="en-US" sz="1200" i="1" dirty="0">
+                <a:solidFill>
+                  <a:srgbClr val="1C2833"/>
+                </a:solidFill>
+                <a:latin typeface="Arial" pitchFamily="34" charset="0"/>
+                <a:ea typeface="Arial" pitchFamily="34" charset="-122"/>
+                <a:cs typeface="Arial" pitchFamily="34" charset="-120"/>
+              </a:rPr>
+              <a:t>kapha</a:t>
+            </a:r>
+            <a:pPr algn="l" indent="0" marL="0">
+              <a:lnSpc>
+                <a:spcPts val="1620"/>
+              </a:lnSpc>
+              <a:spcAft>
+                <a:spcPts val="300"/>
+              </a:spcAft>
+              <a:buNone/>
+            </a:pPr>
+            <a:r>
+              <a:rPr lang="en-US" sz="1200" dirty="0">
+                <a:solidFill>
+                  <a:srgbClr val="1C2833"/>
+                </a:solidFill>
+                <a:latin typeface="Arial" pitchFamily="34" charset="0"/>
+                <a:ea typeface="Arial" pitchFamily="34" charset="-122"/>
+                <a:cs typeface="Arial" pitchFamily="34" charset="-120"/>
+              </a:rPr>
+              <a:t> (mainly by stimulating digestion).</a:t>
             </a:r>
             <a:endParaRPr lang="en-US" sz="1200" dirty="0"/>
           </a:p>
@@ -3186,7 +4161,893 @@
         </p:nvSpPr>
         <p:spPr>
           <a:xfrm>
-            <a:off x="634901" y="1599605"/>
+            <a:off x="406301" y="4434929"/>
+            <a:ext cx="8498026" cy="213271"/>
+          </a:xfrm>
+          <a:prstGeom prst="rect">
+            <a:avLst/>
+          </a:prstGeom>
+          <a:noFill/>
+          <a:ln/>
+        </p:spPr>
+        <p:txBody>
+          <a:bodyPr wrap="square" lIns="0" tIns="0" rIns="0" bIns="0" rtlCol="0" anchor="t"/>
+          <a:lstStyle/>
+          <a:p>
+            <a:pPr algn="l" indent="0" marL="0">
+              <a:lnSpc>
+                <a:spcPts val="1680"/>
+              </a:lnSpc>
+              <a:spcBef>
+                <a:spcPts val="300"/>
+              </a:spcBef>
+              <a:spcAft>
+                <a:spcPts val="300"/>
+              </a:spcAft>
+              <a:buNone/>
+            </a:pPr>
+            <a:r>
+              <a:rPr lang="en-US" sz="1200" dirty="0">
+                <a:solidFill>
+                  <a:srgbClr val="1C2833"/>
+                </a:solidFill>
+                <a:latin typeface="Arial" pitchFamily="34" charset="0"/>
+                <a:ea typeface="Arial" pitchFamily="34" charset="-122"/>
+                <a:cs typeface="Arial" pitchFamily="34" charset="-120"/>
+              </a:rPr>
+              <a:t>Middle ·  · IKS Curriculum</a:t>
+            </a:r>
+            <a:endParaRPr lang="en-US" sz="1200" dirty="0"/>
+          </a:p>
+        </p:txBody>
+      </p:sp>
+    </p:spTree>
+  </p:cSld>
+  <p:clrMapOvr>
+    <a:masterClrMapping/>
+  </p:clrMapOvr>
+</p:sld>
+</file>
+
+<file path=ppt/slides/slide13.xml><?xml version="1.0" encoding="utf-8"?>
+<p:sld xmlns:a="http://schemas.openxmlformats.org/drawingml/2006/main" xmlns:r="http://schemas.openxmlformats.org/officeDocument/2006/relationships" xmlns:p="http://schemas.openxmlformats.org/presentationml/2006/main">
+  <p:cSld name="Slide 13">
+    <p:bg>
+      <p:bgPr>
+        <a:solidFill>
+          <a:srgbClr val="FFFFFF"/>
+        </a:solidFill>
+      </p:bgPr>
+    </p:bg>
+    <p:spTree>
+      <p:nvGrpSpPr>
+        <p:cNvPr id="1" name=""/>
+        <p:cNvGrpSpPr/>
+        <p:nvPr/>
+      </p:nvGrpSpPr>
+      <p:grpSpPr>
+        <a:xfrm>
+          <a:off x="0" y="0"/>
+          <a:ext cx="0" cy="0"/>
+          <a:chOff x="0" y="0"/>
+          <a:chExt cx="0" cy="0"/>
+        </a:xfrm>
+      </p:grpSpPr>
+      <p:sp>
+        <p:nvSpPr>
+          <p:cNvPr id="2" name="Text 0"/>
+          <p:cNvSpPr/>
+          <p:nvPr/>
+        </p:nvSpPr>
+        <p:spPr>
+          <a:xfrm>
+            <a:off x="0" y="0"/>
+            <a:ext cx="9144000" cy="101501"/>
+          </a:xfrm>
+          <a:prstGeom prst="rect">
+            <a:avLst/>
+          </a:prstGeom>
+          <a:solidFill>
+            <a:srgbClr val="277884"/>
+          </a:solidFill>
+          <a:ln/>
+        </p:spPr>
+        <p:txBody>
+          <a:bodyPr wrap="square" rtlCol="0" anchor="ctr"/>
+          <a:lstStyle/>
+          <a:p>
+            <a:pPr indent="0" marL="0">
+              <a:buNone/>
+            </a:pPr>
+            <a:endParaRPr lang="en-US" dirty="0"/>
+          </a:p>
+        </p:txBody>
+      </p:sp>
+      <p:sp>
+        <p:nvSpPr>
+          <p:cNvPr id="3" name="Text 1"/>
+          <p:cNvSpPr/>
+          <p:nvPr/>
+        </p:nvSpPr>
+        <p:spPr>
+          <a:xfrm>
+            <a:off x="406301" y="457051"/>
+            <a:ext cx="8498026" cy="274290"/>
+          </a:xfrm>
+          <a:prstGeom prst="rect">
+            <a:avLst/>
+          </a:prstGeom>
+          <a:noFill/>
+          <a:ln/>
+        </p:spPr>
+        <p:txBody>
+          <a:bodyPr wrap="square" lIns="0" tIns="0" rIns="0" bIns="0" rtlCol="0" anchor="t"/>
+          <a:lstStyle/>
+          <a:p>
+            <a:pPr algn="l" indent="0" marL="0">
+              <a:lnSpc>
+                <a:spcPts val="2160"/>
+              </a:lnSpc>
+              <a:spcBef>
+                <a:spcPts val="600"/>
+              </a:spcBef>
+              <a:spcAft>
+                <a:spcPts val="800"/>
+              </a:spcAft>
+              <a:buNone/>
+            </a:pPr>
+            <a:r>
+              <a:rPr lang="en-US" sz="1800" b="1" dirty="0">
+                <a:solidFill>
+                  <a:srgbClr val="FE4447"/>
+                </a:solidFill>
+                <a:latin typeface="Georgia" pitchFamily="34" charset="0"/>
+                <a:ea typeface="Georgia" pitchFamily="34" charset="-122"/>
+                <a:cs typeface="Georgia" pitchFamily="34" charset="-120"/>
+              </a:rPr>
+              <a:t>Activity (15 min) — Ajwain-water demo + Compare to thyme</a:t>
+            </a:r>
+            <a:endParaRPr lang="en-US" sz="1800" dirty="0"/>
+          </a:p>
+        </p:txBody>
+      </p:sp>
+      <p:sp>
+        <p:nvSpPr>
+          <p:cNvPr id="4" name="Text 2"/>
+          <p:cNvSpPr/>
+          <p:nvPr/>
+        </p:nvSpPr>
+        <p:spPr>
+          <a:xfrm>
+            <a:off x="406301" y="870942"/>
+            <a:ext cx="8498026" cy="213271"/>
+          </a:xfrm>
+          <a:prstGeom prst="rect">
+            <a:avLst/>
+          </a:prstGeom>
+          <a:noFill/>
+          <a:ln/>
+        </p:spPr>
+        <p:txBody>
+          <a:bodyPr wrap="square" lIns="0" tIns="0" rIns="0" bIns="0" rtlCol="0" anchor="t"/>
+          <a:lstStyle/>
+          <a:p>
+            <a:pPr algn="l" indent="0" marL="0">
+              <a:lnSpc>
+                <a:spcPts val="1680"/>
+              </a:lnSpc>
+              <a:spcBef>
+                <a:spcPts val="300"/>
+              </a:spcBef>
+              <a:spcAft>
+                <a:spcPts val="300"/>
+              </a:spcAft>
+              <a:buNone/>
+            </a:pPr>
+            <a:r>
+              <a:rPr lang="en-US" sz="1200" b="1" dirty="0">
+                <a:solidFill>
+                  <a:srgbClr val="1C2833"/>
+                </a:solidFill>
+                <a:latin typeface="Arial" pitchFamily="34" charset="0"/>
+                <a:ea typeface="Arial" pitchFamily="34" charset="-122"/>
+                <a:cs typeface="Arial" pitchFamily="34" charset="-120"/>
+              </a:rPr>
+              <a:t>Demo (5 min):</a:t>
+            </a:r>
+            <a:endParaRPr lang="en-US" sz="1200" dirty="0"/>
+          </a:p>
+        </p:txBody>
+      </p:sp>
+      <p:sp>
+        <p:nvSpPr>
+          <p:cNvPr id="5" name="Text 3"/>
+          <p:cNvSpPr/>
+          <p:nvPr/>
+        </p:nvSpPr>
+        <p:spPr>
+          <a:xfrm>
+            <a:off x="634901" y="1173063"/>
+            <a:ext cx="8102798" cy="1013222"/>
+          </a:xfrm>
+          <a:prstGeom prst="rect">
+            <a:avLst/>
+          </a:prstGeom>
+          <a:noFill/>
+          <a:ln/>
+        </p:spPr>
+        <p:txBody>
+          <a:bodyPr wrap="square" lIns="0" tIns="0" rIns="0" bIns="0" rtlCol="0" anchor="t"/>
+          <a:lstStyle/>
+          <a:p>
+            <a:pPr algn="l" marL="342900" indent="-342900">
+              <a:lnSpc>
+                <a:spcPts val="1620"/>
+              </a:lnSpc>
+              <a:spcAft>
+                <a:spcPts val="300"/>
+              </a:spcAft>
+              <a:buSzPct val="100000"/>
+              <a:buChar char="•"/>
+            </a:pPr>
+            <a:r>
+              <a:rPr lang="en-US" sz="1200" dirty="0">
+                <a:solidFill>
+                  <a:srgbClr val="1C2833"/>
+                </a:solidFill>
+                <a:latin typeface="Arial" pitchFamily="34" charset="0"/>
+                <a:ea typeface="Arial" pitchFamily="34" charset="-122"/>
+                <a:cs typeface="Arial" pitchFamily="34" charset="-120"/>
+              </a:rPr>
+              <a:t>Teacher places 1 tsp ajwain in a clear glass. Pours 200 ml hot (not boiling) water over it. Covers with a saucer.</a:t>
+            </a:r>
+            <a:endParaRPr lang="en-US" sz="1200" dirty="0"/>
+          </a:p>
+          <a:p>
+            <a:pPr algn="l" marL="342900" indent="-342900">
+              <a:lnSpc>
+                <a:spcPts val="1620"/>
+              </a:lnSpc>
+              <a:spcAft>
+                <a:spcPts val="300"/>
+              </a:spcAft>
+              <a:buSzPct val="100000"/>
+              <a:buChar char="•"/>
+            </a:pPr>
+            <a:r>
+              <a:rPr lang="en-US" sz="1200" dirty="0">
+                <a:solidFill>
+                  <a:srgbClr val="1C2833"/>
+                </a:solidFill>
+                <a:latin typeface="Arial" pitchFamily="34" charset="0"/>
+                <a:ea typeface="Arial" pitchFamily="34" charset="-122"/>
+                <a:cs typeface="Arial" pitchFamily="34" charset="-120"/>
+              </a:rPr>
+              <a:t>Pass around the glass — observe the seeds float, the water gain colour, the smell rise.</a:t>
+            </a:r>
+            <a:endParaRPr lang="en-US" sz="1200" dirty="0"/>
+          </a:p>
+          <a:p>
+            <a:pPr algn="l" marL="342900" indent="-342900">
+              <a:lnSpc>
+                <a:spcPts val="1620"/>
+              </a:lnSpc>
+              <a:spcAft>
+                <a:spcPts val="300"/>
+              </a:spcAft>
+              <a:buSzPct val="100000"/>
+              <a:buChar char="•"/>
+            </a:pPr>
+            <a:r>
+              <a:rPr lang="en-US" sz="1200" dirty="0">
+                <a:solidFill>
+                  <a:srgbClr val="1C2833"/>
+                </a:solidFill>
+                <a:latin typeface="Arial" pitchFamily="34" charset="0"/>
+                <a:ea typeface="Arial" pitchFamily="34" charset="-122"/>
+                <a:cs typeface="Arial" pitchFamily="34" charset="-120"/>
+              </a:rPr>
+              <a:t>5 minutes later, uncover. The aroma is now intense.</a:t>
+            </a:r>
+            <a:endParaRPr lang="en-US" sz="1200" dirty="0"/>
+          </a:p>
+          <a:p>
+            <a:pPr algn="l" marL="342900" indent="-342900">
+              <a:lnSpc>
+                <a:spcPts val="1620"/>
+              </a:lnSpc>
+              <a:spcAft>
+                <a:spcPts val="300"/>
+              </a:spcAft>
+              <a:buSzPct val="100000"/>
+              <a:buChar char="•"/>
+            </a:pPr>
+            <a:r>
+              <a:rPr lang="en-US" sz="1200" dirty="0">
+                <a:solidFill>
+                  <a:srgbClr val="1C2833"/>
+                </a:solidFill>
+                <a:latin typeface="Arial" pitchFamily="34" charset="0"/>
+                <a:ea typeface="Arial" pitchFamily="34" charset="-122"/>
+                <a:cs typeface="Arial" pitchFamily="34" charset="-120"/>
+              </a:rPr>
+              <a:t>This is the home remedy: strain and drink warm (for the demo, don't drink — just observe).</a:t>
+            </a:r>
+            <a:endParaRPr lang="en-US" sz="1200" dirty="0"/>
+          </a:p>
+        </p:txBody>
+      </p:sp>
+      <p:sp>
+        <p:nvSpPr>
+          <p:cNvPr id="6" name="Text 4"/>
+          <p:cNvSpPr/>
+          <p:nvPr/>
+        </p:nvSpPr>
+        <p:spPr>
+          <a:xfrm>
+            <a:off x="406301" y="4434929"/>
+            <a:ext cx="8498026" cy="213271"/>
+          </a:xfrm>
+          <a:prstGeom prst="rect">
+            <a:avLst/>
+          </a:prstGeom>
+          <a:noFill/>
+          <a:ln/>
+        </p:spPr>
+        <p:txBody>
+          <a:bodyPr wrap="square" lIns="0" tIns="0" rIns="0" bIns="0" rtlCol="0" anchor="t"/>
+          <a:lstStyle/>
+          <a:p>
+            <a:pPr algn="l" indent="0" marL="0">
+              <a:lnSpc>
+                <a:spcPts val="1680"/>
+              </a:lnSpc>
+              <a:spcBef>
+                <a:spcPts val="300"/>
+              </a:spcBef>
+              <a:spcAft>
+                <a:spcPts val="300"/>
+              </a:spcAft>
+              <a:buNone/>
+            </a:pPr>
+            <a:r>
+              <a:rPr lang="en-US" sz="1200" dirty="0">
+                <a:solidFill>
+                  <a:srgbClr val="1C2833"/>
+                </a:solidFill>
+                <a:latin typeface="Arial" pitchFamily="34" charset="0"/>
+                <a:ea typeface="Arial" pitchFamily="34" charset="-122"/>
+                <a:cs typeface="Arial" pitchFamily="34" charset="-120"/>
+              </a:rPr>
+              <a:t>Middle ·  · IKS Curriculum</a:t>
+            </a:r>
+            <a:endParaRPr lang="en-US" sz="1200" dirty="0"/>
+          </a:p>
+        </p:txBody>
+      </p:sp>
+    </p:spTree>
+  </p:cSld>
+  <p:clrMapOvr>
+    <a:masterClrMapping/>
+  </p:clrMapOvr>
+</p:sld>
+</file>
+
+<file path=ppt/slides/slide14.xml><?xml version="1.0" encoding="utf-8"?>
+<p:sld xmlns:a="http://schemas.openxmlformats.org/drawingml/2006/main" xmlns:r="http://schemas.openxmlformats.org/officeDocument/2006/relationships" xmlns:p="http://schemas.openxmlformats.org/presentationml/2006/main">
+  <p:cSld name="Slide 14">
+    <p:bg>
+      <p:bgPr>
+        <a:solidFill>
+          <a:srgbClr val="FFFFFF"/>
+        </a:solidFill>
+      </p:bgPr>
+    </p:bg>
+    <p:spTree>
+      <p:nvGrpSpPr>
+        <p:cNvPr id="1" name=""/>
+        <p:cNvGrpSpPr/>
+        <p:nvPr/>
+      </p:nvGrpSpPr>
+      <p:grpSpPr>
+        <a:xfrm>
+          <a:off x="0" y="0"/>
+          <a:ext cx="0" cy="0"/>
+          <a:chOff x="0" y="0"/>
+          <a:chExt cx="0" cy="0"/>
+        </a:xfrm>
+      </p:grpSpPr>
+      <p:sp>
+        <p:nvSpPr>
+          <p:cNvPr id="2" name="Text 0"/>
+          <p:cNvSpPr/>
+          <p:nvPr/>
+        </p:nvSpPr>
+        <p:spPr>
+          <a:xfrm>
+            <a:off x="0" y="0"/>
+            <a:ext cx="9144000" cy="101501"/>
+          </a:xfrm>
+          <a:prstGeom prst="rect">
+            <a:avLst/>
+          </a:prstGeom>
+          <a:solidFill>
+            <a:srgbClr val="277884"/>
+          </a:solidFill>
+          <a:ln/>
+        </p:spPr>
+        <p:txBody>
+          <a:bodyPr wrap="square" rtlCol="0" anchor="ctr"/>
+          <a:lstStyle/>
+          <a:p>
+            <a:pPr indent="0" marL="0">
+              <a:buNone/>
+            </a:pPr>
+            <a:endParaRPr lang="en-US" dirty="0"/>
+          </a:p>
+        </p:txBody>
+      </p:sp>
+      <p:sp>
+        <p:nvSpPr>
+          <p:cNvPr id="3" name="Text 1"/>
+          <p:cNvSpPr/>
+          <p:nvPr/>
+        </p:nvSpPr>
+        <p:spPr>
+          <a:xfrm>
+            <a:off x="406301" y="457051"/>
+            <a:ext cx="8498026" cy="274290"/>
+          </a:xfrm>
+          <a:prstGeom prst="rect">
+            <a:avLst/>
+          </a:prstGeom>
+          <a:noFill/>
+          <a:ln/>
+        </p:spPr>
+        <p:txBody>
+          <a:bodyPr wrap="square" lIns="0" tIns="0" rIns="0" bIns="0" rtlCol="0" anchor="t"/>
+          <a:lstStyle/>
+          <a:p>
+            <a:pPr algn="l" indent="0" marL="0">
+              <a:lnSpc>
+                <a:spcPts val="2160"/>
+              </a:lnSpc>
+              <a:spcBef>
+                <a:spcPts val="600"/>
+              </a:spcBef>
+              <a:spcAft>
+                <a:spcPts val="800"/>
+              </a:spcAft>
+              <a:buNone/>
+            </a:pPr>
+            <a:r>
+              <a:rPr lang="en-US" sz="1800" b="1" dirty="0">
+                <a:solidFill>
+                  <a:srgbClr val="FE4447"/>
+                </a:solidFill>
+                <a:latin typeface="Georgia" pitchFamily="34" charset="0"/>
+                <a:ea typeface="Georgia" pitchFamily="34" charset="-122"/>
+                <a:cs typeface="Georgia" pitchFamily="34" charset="-120"/>
+              </a:rPr>
+              <a:t>Activity (15 min) — Ajwain-water demo + Compare to thyme (cont.)</a:t>
+            </a:r>
+            <a:endParaRPr lang="en-US" sz="1800" dirty="0"/>
+          </a:p>
+        </p:txBody>
+      </p:sp>
+      <p:sp>
+        <p:nvSpPr>
+          <p:cNvPr id="4" name="Text 2"/>
+          <p:cNvSpPr/>
+          <p:nvPr/>
+        </p:nvSpPr>
+        <p:spPr>
+          <a:xfrm>
+            <a:off x="406301" y="870942"/>
+            <a:ext cx="8498026" cy="213271"/>
+          </a:xfrm>
+          <a:prstGeom prst="rect">
+            <a:avLst/>
+          </a:prstGeom>
+          <a:noFill/>
+          <a:ln/>
+        </p:spPr>
+        <p:txBody>
+          <a:bodyPr wrap="square" lIns="0" tIns="0" rIns="0" bIns="0" rtlCol="0" anchor="t"/>
+          <a:lstStyle/>
+          <a:p>
+            <a:pPr algn="l" indent="0" marL="0">
+              <a:lnSpc>
+                <a:spcPts val="1680"/>
+              </a:lnSpc>
+              <a:spcBef>
+                <a:spcPts val="300"/>
+              </a:spcBef>
+              <a:spcAft>
+                <a:spcPts val="300"/>
+              </a:spcAft>
+              <a:buNone/>
+            </a:pPr>
+            <a:r>
+              <a:rPr lang="en-US" sz="1200" b="1" dirty="0">
+                <a:solidFill>
+                  <a:srgbClr val="1C2833"/>
+                </a:solidFill>
+                <a:latin typeface="Arial" pitchFamily="34" charset="0"/>
+                <a:ea typeface="Arial" pitchFamily="34" charset="-122"/>
+                <a:cs typeface="Arial" pitchFamily="34" charset="-120"/>
+              </a:rPr>
+              <a:t>Compare to thyme (5 min):</a:t>
+            </a:r>
+            <a:endParaRPr lang="en-US" sz="1200" dirty="0"/>
+          </a:p>
+        </p:txBody>
+      </p:sp>
+      <p:sp>
+        <p:nvSpPr>
+          <p:cNvPr id="5" name="Text 3"/>
+          <p:cNvSpPr/>
+          <p:nvPr/>
+        </p:nvSpPr>
+        <p:spPr>
+          <a:xfrm>
+            <a:off x="634901" y="1173063"/>
+            <a:ext cx="8102798" cy="937022"/>
+          </a:xfrm>
+          <a:prstGeom prst="rect">
+            <a:avLst/>
+          </a:prstGeom>
+          <a:noFill/>
+          <a:ln/>
+        </p:spPr>
+        <p:txBody>
+          <a:bodyPr wrap="square" lIns="0" tIns="0" rIns="0" bIns="0" rtlCol="0" anchor="t"/>
+          <a:lstStyle/>
+          <a:p>
+            <a:pPr algn="l" marL="342900" indent="-342900">
+              <a:lnSpc>
+                <a:spcPts val="1620"/>
+              </a:lnSpc>
+              <a:spcAft>
+                <a:spcPts val="300"/>
+              </a:spcAft>
+              <a:buSzPct val="100000"/>
+              <a:buChar char="•"/>
+            </a:pPr>
+            <a:r>
+              <a:rPr lang="en-US" sz="1200" dirty="0">
+                <a:solidFill>
+                  <a:srgbClr val="1C2833"/>
+                </a:solidFill>
+                <a:latin typeface="Arial" pitchFamily="34" charset="0"/>
+                <a:ea typeface="Arial" pitchFamily="34" charset="-122"/>
+                <a:cs typeface="Arial" pitchFamily="34" charset="-120"/>
+              </a:rPr>
+              <a:t>Pass around dried thyme. Crush a small amount, smell.</a:t>
+            </a:r>
+            <a:endParaRPr lang="en-US" sz="1200" dirty="0"/>
+          </a:p>
+          <a:p>
+            <a:pPr algn="l" marL="342900" indent="-342900">
+              <a:lnSpc>
+                <a:spcPts val="1620"/>
+              </a:lnSpc>
+              <a:spcAft>
+                <a:spcPts val="300"/>
+              </a:spcAft>
+              <a:buSzPct val="100000"/>
+              <a:buChar char="•"/>
+            </a:pPr>
+            <a:r>
+              <a:rPr lang="en-US" sz="1200" dirty="0">
+                <a:solidFill>
+                  <a:srgbClr val="1C2833"/>
+                </a:solidFill>
+                <a:latin typeface="Arial" pitchFamily="34" charset="0"/>
+                <a:ea typeface="Arial" pitchFamily="34" charset="-122"/>
+                <a:cs typeface="Arial" pitchFamily="34" charset="-120"/>
+              </a:rPr>
+              <a:t>The two herbs are unrelated botanically (different families) but share the same dominant volatile — </a:t>
+            </a:r>
+            <a:pPr algn="l" indent="0" marL="0">
+              <a:lnSpc>
+                <a:spcPts val="1620"/>
+              </a:lnSpc>
+              <a:spcAft>
+                <a:spcPts val="300"/>
+              </a:spcAft>
+              <a:buNone/>
+            </a:pPr>
+            <a:r>
+              <a:rPr lang="en-US" sz="1200" b="1" dirty="0">
+                <a:solidFill>
+                  <a:srgbClr val="1C2833"/>
+                </a:solidFill>
+                <a:latin typeface="Arial" pitchFamily="34" charset="0"/>
+                <a:ea typeface="Arial" pitchFamily="34" charset="-122"/>
+                <a:cs typeface="Arial" pitchFamily="34" charset="-120"/>
+              </a:rPr>
+              <a:t>thymol</a:t>
+            </a:r>
+            <a:pPr algn="l" indent="0" marL="0">
+              <a:lnSpc>
+                <a:spcPts val="1620"/>
+              </a:lnSpc>
+              <a:spcAft>
+                <a:spcPts val="300"/>
+              </a:spcAft>
+              <a:buNone/>
+            </a:pPr>
+            <a:r>
+              <a:rPr lang="en-US" sz="1200" dirty="0">
+                <a:solidFill>
+                  <a:srgbClr val="1C2833"/>
+                </a:solidFill>
+                <a:latin typeface="Arial" pitchFamily="34" charset="0"/>
+                <a:ea typeface="Arial" pitchFamily="34" charset="-122"/>
+                <a:cs typeface="Arial" pitchFamily="34" charset="-120"/>
+              </a:rPr>
+              <a:t>. This is a beautiful example of </a:t>
+            </a:r>
+            <a:pPr algn="l" indent="0" marL="0">
+              <a:lnSpc>
+                <a:spcPts val="1620"/>
+              </a:lnSpc>
+              <a:spcAft>
+                <a:spcPts val="300"/>
+              </a:spcAft>
+              <a:buNone/>
+            </a:pPr>
+            <a:r>
+              <a:rPr lang="en-US" sz="1200" i="1" dirty="0">
+                <a:solidFill>
+                  <a:srgbClr val="1C2833"/>
+                </a:solidFill>
+                <a:latin typeface="Arial" pitchFamily="34" charset="0"/>
+                <a:ea typeface="Arial" pitchFamily="34" charset="-122"/>
+                <a:cs typeface="Arial" pitchFamily="34" charset="-120"/>
+              </a:rPr>
+              <a:t>convergent chemistry</a:t>
+            </a:r>
+            <a:pPr algn="l" indent="0" marL="0">
+              <a:lnSpc>
+                <a:spcPts val="1620"/>
+              </a:lnSpc>
+              <a:spcAft>
+                <a:spcPts val="300"/>
+              </a:spcAft>
+              <a:buNone/>
+            </a:pPr>
+            <a:r>
+              <a:rPr lang="en-US" sz="1200" dirty="0">
+                <a:solidFill>
+                  <a:srgbClr val="1C2833"/>
+                </a:solidFill>
+                <a:latin typeface="Arial" pitchFamily="34" charset="0"/>
+                <a:ea typeface="Arial" pitchFamily="34" charset="-122"/>
+                <a:cs typeface="Arial" pitchFamily="34" charset="-120"/>
+              </a:rPr>
+              <a:t> — different plants evolving the same compound because it serves a similar purpose for the plant (defence against microbes and herbivores).</a:t>
+            </a:r>
+            <a:endParaRPr lang="en-US" sz="1200" dirty="0"/>
+          </a:p>
+        </p:txBody>
+      </p:sp>
+      <p:sp>
+        <p:nvSpPr>
+          <p:cNvPr id="6" name="Text 4"/>
+          <p:cNvSpPr/>
+          <p:nvPr/>
+        </p:nvSpPr>
+        <p:spPr>
+          <a:xfrm>
+            <a:off x="406301" y="4434929"/>
+            <a:ext cx="8498026" cy="213271"/>
+          </a:xfrm>
+          <a:prstGeom prst="rect">
+            <a:avLst/>
+          </a:prstGeom>
+          <a:noFill/>
+          <a:ln/>
+        </p:spPr>
+        <p:txBody>
+          <a:bodyPr wrap="square" lIns="0" tIns="0" rIns="0" bIns="0" rtlCol="0" anchor="t"/>
+          <a:lstStyle/>
+          <a:p>
+            <a:pPr algn="l" indent="0" marL="0">
+              <a:lnSpc>
+                <a:spcPts val="1680"/>
+              </a:lnSpc>
+              <a:spcBef>
+                <a:spcPts val="300"/>
+              </a:spcBef>
+              <a:spcAft>
+                <a:spcPts val="300"/>
+              </a:spcAft>
+              <a:buNone/>
+            </a:pPr>
+            <a:r>
+              <a:rPr lang="en-US" sz="1200" dirty="0">
+                <a:solidFill>
+                  <a:srgbClr val="1C2833"/>
+                </a:solidFill>
+                <a:latin typeface="Arial" pitchFamily="34" charset="0"/>
+                <a:ea typeface="Arial" pitchFamily="34" charset="-122"/>
+                <a:cs typeface="Arial" pitchFamily="34" charset="-120"/>
+              </a:rPr>
+              <a:t>Middle ·  · IKS Curriculum</a:t>
+            </a:r>
+            <a:endParaRPr lang="en-US" sz="1200" dirty="0"/>
+          </a:p>
+        </p:txBody>
+      </p:sp>
+    </p:spTree>
+  </p:cSld>
+  <p:clrMapOvr>
+    <a:masterClrMapping/>
+  </p:clrMapOvr>
+</p:sld>
+</file>
+
+<file path=ppt/slides/slide15.xml><?xml version="1.0" encoding="utf-8"?>
+<p:sld xmlns:a="http://schemas.openxmlformats.org/drawingml/2006/main" xmlns:r="http://schemas.openxmlformats.org/officeDocument/2006/relationships" xmlns:p="http://schemas.openxmlformats.org/presentationml/2006/main">
+  <p:cSld name="Slide 15">
+    <p:bg>
+      <p:bgPr>
+        <a:solidFill>
+          <a:srgbClr val="FFFFFF"/>
+        </a:solidFill>
+      </p:bgPr>
+    </p:bg>
+    <p:spTree>
+      <p:nvGrpSpPr>
+        <p:cNvPr id="1" name=""/>
+        <p:cNvGrpSpPr/>
+        <p:nvPr/>
+      </p:nvGrpSpPr>
+      <p:grpSpPr>
+        <a:xfrm>
+          <a:off x="0" y="0"/>
+          <a:ext cx="0" cy="0"/>
+          <a:chOff x="0" y="0"/>
+          <a:chExt cx="0" cy="0"/>
+        </a:xfrm>
+      </p:grpSpPr>
+      <p:sp>
+        <p:nvSpPr>
+          <p:cNvPr id="2" name="Text 0"/>
+          <p:cNvSpPr/>
+          <p:nvPr/>
+        </p:nvSpPr>
+        <p:spPr>
+          <a:xfrm>
+            <a:off x="0" y="0"/>
+            <a:ext cx="9144000" cy="101501"/>
+          </a:xfrm>
+          <a:prstGeom prst="rect">
+            <a:avLst/>
+          </a:prstGeom>
+          <a:solidFill>
+            <a:srgbClr val="277884"/>
+          </a:solidFill>
+          <a:ln/>
+        </p:spPr>
+        <p:txBody>
+          <a:bodyPr wrap="square" rtlCol="0" anchor="ctr"/>
+          <a:lstStyle/>
+          <a:p>
+            <a:pPr indent="0" marL="0">
+              <a:buNone/>
+            </a:pPr>
+            <a:endParaRPr lang="en-US" dirty="0"/>
+          </a:p>
+        </p:txBody>
+      </p:sp>
+      <p:sp>
+        <p:nvSpPr>
+          <p:cNvPr id="3" name="Text 1"/>
+          <p:cNvSpPr/>
+          <p:nvPr/>
+        </p:nvSpPr>
+        <p:spPr>
+          <a:xfrm>
+            <a:off x="406301" y="457051"/>
+            <a:ext cx="8498026" cy="274290"/>
+          </a:xfrm>
+          <a:prstGeom prst="rect">
+            <a:avLst/>
+          </a:prstGeom>
+          <a:noFill/>
+          <a:ln/>
+        </p:spPr>
+        <p:txBody>
+          <a:bodyPr wrap="square" lIns="0" tIns="0" rIns="0" bIns="0" rtlCol="0" anchor="t"/>
+          <a:lstStyle/>
+          <a:p>
+            <a:pPr algn="l" indent="0" marL="0">
+              <a:lnSpc>
+                <a:spcPts val="2160"/>
+              </a:lnSpc>
+              <a:spcBef>
+                <a:spcPts val="600"/>
+              </a:spcBef>
+              <a:spcAft>
+                <a:spcPts val="800"/>
+              </a:spcAft>
+              <a:buNone/>
+            </a:pPr>
+            <a:r>
+              <a:rPr lang="en-US" sz="1800" b="1" dirty="0">
+                <a:solidFill>
+                  <a:srgbClr val="FE4447"/>
+                </a:solidFill>
+                <a:latin typeface="Georgia" pitchFamily="34" charset="0"/>
+                <a:ea typeface="Georgia" pitchFamily="34" charset="-122"/>
+                <a:cs typeface="Georgia" pitchFamily="34" charset="-120"/>
+              </a:rPr>
+              <a:t>Activity (15 min) — Ajwain-water demo + Compare to thyme (cont.)</a:t>
+            </a:r>
+            <a:endParaRPr lang="en-US" sz="1800" dirty="0"/>
+          </a:p>
+        </p:txBody>
+      </p:sp>
+      <p:sp>
+        <p:nvSpPr>
+          <p:cNvPr id="4" name="Text 2"/>
+          <p:cNvSpPr/>
+          <p:nvPr/>
+        </p:nvSpPr>
+        <p:spPr>
+          <a:xfrm>
+            <a:off x="406301" y="870942"/>
+            <a:ext cx="8498026" cy="213271"/>
+          </a:xfrm>
+          <a:prstGeom prst="rect">
+            <a:avLst/>
+          </a:prstGeom>
+          <a:noFill/>
+          <a:ln/>
+        </p:spPr>
+        <p:txBody>
+          <a:bodyPr wrap="square" lIns="0" tIns="0" rIns="0" bIns="0" rtlCol="0" anchor="t"/>
+          <a:lstStyle/>
+          <a:p>
+            <a:pPr algn="l" indent="0" marL="0">
+              <a:lnSpc>
+                <a:spcPts val="1680"/>
+              </a:lnSpc>
+              <a:spcBef>
+                <a:spcPts val="300"/>
+              </a:spcBef>
+              <a:spcAft>
+                <a:spcPts val="300"/>
+              </a:spcAft>
+              <a:buNone/>
+            </a:pPr>
+            <a:r>
+              <a:rPr lang="en-US" sz="1200" b="1" dirty="0">
+                <a:solidFill>
+                  <a:srgbClr val="1C2833"/>
+                </a:solidFill>
+                <a:latin typeface="Arial" pitchFamily="34" charset="0"/>
+                <a:ea typeface="Arial" pitchFamily="34" charset="-122"/>
+                <a:cs typeface="Arial" pitchFamily="34" charset="-120"/>
+              </a:rPr>
+              <a:t>Exit ticket (5 min):</a:t>
+            </a:r>
+            <a:endParaRPr lang="en-US" sz="1200" dirty="0"/>
+          </a:p>
+        </p:txBody>
+      </p:sp>
+      <p:sp>
+        <p:nvSpPr>
+          <p:cNvPr id="5" name="Text 3"/>
+          <p:cNvSpPr/>
+          <p:nvPr/>
+        </p:nvSpPr>
+        <p:spPr>
+          <a:xfrm>
+            <a:off x="634901" y="1173063"/>
             <a:ext cx="8102798" cy="281880"/>
           </a:xfrm>
           <a:prstGeom prst="rect">
@@ -3210,6 +5071,26 @@
               <a:buChar char="•"/>
             </a:pPr>
             <a:r>
+              <a:rPr lang="en-US" sz="1200" dirty="0">
+                <a:solidFill>
+                  <a:srgbClr val="1C2833"/>
+                </a:solidFill>
+                <a:latin typeface="Arial" pitchFamily="34" charset="0"/>
+                <a:ea typeface="Arial" pitchFamily="34" charset="-122"/>
+                <a:cs typeface="Arial" pitchFamily="34" charset="-120"/>
+              </a:rPr>
+              <a:t>On a slip: </a:t>
+            </a:r>
+            <a:pPr algn="l" indent="0" marL="0">
+              <a:lnSpc>
+                <a:spcPts val="1620"/>
+              </a:lnSpc>
+              <a:spcAft>
+                <a:spcPts val="300"/>
+              </a:spcAft>
+              <a:buNone/>
+            </a:pPr>
+            <a:r>
               <a:rPr lang="en-US" sz="1200" i="1" dirty="0">
                 <a:solidFill>
                   <a:srgbClr val="1C2833"/>
@@ -3218,16 +5099,1501 @@
                 <a:ea typeface="Arial" pitchFamily="34" charset="-122"/>
                 <a:cs typeface="Arial" pitchFamily="34" charset="-120"/>
               </a:rPr>
+              <a:t>"Name today's herb in Sanskrit, its main compound, and one common Indian dish you've eaten it in."</a:t>
+            </a:r>
+            <a:endParaRPr lang="en-US" sz="1200" dirty="0"/>
+          </a:p>
+        </p:txBody>
+      </p:sp>
+      <p:sp>
+        <p:nvSpPr>
+          <p:cNvPr id="6" name="Text 4"/>
+          <p:cNvSpPr/>
+          <p:nvPr/>
+        </p:nvSpPr>
+        <p:spPr>
+          <a:xfrm>
+            <a:off x="406301" y="4434929"/>
+            <a:ext cx="8498026" cy="213271"/>
+          </a:xfrm>
+          <a:prstGeom prst="rect">
+            <a:avLst/>
+          </a:prstGeom>
+          <a:noFill/>
+          <a:ln/>
+        </p:spPr>
+        <p:txBody>
+          <a:bodyPr wrap="square" lIns="0" tIns="0" rIns="0" bIns="0" rtlCol="0" anchor="t"/>
+          <a:lstStyle/>
+          <a:p>
+            <a:pPr algn="l" indent="0" marL="0">
+              <a:lnSpc>
+                <a:spcPts val="1680"/>
+              </a:lnSpc>
+              <a:spcBef>
+                <a:spcPts val="300"/>
+              </a:spcBef>
+              <a:spcAft>
+                <a:spcPts val="300"/>
+              </a:spcAft>
+              <a:buNone/>
+            </a:pPr>
+            <a:r>
+              <a:rPr lang="en-US" sz="1200" dirty="0">
+                <a:solidFill>
+                  <a:srgbClr val="1C2833"/>
+                </a:solidFill>
+                <a:latin typeface="Arial" pitchFamily="34" charset="0"/>
+                <a:ea typeface="Arial" pitchFamily="34" charset="-122"/>
+                <a:cs typeface="Arial" pitchFamily="34" charset="-120"/>
+              </a:rPr>
+              <a:t>Middle ·  · IKS Curriculum</a:t>
+            </a:r>
+            <a:endParaRPr lang="en-US" sz="1200" dirty="0"/>
+          </a:p>
+        </p:txBody>
+      </p:sp>
+    </p:spTree>
+  </p:cSld>
+  <p:clrMapOvr>
+    <a:masterClrMapping/>
+  </p:clrMapOvr>
+</p:sld>
+</file>
+
+<file path=ppt/slides/slide16.xml><?xml version="1.0" encoding="utf-8"?>
+<p:sld xmlns:a="http://schemas.openxmlformats.org/drawingml/2006/main" xmlns:r="http://schemas.openxmlformats.org/officeDocument/2006/relationships" xmlns:p="http://schemas.openxmlformats.org/presentationml/2006/main">
+  <p:cSld name="Slide 16">
+    <p:bg>
+      <p:bgPr>
+        <a:solidFill>
+          <a:srgbClr val="FFFFFF"/>
+        </a:solidFill>
+      </p:bgPr>
+    </p:bg>
+    <p:spTree>
+      <p:nvGrpSpPr>
+        <p:cNvPr id="1" name=""/>
+        <p:cNvGrpSpPr/>
+        <p:nvPr/>
+      </p:nvGrpSpPr>
+      <p:grpSpPr>
+        <a:xfrm>
+          <a:off x="0" y="0"/>
+          <a:ext cx="0" cy="0"/>
+          <a:chOff x="0" y="0"/>
+          <a:chExt cx="0" cy="0"/>
+        </a:xfrm>
+      </p:grpSpPr>
+      <p:sp>
+        <p:nvSpPr>
+          <p:cNvPr id="2" name="Text 0"/>
+          <p:cNvSpPr/>
+          <p:nvPr/>
+        </p:nvSpPr>
+        <p:spPr>
+          <a:xfrm>
+            <a:off x="0" y="0"/>
+            <a:ext cx="9144000" cy="101501"/>
+          </a:xfrm>
+          <a:prstGeom prst="rect">
+            <a:avLst/>
+          </a:prstGeom>
+          <a:solidFill>
+            <a:srgbClr val="277884"/>
+          </a:solidFill>
+          <a:ln/>
+        </p:spPr>
+        <p:txBody>
+          <a:bodyPr wrap="square" rtlCol="0" anchor="ctr"/>
+          <a:lstStyle/>
+          <a:p>
+            <a:pPr indent="0" marL="0">
+              <a:buNone/>
+            </a:pPr>
+            <a:endParaRPr lang="en-US" dirty="0"/>
+          </a:p>
+        </p:txBody>
+      </p:sp>
+      <p:sp>
+        <p:nvSpPr>
+          <p:cNvPr id="3" name="Text 1"/>
+          <p:cNvSpPr/>
+          <p:nvPr/>
+        </p:nvSpPr>
+        <p:spPr>
+          <a:xfrm>
+            <a:off x="406301" y="457051"/>
+            <a:ext cx="8498026" cy="274290"/>
+          </a:xfrm>
+          <a:prstGeom prst="rect">
+            <a:avLst/>
+          </a:prstGeom>
+          <a:noFill/>
+          <a:ln/>
+        </p:spPr>
+        <p:txBody>
+          <a:bodyPr wrap="square" lIns="0" tIns="0" rIns="0" bIns="0" rtlCol="0" anchor="t"/>
+          <a:lstStyle/>
+          <a:p>
+            <a:pPr algn="l" indent="0" marL="0">
+              <a:lnSpc>
+                <a:spcPts val="2160"/>
+              </a:lnSpc>
+              <a:spcBef>
+                <a:spcPts val="600"/>
+              </a:spcBef>
+              <a:spcAft>
+                <a:spcPts val="800"/>
+              </a:spcAft>
+              <a:buNone/>
+            </a:pPr>
+            <a:r>
+              <a:rPr lang="en-US" sz="1800" b="1" dirty="0">
+                <a:solidFill>
+                  <a:srgbClr val="FE4447"/>
+                </a:solidFill>
+                <a:latin typeface="Georgia" pitchFamily="34" charset="0"/>
+                <a:ea typeface="Georgia" pitchFamily="34" charset="-122"/>
+                <a:cs typeface="Georgia" pitchFamily="34" charset="-120"/>
+              </a:rPr>
+              <a:t>Wrap-up (5 min)</a:t>
+            </a:r>
+            <a:endParaRPr lang="en-US" sz="1800" dirty="0"/>
+          </a:p>
+        </p:txBody>
+      </p:sp>
+      <p:sp>
+        <p:nvSpPr>
+          <p:cNvPr id="4" name="Text 2"/>
+          <p:cNvSpPr/>
+          <p:nvPr/>
+        </p:nvSpPr>
+        <p:spPr>
+          <a:xfrm>
+            <a:off x="634901" y="883593"/>
+            <a:ext cx="8102798" cy="731341"/>
+          </a:xfrm>
+          <a:prstGeom prst="rect">
+            <a:avLst/>
+          </a:prstGeom>
+          <a:noFill/>
+          <a:ln/>
+        </p:spPr>
+        <p:txBody>
+          <a:bodyPr wrap="square" lIns="0" tIns="0" rIns="0" bIns="0" rtlCol="0" anchor="t"/>
+          <a:lstStyle/>
+          <a:p>
+            <a:pPr algn="l" marL="342900" indent="-342900">
+              <a:lnSpc>
+                <a:spcPts val="1620"/>
+              </a:lnSpc>
+              <a:spcAft>
+                <a:spcPts val="300"/>
+              </a:spcAft>
+              <a:buSzPct val="100000"/>
+              <a:buChar char="•"/>
+            </a:pPr>
+            <a:r>
+              <a:rPr lang="en-US" sz="1200" dirty="0">
+                <a:solidFill>
+                  <a:srgbClr val="1C2833"/>
+                </a:solidFill>
+                <a:latin typeface="Arial" pitchFamily="34" charset="0"/>
+                <a:ea typeface="Arial" pitchFamily="34" charset="-122"/>
+                <a:cs typeface="Arial" pitchFamily="34" charset="-120"/>
+              </a:rPr>
+              <a:t>Restate safety rule + the essential-oil warning ("the whole seed in food is fine; the essential oil is concentrated and not for school-age ingestion").</a:t>
+            </a:r>
+            <a:endParaRPr lang="en-US" sz="1200" dirty="0"/>
+          </a:p>
+          <a:p>
+            <a:pPr algn="l" marL="342900" indent="-342900">
+              <a:lnSpc>
+                <a:spcPts val="1620"/>
+              </a:lnSpc>
+              <a:spcAft>
+                <a:spcPts val="300"/>
+              </a:spcAft>
+              <a:buSzPct val="100000"/>
+              <a:buChar char="•"/>
+            </a:pPr>
+            <a:r>
+              <a:rPr lang="en-US" sz="1200" dirty="0">
+                <a:solidFill>
+                  <a:srgbClr val="1C2833"/>
+                </a:solidFill>
+                <a:latin typeface="Arial" pitchFamily="34" charset="0"/>
+                <a:ea typeface="Arial" pitchFamily="34" charset="-122"/>
+                <a:cs typeface="Arial" pitchFamily="34" charset="-120"/>
+              </a:rPr>
+              <a:t>Preview Day 7: </a:t>
+            </a:r>
+            <a:pPr algn="l" indent="0" marL="0">
+              <a:lnSpc>
+                <a:spcPts val="1620"/>
+              </a:lnSpc>
+              <a:spcAft>
+                <a:spcPts val="300"/>
+              </a:spcAft>
+              <a:buNone/>
+            </a:pPr>
+            <a:r>
+              <a:rPr lang="en-US" sz="1200" i="1" dirty="0">
+                <a:solidFill>
+                  <a:srgbClr val="1C2833"/>
+                </a:solidFill>
+                <a:latin typeface="Arial" pitchFamily="34" charset="0"/>
+                <a:ea typeface="Arial" pitchFamily="34" charset="-122"/>
+                <a:cs typeface="Arial" pitchFamily="34" charset="-120"/>
+              </a:rPr>
+              <a:t>"Tomorrow — mint. The cooling herb."</a:t>
+            </a:r>
+            <a:endParaRPr lang="en-US" sz="1200" dirty="0"/>
+          </a:p>
+        </p:txBody>
+      </p:sp>
+      <p:sp>
+        <p:nvSpPr>
+          <p:cNvPr id="5" name="Text 3"/>
+          <p:cNvSpPr/>
+          <p:nvPr/>
+        </p:nvSpPr>
+        <p:spPr>
+          <a:xfrm>
+            <a:off x="406301" y="4434929"/>
+            <a:ext cx="8498026" cy="213271"/>
+          </a:xfrm>
+          <a:prstGeom prst="rect">
+            <a:avLst/>
+          </a:prstGeom>
+          <a:noFill/>
+          <a:ln/>
+        </p:spPr>
+        <p:txBody>
+          <a:bodyPr wrap="square" lIns="0" tIns="0" rIns="0" bIns="0" rtlCol="0" anchor="t"/>
+          <a:lstStyle/>
+          <a:p>
+            <a:pPr algn="l" indent="0" marL="0">
+              <a:lnSpc>
+                <a:spcPts val="1680"/>
+              </a:lnSpc>
+              <a:spcBef>
+                <a:spcPts val="300"/>
+              </a:spcBef>
+              <a:spcAft>
+                <a:spcPts val="300"/>
+              </a:spcAft>
+              <a:buNone/>
+            </a:pPr>
+            <a:r>
+              <a:rPr lang="en-US" sz="1200" dirty="0">
+                <a:solidFill>
+                  <a:srgbClr val="1C2833"/>
+                </a:solidFill>
+                <a:latin typeface="Arial" pitchFamily="34" charset="0"/>
+                <a:ea typeface="Arial" pitchFamily="34" charset="-122"/>
+                <a:cs typeface="Arial" pitchFamily="34" charset="-120"/>
+              </a:rPr>
+              <a:t>Middle ·  · IKS Curriculum</a:t>
+            </a:r>
+            <a:endParaRPr lang="en-US" sz="1200" dirty="0"/>
+          </a:p>
+        </p:txBody>
+      </p:sp>
+    </p:spTree>
+  </p:cSld>
+  <p:clrMapOvr>
+    <a:masterClrMapping/>
+  </p:clrMapOvr>
+</p:sld>
+</file>
+
+<file path=ppt/slides/slide17.xml><?xml version="1.0" encoding="utf-8"?>
+<p:sld xmlns:a="http://schemas.openxmlformats.org/drawingml/2006/main" xmlns:r="http://schemas.openxmlformats.org/officeDocument/2006/relationships" xmlns:p="http://schemas.openxmlformats.org/presentationml/2006/main">
+  <p:cSld name="Slide 17">
+    <p:bg>
+      <p:bgPr>
+        <a:solidFill>
+          <a:srgbClr val="FFFFFF"/>
+        </a:solidFill>
+      </p:bgPr>
+    </p:bg>
+    <p:spTree>
+      <p:nvGrpSpPr>
+        <p:cNvPr id="1" name=""/>
+        <p:cNvGrpSpPr/>
+        <p:nvPr/>
+      </p:nvGrpSpPr>
+      <p:grpSpPr>
+        <a:xfrm>
+          <a:off x="0" y="0"/>
+          <a:ext cx="0" cy="0"/>
+          <a:chOff x="0" y="0"/>
+          <a:chExt cx="0" cy="0"/>
+        </a:xfrm>
+      </p:grpSpPr>
+      <p:sp>
+        <p:nvSpPr>
+          <p:cNvPr id="2" name="Text 0"/>
+          <p:cNvSpPr/>
+          <p:nvPr/>
+        </p:nvSpPr>
+        <p:spPr>
+          <a:xfrm>
+            <a:off x="0" y="0"/>
+            <a:ext cx="9144000" cy="101501"/>
+          </a:xfrm>
+          <a:prstGeom prst="rect">
+            <a:avLst/>
+          </a:prstGeom>
+          <a:solidFill>
+            <a:srgbClr val="277884"/>
+          </a:solidFill>
+          <a:ln/>
+        </p:spPr>
+        <p:txBody>
+          <a:bodyPr wrap="square" rtlCol="0" anchor="ctr"/>
+          <a:lstStyle/>
+          <a:p>
+            <a:pPr indent="0" marL="0">
+              <a:buNone/>
+            </a:pPr>
+            <a:endParaRPr lang="en-US" dirty="0"/>
+          </a:p>
+        </p:txBody>
+      </p:sp>
+      <p:sp>
+        <p:nvSpPr>
+          <p:cNvPr id="3" name="Text 1"/>
+          <p:cNvSpPr/>
+          <p:nvPr/>
+        </p:nvSpPr>
+        <p:spPr>
+          <a:xfrm>
+            <a:off x="406301" y="457051"/>
+            <a:ext cx="8498026" cy="274290"/>
+          </a:xfrm>
+          <a:prstGeom prst="rect">
+            <a:avLst/>
+          </a:prstGeom>
+          <a:noFill/>
+          <a:ln/>
+        </p:spPr>
+        <p:txBody>
+          <a:bodyPr wrap="square" lIns="0" tIns="0" rIns="0" bIns="0" rtlCol="0" anchor="t"/>
+          <a:lstStyle/>
+          <a:p>
+            <a:pPr algn="l" indent="0" marL="0">
+              <a:lnSpc>
+                <a:spcPts val="2160"/>
+              </a:lnSpc>
+              <a:spcBef>
+                <a:spcPts val="600"/>
+              </a:spcBef>
+              <a:spcAft>
+                <a:spcPts val="800"/>
+              </a:spcAft>
+              <a:buNone/>
+            </a:pPr>
+            <a:r>
+              <a:rPr lang="en-US" sz="1800" b="1" dirty="0">
+                <a:solidFill>
+                  <a:srgbClr val="FE4447"/>
+                </a:solidFill>
+                <a:latin typeface="Georgia" pitchFamily="34" charset="0"/>
+                <a:ea typeface="Georgia" pitchFamily="34" charset="-122"/>
+                <a:cs typeface="Georgia" pitchFamily="34" charset="-120"/>
+              </a:rPr>
+              <a:t>Student-facing content</a:t>
+            </a:r>
+            <a:endParaRPr lang="en-US" sz="1800" dirty="0"/>
+          </a:p>
+        </p:txBody>
+      </p:sp>
+      <p:sp>
+        <p:nvSpPr>
+          <p:cNvPr id="4" name="Text 2"/>
+          <p:cNvSpPr/>
+          <p:nvPr/>
+        </p:nvSpPr>
+        <p:spPr>
+          <a:xfrm>
+            <a:off x="406301" y="883593"/>
+            <a:ext cx="8331398" cy="3843338"/>
+          </a:xfrm>
+          <a:prstGeom prst="rect">
+            <a:avLst/>
+          </a:prstGeom>
+          <a:solidFill>
+            <a:srgbClr val="F4F8F9"/>
+          </a:solidFill>
+          <a:ln/>
+        </p:spPr>
+        <p:txBody>
+          <a:bodyPr wrap="square" rtlCol="0" anchor="ctr"/>
+          <a:lstStyle/>
+          <a:p>
+            <a:pPr indent="0" marL="0">
+              <a:buNone/>
+            </a:pPr>
+            <a:endParaRPr lang="en-US" dirty="0"/>
+          </a:p>
+        </p:txBody>
+      </p:sp>
+      <p:sp>
+        <p:nvSpPr>
+          <p:cNvPr id="5" name="Shape 3"/>
+          <p:cNvSpPr/>
+          <p:nvPr/>
+        </p:nvSpPr>
+        <p:spPr>
+          <a:xfrm>
+            <a:off x="434876" y="883593"/>
+            <a:ext cx="0" cy="3843338"/>
+          </a:xfrm>
+          <a:prstGeom prst="line">
+            <a:avLst/>
+          </a:prstGeom>
+          <a:noFill/>
+          <a:ln w="57150">
+            <a:solidFill>
+              <a:srgbClr val="FE4447"/>
+            </a:solidFill>
+            <a:prstDash val="solid"/>
+          </a:ln>
+        </p:spPr>
+      </p:sp>
+      <p:sp>
+        <p:nvSpPr>
+          <p:cNvPr id="6" name="Text 4"/>
+          <p:cNvSpPr/>
+          <p:nvPr/>
+        </p:nvSpPr>
+        <p:spPr>
+          <a:xfrm>
+            <a:off x="692051" y="1074093"/>
+            <a:ext cx="7973389" cy="230981"/>
+          </a:xfrm>
+          <a:prstGeom prst="rect">
+            <a:avLst/>
+          </a:prstGeom>
+          <a:noFill/>
+          <a:ln/>
+        </p:spPr>
+        <p:txBody>
+          <a:bodyPr wrap="square" lIns="0" tIns="0" rIns="0" bIns="0" rtlCol="0" anchor="t"/>
+          <a:lstStyle/>
+          <a:p>
+            <a:pPr algn="l" indent="0" marL="0">
+              <a:lnSpc>
+                <a:spcPts val="1820"/>
+              </a:lnSpc>
+              <a:spcBef>
+                <a:spcPts val="300"/>
+              </a:spcBef>
+              <a:spcAft>
+                <a:spcPts val="300"/>
+              </a:spcAft>
+              <a:buNone/>
+            </a:pPr>
+            <a:r>
+              <a:rPr lang="en-US" sz="1300" b="1" i="1" dirty="0">
+                <a:solidFill>
+                  <a:srgbClr val="1C2833"/>
+                </a:solidFill>
+                <a:latin typeface="Georgia" pitchFamily="34" charset="0"/>
+                <a:ea typeface="Georgia" pitchFamily="34" charset="-122"/>
+                <a:cs typeface="Georgia" pitchFamily="34" charset="-120"/>
+              </a:rPr>
               <a:t>Yavānī</a:t>
             </a:r>
             <a:pPr algn="l" indent="0" marL="0">
               <a:lnSpc>
+                <a:spcPts val="1820"/>
+              </a:lnSpc>
+              <a:spcBef>
+                <a:spcPts val="300"/>
+              </a:spcBef>
+              <a:spcAft>
+                <a:spcPts val="300"/>
+              </a:spcAft>
+              <a:buNone/>
+            </a:pPr>
+            <a:r>
+              <a:rPr lang="en-US" sz="1300" dirty="0">
+                <a:solidFill>
+                  <a:srgbClr val="1C2833"/>
+                </a:solidFill>
+                <a:latin typeface="Georgia" pitchFamily="34" charset="0"/>
+                <a:ea typeface="Georgia" pitchFamily="34" charset="-122"/>
+                <a:cs typeface="Georgia" pitchFamily="34" charset="-120"/>
+              </a:rPr>
+              <a:t> (</a:t>
+            </a:r>
+            <a:pPr algn="l" indent="0" marL="0">
+              <a:lnSpc>
+                <a:spcPts val="1820"/>
+              </a:lnSpc>
+              <a:spcBef>
+                <a:spcPts val="300"/>
+              </a:spcBef>
+              <a:spcAft>
+                <a:spcPts val="300"/>
+              </a:spcAft>
+              <a:buNone/>
+            </a:pPr>
+            <a:r>
+              <a:rPr lang="en-US" sz="1300" i="1" dirty="0">
+                <a:solidFill>
+                  <a:srgbClr val="1C2833"/>
+                </a:solidFill>
+                <a:latin typeface="Georgia" pitchFamily="34" charset="0"/>
+                <a:ea typeface="Georgia" pitchFamily="34" charset="-122"/>
+                <a:cs typeface="Georgia" pitchFamily="34" charset="-120"/>
+              </a:rPr>
+              <a:t>Trachyspermum ammi</a:t>
+            </a:r>
+            <a:pPr algn="l" indent="0" marL="0">
+              <a:lnSpc>
+                <a:spcPts val="1820"/>
+              </a:lnSpc>
+              <a:spcBef>
+                <a:spcPts val="300"/>
+              </a:spcBef>
+              <a:spcAft>
+                <a:spcPts val="300"/>
+              </a:spcAft>
+              <a:buNone/>
+            </a:pPr>
+            <a:r>
+              <a:rPr lang="en-US" sz="1300" dirty="0">
+                <a:solidFill>
+                  <a:srgbClr val="1C2833"/>
+                </a:solidFill>
+                <a:latin typeface="Georgia" pitchFamily="34" charset="0"/>
+                <a:ea typeface="Georgia" pitchFamily="34" charset="-122"/>
+                <a:cs typeface="Georgia" pitchFamily="34" charset="-120"/>
+              </a:rPr>
+              <a:t>) — known in English as ajwain or carom seed.</a:t>
+            </a:r>
+            <a:endParaRPr lang="en-US" sz="1300" dirty="0"/>
+          </a:p>
+        </p:txBody>
+      </p:sp>
+      <p:sp>
+        <p:nvSpPr>
+          <p:cNvPr id="7" name="Text 5"/>
+          <p:cNvSpPr/>
+          <p:nvPr/>
+        </p:nvSpPr>
+        <p:spPr>
+          <a:xfrm>
+            <a:off x="692051" y="1343174"/>
+            <a:ext cx="7973389" cy="461963"/>
+          </a:xfrm>
+          <a:prstGeom prst="rect">
+            <a:avLst/>
+          </a:prstGeom>
+          <a:noFill/>
+          <a:ln/>
+        </p:spPr>
+        <p:txBody>
+          <a:bodyPr wrap="square" lIns="0" tIns="0" rIns="0" bIns="0" rtlCol="0" anchor="t"/>
+          <a:lstStyle/>
+          <a:p>
+            <a:pPr algn="l" indent="0" marL="0">
+              <a:lnSpc>
+                <a:spcPts val="1820"/>
+              </a:lnSpc>
+              <a:spcBef>
+                <a:spcPts val="300"/>
+              </a:spcBef>
+              <a:spcAft>
+                <a:spcPts val="300"/>
+              </a:spcAft>
+              <a:buNone/>
+            </a:pPr>
+            <a:r>
+              <a:rPr lang="en-US" sz="1300" b="1" i="1" dirty="0">
+                <a:solidFill>
+                  <a:srgbClr val="1C2833"/>
+                </a:solidFill>
+                <a:latin typeface="Georgia" pitchFamily="34" charset="0"/>
+                <a:ea typeface="Georgia" pitchFamily="34" charset="-122"/>
+                <a:cs typeface="Georgia" pitchFamily="34" charset="-120"/>
+              </a:rPr>
+              <a:t>What it is:</a:t>
+            </a:r>
+            <a:pPr algn="l" indent="0" marL="0">
+              <a:lnSpc>
+                <a:spcPts val="1820"/>
+              </a:lnSpc>
+              <a:spcBef>
+                <a:spcPts val="300"/>
+              </a:spcBef>
+              <a:spcAft>
+                <a:spcPts val="300"/>
+              </a:spcAft>
+              <a:buNone/>
+            </a:pPr>
+            <a:r>
+              <a:rPr lang="en-US" sz="1300" dirty="0">
+                <a:solidFill>
+                  <a:srgbClr val="1C2833"/>
+                </a:solidFill>
+                <a:latin typeface="Georgia" pitchFamily="34" charset="0"/>
+                <a:ea typeface="Georgia" pitchFamily="34" charset="-122"/>
+                <a:cs typeface="Georgia" pitchFamily="34" charset="-120"/>
+              </a:rPr>
+              <a:t> A small annual herb in the same family as coriander, cumin, and fennel (Apiaceae). The "seeds" you buy are technically tiny fruits.</a:t>
+            </a:r>
+            <a:endParaRPr lang="en-US" sz="1300" dirty="0"/>
+          </a:p>
+        </p:txBody>
+      </p:sp>
+      <p:sp>
+        <p:nvSpPr>
+          <p:cNvPr id="8" name="Text 6"/>
+          <p:cNvSpPr/>
+          <p:nvPr/>
+        </p:nvSpPr>
+        <p:spPr>
+          <a:xfrm>
+            <a:off x="692051" y="1843236"/>
+            <a:ext cx="7973389" cy="461963"/>
+          </a:xfrm>
+          <a:prstGeom prst="rect">
+            <a:avLst/>
+          </a:prstGeom>
+          <a:noFill/>
+          <a:ln/>
+        </p:spPr>
+        <p:txBody>
+          <a:bodyPr wrap="square" lIns="0" tIns="0" rIns="0" bIns="0" rtlCol="0" anchor="t"/>
+          <a:lstStyle/>
+          <a:p>
+            <a:pPr algn="l" indent="0" marL="0">
+              <a:lnSpc>
+                <a:spcPts val="1820"/>
+              </a:lnSpc>
+              <a:spcBef>
+                <a:spcPts val="300"/>
+              </a:spcBef>
+              <a:spcAft>
+                <a:spcPts val="300"/>
+              </a:spcAft>
+              <a:buNone/>
+            </a:pPr>
+            <a:r>
+              <a:rPr lang="en-US" sz="1300" b="1" i="1" dirty="0">
+                <a:solidFill>
+                  <a:srgbClr val="1C2833"/>
+                </a:solidFill>
+                <a:latin typeface="Georgia" pitchFamily="34" charset="0"/>
+                <a:ea typeface="Georgia" pitchFamily="34" charset="-122"/>
+                <a:cs typeface="Georgia" pitchFamily="34" charset="-120"/>
+              </a:rPr>
+              <a:t>How to identify:</a:t>
+            </a:r>
+            <a:pPr algn="l" indent="0" marL="0">
+              <a:lnSpc>
+                <a:spcPts val="1820"/>
+              </a:lnSpc>
+              <a:spcBef>
+                <a:spcPts val="300"/>
+              </a:spcBef>
+              <a:spcAft>
+                <a:spcPts val="300"/>
+              </a:spcAft>
+              <a:buNone/>
+            </a:pPr>
+            <a:r>
+              <a:rPr lang="en-US" sz="1300" dirty="0">
+                <a:solidFill>
+                  <a:srgbClr val="1C2833"/>
+                </a:solidFill>
+                <a:latin typeface="Georgia" pitchFamily="34" charset="0"/>
+                <a:ea typeface="Georgia" pitchFamily="34" charset="-122"/>
+                <a:cs typeface="Georgia" pitchFamily="34" charset="-120"/>
+              </a:rPr>
+              <a:t> Oval, ridged, greyish-brown, about 2 mm long. Strong thyme-like smell — much stronger when crushed.</a:t>
+            </a:r>
+            <a:endParaRPr lang="en-US" sz="1300" dirty="0"/>
+          </a:p>
+        </p:txBody>
+      </p:sp>
+      <p:sp>
+        <p:nvSpPr>
+          <p:cNvPr id="9" name="Text 7"/>
+          <p:cNvSpPr/>
+          <p:nvPr/>
+        </p:nvSpPr>
+        <p:spPr>
+          <a:xfrm>
+            <a:off x="692051" y="2343299"/>
+            <a:ext cx="7973389" cy="461963"/>
+          </a:xfrm>
+          <a:prstGeom prst="rect">
+            <a:avLst/>
+          </a:prstGeom>
+          <a:noFill/>
+          <a:ln/>
+        </p:spPr>
+        <p:txBody>
+          <a:bodyPr wrap="square" lIns="0" tIns="0" rIns="0" bIns="0" rtlCol="0" anchor="t"/>
+          <a:lstStyle/>
+          <a:p>
+            <a:pPr algn="l" indent="0" marL="0">
+              <a:lnSpc>
+                <a:spcPts val="1820"/>
+              </a:lnSpc>
+              <a:spcBef>
+                <a:spcPts val="300"/>
+              </a:spcBef>
+              <a:spcAft>
+                <a:spcPts val="300"/>
+              </a:spcAft>
+              <a:buNone/>
+            </a:pPr>
+            <a:r>
+              <a:rPr lang="en-US" sz="1300" b="1" i="1" dirty="0">
+                <a:solidFill>
+                  <a:srgbClr val="1C2833"/>
+                </a:solidFill>
+                <a:latin typeface="Georgia" pitchFamily="34" charset="0"/>
+                <a:ea typeface="Georgia" pitchFamily="34" charset="-122"/>
+                <a:cs typeface="Georgia" pitchFamily="34" charset="-120"/>
+              </a:rPr>
+              <a:t>What's inside:</a:t>
+            </a:r>
+            <a:pPr algn="l" indent="0" marL="0">
+              <a:lnSpc>
+                <a:spcPts val="1820"/>
+              </a:lnSpc>
+              <a:spcBef>
+                <a:spcPts val="300"/>
+              </a:spcBef>
+              <a:spcAft>
+                <a:spcPts val="300"/>
+              </a:spcAft>
+              <a:buNone/>
+            </a:pPr>
+            <a:r>
+              <a:rPr lang="en-US" sz="1300" dirty="0">
+                <a:solidFill>
+                  <a:srgbClr val="1C2833"/>
+                </a:solidFill>
+                <a:latin typeface="Georgia" pitchFamily="34" charset="0"/>
+                <a:ea typeface="Georgia" pitchFamily="34" charset="-122"/>
+                <a:cs typeface="Georgia" pitchFamily="34" charset="-120"/>
+              </a:rPr>
+              <a:t> </a:t>
+            </a:r>
+            <a:pPr algn="l" indent="0" marL="0">
+              <a:lnSpc>
+                <a:spcPts val="1820"/>
+              </a:lnSpc>
+              <a:spcBef>
+                <a:spcPts val="300"/>
+              </a:spcBef>
+              <a:spcAft>
+                <a:spcPts val="300"/>
+              </a:spcAft>
+              <a:buNone/>
+            </a:pPr>
+            <a:r>
+              <a:rPr lang="en-US" sz="1300" b="1" i="1" dirty="0">
+                <a:solidFill>
+                  <a:srgbClr val="1C2833"/>
+                </a:solidFill>
+                <a:latin typeface="Georgia" pitchFamily="34" charset="0"/>
+                <a:ea typeface="Georgia" pitchFamily="34" charset="-122"/>
+                <a:cs typeface="Georgia" pitchFamily="34" charset="-120"/>
+              </a:rPr>
+              <a:t>Thymol</a:t>
+            </a:r>
+            <a:pPr algn="l" indent="0" marL="0">
+              <a:lnSpc>
+                <a:spcPts val="1820"/>
+              </a:lnSpc>
+              <a:spcBef>
+                <a:spcPts val="300"/>
+              </a:spcBef>
+              <a:spcAft>
+                <a:spcPts val="300"/>
+              </a:spcAft>
+              <a:buNone/>
+            </a:pPr>
+            <a:r>
+              <a:rPr lang="en-US" sz="1300" dirty="0">
+                <a:solidFill>
+                  <a:srgbClr val="1C2833"/>
+                </a:solidFill>
+                <a:latin typeface="Georgia" pitchFamily="34" charset="0"/>
+                <a:ea typeface="Georgia" pitchFamily="34" charset="-122"/>
+                <a:cs typeface="Georgia" pitchFamily="34" charset="-120"/>
+              </a:rPr>
+              <a:t> — a phenolic monoterpenoid. Same dominant compound as European thyme — </a:t>
+            </a:r>
+            <a:pPr algn="l" indent="0" marL="0">
+              <a:lnSpc>
+                <a:spcPts val="1820"/>
+              </a:lnSpc>
+              <a:spcBef>
+                <a:spcPts val="300"/>
+              </a:spcBef>
+              <a:spcAft>
+                <a:spcPts val="300"/>
+              </a:spcAft>
+              <a:buNone/>
+            </a:pPr>
+            <a:r>
+              <a:rPr lang="en-US" sz="1300" i="1" dirty="0">
+                <a:solidFill>
+                  <a:srgbClr val="1C2833"/>
+                </a:solidFill>
+                <a:latin typeface="Georgia" pitchFamily="34" charset="0"/>
+                <a:ea typeface="Georgia" pitchFamily="34" charset="-122"/>
+                <a:cs typeface="Georgia" pitchFamily="34" charset="-120"/>
+              </a:rPr>
+              <a:t>convergent chemistry</a:t>
+            </a:r>
+            <a:pPr algn="l" indent="0" marL="0">
+              <a:lnSpc>
+                <a:spcPts val="1820"/>
+              </a:lnSpc>
+              <a:spcBef>
+                <a:spcPts val="300"/>
+              </a:spcBef>
+              <a:spcAft>
+                <a:spcPts val="300"/>
+              </a:spcAft>
+              <a:buNone/>
+            </a:pPr>
+            <a:r>
+              <a:rPr lang="en-US" sz="1300" dirty="0">
+                <a:solidFill>
+                  <a:srgbClr val="1C2833"/>
+                </a:solidFill>
+                <a:latin typeface="Georgia" pitchFamily="34" charset="0"/>
+                <a:ea typeface="Georgia" pitchFamily="34" charset="-122"/>
+                <a:cs typeface="Georgia" pitchFamily="34" charset="-120"/>
+              </a:rPr>
+              <a:t> between unrelated plants.</a:t>
+            </a:r>
+            <a:endParaRPr lang="en-US" sz="1300" dirty="0"/>
+          </a:p>
+        </p:txBody>
+      </p:sp>
+      <p:sp>
+        <p:nvSpPr>
+          <p:cNvPr id="10" name="Text 8"/>
+          <p:cNvSpPr/>
+          <p:nvPr/>
+        </p:nvSpPr>
+        <p:spPr>
+          <a:xfrm>
+            <a:off x="692051" y="2843361"/>
+            <a:ext cx="7973389" cy="461963"/>
+          </a:xfrm>
+          <a:prstGeom prst="rect">
+            <a:avLst/>
+          </a:prstGeom>
+          <a:noFill/>
+          <a:ln/>
+        </p:spPr>
+        <p:txBody>
+          <a:bodyPr wrap="square" lIns="0" tIns="0" rIns="0" bIns="0" rtlCol="0" anchor="t"/>
+          <a:lstStyle/>
+          <a:p>
+            <a:pPr algn="l" indent="0" marL="0">
+              <a:lnSpc>
+                <a:spcPts val="1820"/>
+              </a:lnSpc>
+              <a:spcBef>
+                <a:spcPts val="300"/>
+              </a:spcBef>
+              <a:spcAft>
+                <a:spcPts val="300"/>
+              </a:spcAft>
+              <a:buNone/>
+            </a:pPr>
+            <a:r>
+              <a:rPr lang="en-US" sz="1300" b="1" i="1" dirty="0">
+                <a:solidFill>
+                  <a:srgbClr val="1C2833"/>
+                </a:solidFill>
+                <a:latin typeface="Georgia" pitchFamily="34" charset="0"/>
+                <a:ea typeface="Georgia" pitchFamily="34" charset="-122"/>
+                <a:cs typeface="Georgia" pitchFamily="34" charset="-120"/>
+              </a:rPr>
+              <a:t>Traditional use:</a:t>
+            </a:r>
+            <a:pPr algn="l" indent="0" marL="0">
+              <a:lnSpc>
+                <a:spcPts val="1820"/>
+              </a:lnSpc>
+              <a:spcBef>
+                <a:spcPts val="300"/>
+              </a:spcBef>
+              <a:spcAft>
+                <a:spcPts val="300"/>
+              </a:spcAft>
+              <a:buNone/>
+            </a:pPr>
+            <a:r>
+              <a:rPr lang="en-US" sz="1300" dirty="0">
+                <a:solidFill>
+                  <a:srgbClr val="1C2833"/>
+                </a:solidFill>
+                <a:latin typeface="Georgia" pitchFamily="34" charset="0"/>
+                <a:ea typeface="Georgia" pitchFamily="34" charset="-122"/>
+                <a:cs typeface="Georgia" pitchFamily="34" charset="-120"/>
+              </a:rPr>
+              <a:t> Tempered into hot oil for parathas, savoury snacks. Ajwain water (steeped seeds in warm water) is a common Indian household remedy for indigestion.</a:t>
+            </a:r>
+            <a:endParaRPr lang="en-US" sz="1300" dirty="0"/>
+          </a:p>
+        </p:txBody>
+      </p:sp>
+      <p:sp>
+        <p:nvSpPr>
+          <p:cNvPr id="11" name="Text 9"/>
+          <p:cNvSpPr/>
+          <p:nvPr/>
+        </p:nvSpPr>
+        <p:spPr>
+          <a:xfrm>
+            <a:off x="692051" y="3343424"/>
+            <a:ext cx="7973389" cy="692944"/>
+          </a:xfrm>
+          <a:prstGeom prst="rect">
+            <a:avLst/>
+          </a:prstGeom>
+          <a:noFill/>
+          <a:ln/>
+        </p:spPr>
+        <p:txBody>
+          <a:bodyPr wrap="square" lIns="0" tIns="0" rIns="0" bIns="0" rtlCol="0" anchor="t"/>
+          <a:lstStyle/>
+          <a:p>
+            <a:pPr algn="l" indent="0" marL="0">
+              <a:lnSpc>
+                <a:spcPts val="1820"/>
+              </a:lnSpc>
+              <a:spcBef>
+                <a:spcPts val="300"/>
+              </a:spcBef>
+              <a:spcAft>
+                <a:spcPts val="300"/>
+              </a:spcAft>
+              <a:buNone/>
+            </a:pPr>
+            <a:r>
+              <a:rPr lang="en-US" sz="1300" b="1" i="1" dirty="0">
+                <a:solidFill>
+                  <a:srgbClr val="1C2833"/>
+                </a:solidFill>
+                <a:latin typeface="Georgia" pitchFamily="34" charset="0"/>
+                <a:ea typeface="Georgia" pitchFamily="34" charset="-122"/>
+                <a:cs typeface="Georgia" pitchFamily="34" charset="-120"/>
+              </a:rPr>
+              <a:t>Honest evidence:</a:t>
+            </a:r>
+            <a:pPr algn="l" indent="0" marL="0">
+              <a:lnSpc>
+                <a:spcPts val="1820"/>
+              </a:lnSpc>
+              <a:spcBef>
+                <a:spcPts val="300"/>
+              </a:spcBef>
+              <a:spcAft>
+                <a:spcPts val="300"/>
+              </a:spcAft>
+              <a:buNone/>
+            </a:pPr>
+            <a:r>
+              <a:rPr lang="en-US" sz="1300" dirty="0">
+                <a:solidFill>
+                  <a:srgbClr val="1C2833"/>
+                </a:solidFill>
+                <a:latin typeface="Georgia" pitchFamily="34" charset="0"/>
+                <a:ea typeface="Georgia" pitchFamily="34" charset="-122"/>
+                <a:cs typeface="Georgia" pitchFamily="34" charset="-120"/>
+              </a:rPr>
+              <a:t> Mechanism for carminative (anti-gas) action is well established. Clinical evidence for general indigestion is positive but small. </a:t>
+            </a:r>
+            <a:pPr algn="l" indent="0" marL="0">
+              <a:lnSpc>
+                <a:spcPts val="1820"/>
+              </a:lnSpc>
+              <a:spcBef>
+                <a:spcPts val="300"/>
+              </a:spcBef>
+              <a:spcAft>
+                <a:spcPts val="300"/>
+              </a:spcAft>
+              <a:buNone/>
+            </a:pPr>
+            <a:r>
+              <a:rPr lang="en-US" sz="1300" b="1" i="1" dirty="0">
+                <a:solidFill>
+                  <a:srgbClr val="1C2833"/>
+                </a:solidFill>
+                <a:latin typeface="Georgia" pitchFamily="34" charset="0"/>
+                <a:ea typeface="Georgia" pitchFamily="34" charset="-122"/>
+                <a:cs typeface="Georgia" pitchFamily="34" charset="-120"/>
+              </a:rPr>
+              <a:t>Essential oils are concentrated and not safe for ingestion in school-age use.</a:t>
+            </a:r>
+            <a:endParaRPr lang="en-US" sz="1300" dirty="0"/>
+          </a:p>
+        </p:txBody>
+      </p:sp>
+      <p:sp>
+        <p:nvSpPr>
+          <p:cNvPr id="12" name="Text 10"/>
+          <p:cNvSpPr/>
+          <p:nvPr/>
+        </p:nvSpPr>
+        <p:spPr>
+          <a:xfrm>
+            <a:off x="692051" y="4074468"/>
+            <a:ext cx="7973389" cy="461963"/>
+          </a:xfrm>
+          <a:prstGeom prst="rect">
+            <a:avLst/>
+          </a:prstGeom>
+          <a:noFill/>
+          <a:ln/>
+        </p:spPr>
+        <p:txBody>
+          <a:bodyPr wrap="square" lIns="0" tIns="0" rIns="0" bIns="0" rtlCol="0" anchor="t"/>
+          <a:lstStyle/>
+          <a:p>
+            <a:pPr algn="l" indent="0" marL="0">
+              <a:lnSpc>
+                <a:spcPts val="1820"/>
+              </a:lnSpc>
+              <a:spcBef>
+                <a:spcPts val="300"/>
+              </a:spcBef>
+              <a:spcAft>
+                <a:spcPts val="300"/>
+              </a:spcAft>
+              <a:buNone/>
+            </a:pPr>
+            <a:r>
+              <a:rPr lang="en-US" sz="1300" b="1" i="1" dirty="0">
+                <a:solidFill>
+                  <a:srgbClr val="1C2833"/>
+                </a:solidFill>
+                <a:latin typeface="Georgia" pitchFamily="34" charset="0"/>
+                <a:ea typeface="Georgia" pitchFamily="34" charset="-122"/>
+                <a:cs typeface="Georgia" pitchFamily="34" charset="-120"/>
+              </a:rPr>
+              <a:t>Ayurvedic frame:</a:t>
+            </a:r>
+            <a:pPr algn="l" indent="0" marL="0">
+              <a:lnSpc>
+                <a:spcPts val="1820"/>
+              </a:lnSpc>
+              <a:spcBef>
+                <a:spcPts val="300"/>
+              </a:spcBef>
+              <a:spcAft>
+                <a:spcPts val="300"/>
+              </a:spcAft>
+              <a:buNone/>
+            </a:pPr>
+            <a:r>
+              <a:rPr lang="en-US" sz="1300" dirty="0">
+                <a:solidFill>
+                  <a:srgbClr val="1C2833"/>
+                </a:solidFill>
+                <a:latin typeface="Georgia" pitchFamily="34" charset="0"/>
+                <a:ea typeface="Georgia" pitchFamily="34" charset="-122"/>
+                <a:cs typeface="Georgia" pitchFamily="34" charset="-120"/>
+              </a:rPr>
+              <a:t> </a:t>
+            </a:r>
+            <a:pPr algn="l" indent="0" marL="0">
+              <a:lnSpc>
+                <a:spcPts val="1820"/>
+              </a:lnSpc>
+              <a:spcBef>
+                <a:spcPts val="300"/>
+              </a:spcBef>
+              <a:spcAft>
+                <a:spcPts val="300"/>
+              </a:spcAft>
+              <a:buNone/>
+            </a:pPr>
+            <a:r>
+              <a:rPr lang="en-US" sz="1300" i="1" dirty="0">
+                <a:solidFill>
+                  <a:srgbClr val="1C2833"/>
+                </a:solidFill>
+                <a:latin typeface="Georgia" pitchFamily="34" charset="0"/>
+                <a:ea typeface="Georgia" pitchFamily="34" charset="-122"/>
+                <a:cs typeface="Georgia" pitchFamily="34" charset="-120"/>
+              </a:rPr>
+              <a:t>kaṭu-tikta</a:t>
+            </a:r>
+            <a:pPr algn="l" indent="0" marL="0">
+              <a:lnSpc>
+                <a:spcPts val="1820"/>
+              </a:lnSpc>
+              <a:spcBef>
+                <a:spcPts val="300"/>
+              </a:spcBef>
+              <a:spcAft>
+                <a:spcPts val="300"/>
+              </a:spcAft>
+              <a:buNone/>
+            </a:pPr>
+            <a:r>
+              <a:rPr lang="en-US" sz="1300" dirty="0">
+                <a:solidFill>
+                  <a:srgbClr val="1C2833"/>
+                </a:solidFill>
+                <a:latin typeface="Georgia" pitchFamily="34" charset="0"/>
+                <a:ea typeface="Georgia" pitchFamily="34" charset="-122"/>
+                <a:cs typeface="Georgia" pitchFamily="34" charset="-120"/>
+              </a:rPr>
+              <a:t> (pungent-bitter), </a:t>
+            </a:r>
+            <a:pPr algn="l" indent="0" marL="0">
+              <a:lnSpc>
+                <a:spcPts val="1820"/>
+              </a:lnSpc>
+              <a:spcBef>
+                <a:spcPts val="300"/>
+              </a:spcBef>
+              <a:spcAft>
+                <a:spcPts val="300"/>
+              </a:spcAft>
+              <a:buNone/>
+            </a:pPr>
+            <a:r>
+              <a:rPr lang="en-US" sz="1300" i="1" dirty="0">
+                <a:solidFill>
+                  <a:srgbClr val="1C2833"/>
+                </a:solidFill>
+                <a:latin typeface="Georgia" pitchFamily="34" charset="0"/>
+                <a:ea typeface="Georgia" pitchFamily="34" charset="-122"/>
+                <a:cs typeface="Georgia" pitchFamily="34" charset="-120"/>
+              </a:rPr>
+              <a:t>uṣṇa</a:t>
+            </a:r>
+            <a:pPr algn="l" indent="0" marL="0">
+              <a:lnSpc>
+                <a:spcPts val="1820"/>
+              </a:lnSpc>
+              <a:spcBef>
+                <a:spcPts val="300"/>
+              </a:spcBef>
+              <a:spcAft>
+                <a:spcPts val="300"/>
+              </a:spcAft>
+              <a:buNone/>
+            </a:pPr>
+            <a:r>
+              <a:rPr lang="en-US" sz="1300" dirty="0">
+                <a:solidFill>
+                  <a:srgbClr val="1C2833"/>
+                </a:solidFill>
+                <a:latin typeface="Georgia" pitchFamily="34" charset="0"/>
+                <a:ea typeface="Georgia" pitchFamily="34" charset="-122"/>
+                <a:cs typeface="Georgia" pitchFamily="34" charset="-120"/>
+              </a:rPr>
+              <a:t> (heating). Balances </a:t>
+            </a:r>
+            <a:pPr algn="l" indent="0" marL="0">
+              <a:lnSpc>
+                <a:spcPts val="1820"/>
+              </a:lnSpc>
+              <a:spcBef>
+                <a:spcPts val="300"/>
+              </a:spcBef>
+              <a:spcAft>
+                <a:spcPts val="300"/>
+              </a:spcAft>
+              <a:buNone/>
+            </a:pPr>
+            <a:r>
+              <a:rPr lang="en-US" sz="1300" i="1" dirty="0">
+                <a:solidFill>
+                  <a:srgbClr val="1C2833"/>
+                </a:solidFill>
+                <a:latin typeface="Georgia" pitchFamily="34" charset="0"/>
+                <a:ea typeface="Georgia" pitchFamily="34" charset="-122"/>
+                <a:cs typeface="Georgia" pitchFamily="34" charset="-120"/>
+              </a:rPr>
+              <a:t>vāta</a:t>
+            </a:r>
+            <a:pPr algn="l" indent="0" marL="0">
+              <a:lnSpc>
+                <a:spcPts val="1820"/>
+              </a:lnSpc>
+              <a:spcBef>
+                <a:spcPts val="300"/>
+              </a:spcBef>
+              <a:spcAft>
+                <a:spcPts val="300"/>
+              </a:spcAft>
+              <a:buNone/>
+            </a:pPr>
+            <a:r>
+              <a:rPr lang="en-US" sz="1300" dirty="0">
+                <a:solidFill>
+                  <a:srgbClr val="1C2833"/>
+                </a:solidFill>
+                <a:latin typeface="Georgia" pitchFamily="34" charset="0"/>
+                <a:ea typeface="Georgia" pitchFamily="34" charset="-122"/>
+                <a:cs typeface="Georgia" pitchFamily="34" charset="-120"/>
+              </a:rPr>
+              <a:t> and </a:t>
+            </a:r>
+            <a:pPr algn="l" indent="0" marL="0">
+              <a:lnSpc>
+                <a:spcPts val="1820"/>
+              </a:lnSpc>
+              <a:spcBef>
+                <a:spcPts val="300"/>
+              </a:spcBef>
+              <a:spcAft>
+                <a:spcPts val="300"/>
+              </a:spcAft>
+              <a:buNone/>
+            </a:pPr>
+            <a:r>
+              <a:rPr lang="en-US" sz="1300" i="1" dirty="0">
+                <a:solidFill>
+                  <a:srgbClr val="1C2833"/>
+                </a:solidFill>
+                <a:latin typeface="Georgia" pitchFamily="34" charset="0"/>
+                <a:ea typeface="Georgia" pitchFamily="34" charset="-122"/>
+                <a:cs typeface="Georgia" pitchFamily="34" charset="-120"/>
+              </a:rPr>
+              <a:t>kapha</a:t>
+            </a:r>
+            <a:pPr algn="l" indent="0" marL="0">
+              <a:lnSpc>
+                <a:spcPts val="1820"/>
+              </a:lnSpc>
+              <a:spcBef>
+                <a:spcPts val="300"/>
+              </a:spcBef>
+              <a:spcAft>
+                <a:spcPts val="300"/>
+              </a:spcAft>
+              <a:buNone/>
+            </a:pPr>
+            <a:r>
+              <a:rPr lang="en-US" sz="1300" dirty="0">
+                <a:solidFill>
+                  <a:srgbClr val="1C2833"/>
+                </a:solidFill>
+                <a:latin typeface="Georgia" pitchFamily="34" charset="0"/>
+                <a:ea typeface="Georgia" pitchFamily="34" charset="-122"/>
+                <a:cs typeface="Georgia" pitchFamily="34" charset="-120"/>
+              </a:rPr>
+              <a:t> via digestive stimulation.</a:t>
+            </a:r>
+            <a:endParaRPr lang="en-US" sz="1300" dirty="0"/>
+          </a:p>
+        </p:txBody>
+      </p:sp>
+      <p:sp>
+        <p:nvSpPr>
+          <p:cNvPr id="13" name="Text 11"/>
+          <p:cNvSpPr/>
+          <p:nvPr/>
+        </p:nvSpPr>
+        <p:spPr>
+          <a:xfrm>
+            <a:off x="406301" y="4891980"/>
+            <a:ext cx="8498026" cy="213271"/>
+          </a:xfrm>
+          <a:prstGeom prst="rect">
+            <a:avLst/>
+          </a:prstGeom>
+          <a:noFill/>
+          <a:ln/>
+        </p:spPr>
+        <p:txBody>
+          <a:bodyPr wrap="square" lIns="0" tIns="0" rIns="0" bIns="0" rtlCol="0" anchor="t"/>
+          <a:lstStyle/>
+          <a:p>
+            <a:pPr algn="l" indent="0" marL="0">
+              <a:lnSpc>
+                <a:spcPts val="1680"/>
+              </a:lnSpc>
+              <a:spcBef>
+                <a:spcPts val="300"/>
+              </a:spcBef>
+              <a:spcAft>
+                <a:spcPts val="300"/>
+              </a:spcAft>
+              <a:buNone/>
+            </a:pPr>
+            <a:r>
+              <a:rPr lang="en-US" sz="1200" dirty="0">
+                <a:solidFill>
+                  <a:srgbClr val="1C2833"/>
+                </a:solidFill>
+                <a:latin typeface="Arial" pitchFamily="34" charset="0"/>
+                <a:ea typeface="Arial" pitchFamily="34" charset="-122"/>
+                <a:cs typeface="Arial" pitchFamily="34" charset="-120"/>
+              </a:rPr>
+              <a:t>Middle ·  · IKS Curriculum</a:t>
+            </a:r>
+            <a:endParaRPr lang="en-US" sz="1200" dirty="0"/>
+          </a:p>
+        </p:txBody>
+      </p:sp>
+    </p:spTree>
+  </p:cSld>
+  <p:clrMapOvr>
+    <a:masterClrMapping/>
+  </p:clrMapOvr>
+</p:sld>
+</file>
+
+<file path=ppt/slides/slide18.xml><?xml version="1.0" encoding="utf-8"?>
+<p:sld xmlns:a="http://schemas.openxmlformats.org/drawingml/2006/main" xmlns:r="http://schemas.openxmlformats.org/officeDocument/2006/relationships" xmlns:p="http://schemas.openxmlformats.org/presentationml/2006/main">
+  <p:cSld name="Slide 18">
+    <p:bg>
+      <p:bgPr>
+        <a:solidFill>
+          <a:srgbClr val="FFFFFF"/>
+        </a:solidFill>
+      </p:bgPr>
+    </p:bg>
+    <p:spTree>
+      <p:nvGrpSpPr>
+        <p:cNvPr id="1" name=""/>
+        <p:cNvGrpSpPr/>
+        <p:nvPr/>
+      </p:nvGrpSpPr>
+      <p:grpSpPr>
+        <a:xfrm>
+          <a:off x="0" y="0"/>
+          <a:ext cx="0" cy="0"/>
+          <a:chOff x="0" y="0"/>
+          <a:chExt cx="0" cy="0"/>
+        </a:xfrm>
+      </p:grpSpPr>
+      <p:sp>
+        <p:nvSpPr>
+          <p:cNvPr id="2" name="Text 0"/>
+          <p:cNvSpPr/>
+          <p:nvPr/>
+        </p:nvSpPr>
+        <p:spPr>
+          <a:xfrm>
+            <a:off x="0" y="0"/>
+            <a:ext cx="9144000" cy="101501"/>
+          </a:xfrm>
+          <a:prstGeom prst="rect">
+            <a:avLst/>
+          </a:prstGeom>
+          <a:solidFill>
+            <a:srgbClr val="277884"/>
+          </a:solidFill>
+          <a:ln/>
+        </p:spPr>
+        <p:txBody>
+          <a:bodyPr wrap="square" rtlCol="0" anchor="ctr"/>
+          <a:lstStyle/>
+          <a:p>
+            <a:pPr indent="0" marL="0">
+              <a:buNone/>
+            </a:pPr>
+            <a:endParaRPr lang="en-US" dirty="0"/>
+          </a:p>
+        </p:txBody>
+      </p:sp>
+      <p:sp>
+        <p:nvSpPr>
+          <p:cNvPr id="3" name="Text 1"/>
+          <p:cNvSpPr/>
+          <p:nvPr/>
+        </p:nvSpPr>
+        <p:spPr>
+          <a:xfrm>
+            <a:off x="406301" y="457051"/>
+            <a:ext cx="8498026" cy="274290"/>
+          </a:xfrm>
+          <a:prstGeom prst="rect">
+            <a:avLst/>
+          </a:prstGeom>
+          <a:noFill/>
+          <a:ln/>
+        </p:spPr>
+        <p:txBody>
+          <a:bodyPr wrap="square" lIns="0" tIns="0" rIns="0" bIns="0" rtlCol="0" anchor="t"/>
+          <a:lstStyle/>
+          <a:p>
+            <a:pPr algn="l" indent="0" marL="0">
+              <a:lnSpc>
+                <a:spcPts val="2160"/>
+              </a:lnSpc>
+              <a:spcBef>
+                <a:spcPts val="600"/>
+              </a:spcBef>
+              <a:spcAft>
+                <a:spcPts val="800"/>
+              </a:spcAft>
+              <a:buNone/>
+            </a:pPr>
+            <a:r>
+              <a:rPr lang="en-US" sz="1800" b="1" dirty="0">
+                <a:solidFill>
+                  <a:srgbClr val="FE4447"/>
+                </a:solidFill>
+                <a:latin typeface="Georgia" pitchFamily="34" charset="0"/>
+                <a:ea typeface="Georgia" pitchFamily="34" charset="-122"/>
+                <a:cs typeface="Georgia" pitchFamily="34" charset="-120"/>
+              </a:rPr>
+              <a:t>Homework</a:t>
+            </a:r>
+            <a:endParaRPr lang="en-US" sz="1800" dirty="0"/>
+          </a:p>
+        </p:txBody>
+      </p:sp>
+      <p:sp>
+        <p:nvSpPr>
+          <p:cNvPr id="4" name="Text 2"/>
+          <p:cNvSpPr/>
+          <p:nvPr/>
+        </p:nvSpPr>
+        <p:spPr>
+          <a:xfrm>
+            <a:off x="634901" y="883593"/>
+            <a:ext cx="8102798" cy="487561"/>
+          </a:xfrm>
+          <a:prstGeom prst="rect">
+            <a:avLst/>
+          </a:prstGeom>
+          <a:noFill/>
+          <a:ln/>
+        </p:spPr>
+        <p:txBody>
+          <a:bodyPr wrap="square" lIns="0" tIns="0" rIns="0" bIns="0" rtlCol="0" anchor="t"/>
+          <a:lstStyle/>
+          <a:p>
+            <a:pPr algn="l" marL="342900" indent="-342900">
+              <a:lnSpc>
                 <a:spcPts val="1620"/>
               </a:lnSpc>
               <a:spcAft>
                 <a:spcPts val="300"/>
               </a:spcAft>
-              <a:buNone/>
+              <a:buSzPct val="100000"/>
+              <a:buChar char="•"/>
             </a:pPr>
             <a:r>
               <a:rPr lang="en-US" sz="1200" dirty="0">
@@ -3238,7 +6604,47 @@
                 <a:ea typeface="Arial" pitchFamily="34" charset="-122"/>
                 <a:cs typeface="Arial" pitchFamily="34" charset="-120"/>
               </a:rPr>
-              <a:t> in Ayurveda — standard nighantu references; chapter-level only.</a:t>
+              <a:t>Find ajwain in your kitchen. Smell it. Then ask one adult: </a:t>
+            </a:r>
+            <a:pPr algn="l" indent="0" marL="0">
+              <a:lnSpc>
+                <a:spcPts val="1620"/>
+              </a:lnSpc>
+              <a:spcAft>
+                <a:spcPts val="300"/>
+              </a:spcAft>
+              <a:buNone/>
+            </a:pPr>
+            <a:r>
+              <a:rPr lang="en-US" sz="1200" i="1" dirty="0">
+                <a:solidFill>
+                  <a:srgbClr val="1C2833"/>
+                </a:solidFill>
+                <a:latin typeface="Arial" pitchFamily="34" charset="0"/>
+                <a:ea typeface="Arial" pitchFamily="34" charset="-122"/>
+                <a:cs typeface="Arial" pitchFamily="34" charset="-120"/>
+              </a:rPr>
+              <a:t>"What do you put ajwain in, and why?"</a:t>
+            </a:r>
+            <a:pPr algn="l" indent="0" marL="0">
+              <a:lnSpc>
+                <a:spcPts val="1620"/>
+              </a:lnSpc>
+              <a:spcAft>
+                <a:spcPts val="300"/>
+              </a:spcAft>
+              <a:buNone/>
+            </a:pPr>
+            <a:r>
+              <a:rPr lang="en-US" sz="1200" dirty="0">
+                <a:solidFill>
+                  <a:srgbClr val="1C2833"/>
+                </a:solidFill>
+                <a:latin typeface="Arial" pitchFamily="34" charset="0"/>
+                <a:ea typeface="Arial" pitchFamily="34" charset="-122"/>
+                <a:cs typeface="Arial" pitchFamily="34" charset="-120"/>
+              </a:rPr>
+              <a:t> Write down their answer.</a:t>
             </a:r>
             <a:endParaRPr lang="en-US" sz="1200" dirty="0"/>
           </a:p>
@@ -3246,7 +6652,315 @@
       </p:sp>
       <p:sp>
         <p:nvSpPr>
-          <p:cNvPr id="6" name="Text 4"/>
+          <p:cNvPr id="5" name="Text 3"/>
+          <p:cNvSpPr/>
+          <p:nvPr/>
+        </p:nvSpPr>
+        <p:spPr>
+          <a:xfrm>
+            <a:off x="406301" y="4434929"/>
+            <a:ext cx="8498026" cy="213271"/>
+          </a:xfrm>
+          <a:prstGeom prst="rect">
+            <a:avLst/>
+          </a:prstGeom>
+          <a:noFill/>
+          <a:ln/>
+        </p:spPr>
+        <p:txBody>
+          <a:bodyPr wrap="square" lIns="0" tIns="0" rIns="0" bIns="0" rtlCol="0" anchor="t"/>
+          <a:lstStyle/>
+          <a:p>
+            <a:pPr algn="l" indent="0" marL="0">
+              <a:lnSpc>
+                <a:spcPts val="1680"/>
+              </a:lnSpc>
+              <a:spcBef>
+                <a:spcPts val="300"/>
+              </a:spcBef>
+              <a:spcAft>
+                <a:spcPts val="300"/>
+              </a:spcAft>
+              <a:buNone/>
+            </a:pPr>
+            <a:r>
+              <a:rPr lang="en-US" sz="1200" dirty="0">
+                <a:solidFill>
+                  <a:srgbClr val="1C2833"/>
+                </a:solidFill>
+                <a:latin typeface="Arial" pitchFamily="34" charset="0"/>
+                <a:ea typeface="Arial" pitchFamily="34" charset="-122"/>
+                <a:cs typeface="Arial" pitchFamily="34" charset="-120"/>
+              </a:rPr>
+              <a:t>Middle ·  · IKS Curriculum</a:t>
+            </a:r>
+            <a:endParaRPr lang="en-US" sz="1200" dirty="0"/>
+          </a:p>
+        </p:txBody>
+      </p:sp>
+    </p:spTree>
+  </p:cSld>
+  <p:clrMapOvr>
+    <a:masterClrMapping/>
+  </p:clrMapOvr>
+</p:sld>
+</file>
+
+<file path=ppt/slides/slide19.xml><?xml version="1.0" encoding="utf-8"?>
+<p:sld xmlns:a="http://schemas.openxmlformats.org/drawingml/2006/main" xmlns:r="http://schemas.openxmlformats.org/officeDocument/2006/relationships" xmlns:p="http://schemas.openxmlformats.org/presentationml/2006/main">
+  <p:cSld name="Slide 19">
+    <p:bg>
+      <p:bgPr>
+        <a:solidFill>
+          <a:srgbClr val="FFFFFF"/>
+        </a:solidFill>
+      </p:bgPr>
+    </p:bg>
+    <p:spTree>
+      <p:nvGrpSpPr>
+        <p:cNvPr id="1" name=""/>
+        <p:cNvGrpSpPr/>
+        <p:nvPr/>
+      </p:nvGrpSpPr>
+      <p:grpSpPr>
+        <a:xfrm>
+          <a:off x="0" y="0"/>
+          <a:ext cx="0" cy="0"/>
+          <a:chOff x="0" y="0"/>
+          <a:chExt cx="0" cy="0"/>
+        </a:xfrm>
+      </p:grpSpPr>
+      <p:sp>
+        <p:nvSpPr>
+          <p:cNvPr id="2" name="Text 0"/>
+          <p:cNvSpPr/>
+          <p:nvPr/>
+        </p:nvSpPr>
+        <p:spPr>
+          <a:xfrm>
+            <a:off x="0" y="0"/>
+            <a:ext cx="9144000" cy="101501"/>
+          </a:xfrm>
+          <a:prstGeom prst="rect">
+            <a:avLst/>
+          </a:prstGeom>
+          <a:solidFill>
+            <a:srgbClr val="277884"/>
+          </a:solidFill>
+          <a:ln/>
+        </p:spPr>
+        <p:txBody>
+          <a:bodyPr wrap="square" rtlCol="0" anchor="ctr"/>
+          <a:lstStyle/>
+          <a:p>
+            <a:pPr indent="0" marL="0">
+              <a:buNone/>
+            </a:pPr>
+            <a:endParaRPr lang="en-US" dirty="0"/>
+          </a:p>
+        </p:txBody>
+      </p:sp>
+      <p:sp>
+        <p:nvSpPr>
+          <p:cNvPr id="3" name="Text 1"/>
+          <p:cNvSpPr/>
+          <p:nvPr/>
+        </p:nvSpPr>
+        <p:spPr>
+          <a:xfrm>
+            <a:off x="406301" y="457051"/>
+            <a:ext cx="8498026" cy="274290"/>
+          </a:xfrm>
+          <a:prstGeom prst="rect">
+            <a:avLst/>
+          </a:prstGeom>
+          <a:noFill/>
+          <a:ln/>
+        </p:spPr>
+        <p:txBody>
+          <a:bodyPr wrap="square" lIns="0" tIns="0" rIns="0" bIns="0" rtlCol="0" anchor="t"/>
+          <a:lstStyle/>
+          <a:p>
+            <a:pPr algn="l" indent="0" marL="0">
+              <a:lnSpc>
+                <a:spcPts val="2160"/>
+              </a:lnSpc>
+              <a:spcBef>
+                <a:spcPts val="600"/>
+              </a:spcBef>
+              <a:spcAft>
+                <a:spcPts val="800"/>
+              </a:spcAft>
+              <a:buNone/>
+            </a:pPr>
+            <a:r>
+              <a:rPr lang="en-US" sz="1800" b="1" dirty="0">
+                <a:solidFill>
+                  <a:srgbClr val="FE4447"/>
+                </a:solidFill>
+                <a:latin typeface="Georgia" pitchFamily="34" charset="0"/>
+                <a:ea typeface="Georgia" pitchFamily="34" charset="-122"/>
+                <a:cs typeface="Georgia" pitchFamily="34" charset="-120"/>
+              </a:rPr>
+              <a:t>Differentiation</a:t>
+            </a:r>
+            <a:endParaRPr lang="en-US" sz="1800" dirty="0"/>
+          </a:p>
+        </p:txBody>
+      </p:sp>
+      <p:sp>
+        <p:nvSpPr>
+          <p:cNvPr id="4" name="Text 2"/>
+          <p:cNvSpPr/>
+          <p:nvPr/>
+        </p:nvSpPr>
+        <p:spPr>
+          <a:xfrm>
+            <a:off x="634901" y="883593"/>
+            <a:ext cx="8102798" cy="937022"/>
+          </a:xfrm>
+          <a:prstGeom prst="rect">
+            <a:avLst/>
+          </a:prstGeom>
+          <a:noFill/>
+          <a:ln/>
+        </p:spPr>
+        <p:txBody>
+          <a:bodyPr wrap="square" lIns="0" tIns="0" rIns="0" bIns="0" rtlCol="0" anchor="t"/>
+          <a:lstStyle/>
+          <a:p>
+            <a:pPr algn="l" marL="342900" indent="-342900">
+              <a:lnSpc>
+                <a:spcPts val="1620"/>
+              </a:lnSpc>
+              <a:spcAft>
+                <a:spcPts val="300"/>
+              </a:spcAft>
+              <a:buSzPct val="100000"/>
+              <a:buChar char="•"/>
+            </a:pPr>
+            <a:r>
+              <a:rPr lang="en-US" sz="1200" b="1" dirty="0">
+                <a:solidFill>
+                  <a:srgbClr val="1C2833"/>
+                </a:solidFill>
+                <a:latin typeface="Arial" pitchFamily="34" charset="0"/>
+                <a:ea typeface="Arial" pitchFamily="34" charset="-122"/>
+                <a:cs typeface="Arial" pitchFamily="34" charset="-120"/>
+              </a:rPr>
+              <a:t>One tier up:</a:t>
+            </a:r>
+            <a:pPr algn="l" indent="0" marL="0">
+              <a:lnSpc>
+                <a:spcPts val="1620"/>
+              </a:lnSpc>
+              <a:spcAft>
+                <a:spcPts val="300"/>
+              </a:spcAft>
+              <a:buNone/>
+            </a:pPr>
+            <a:r>
+              <a:rPr lang="en-US" sz="1200" dirty="0">
+                <a:solidFill>
+                  <a:srgbClr val="1C2833"/>
+                </a:solidFill>
+                <a:latin typeface="Arial" pitchFamily="34" charset="0"/>
+                <a:ea typeface="Arial" pitchFamily="34" charset="-122"/>
+                <a:cs typeface="Arial" pitchFamily="34" charset="-120"/>
+              </a:rPr>
+              <a:t> </a:t>
+            </a:r>
+            <a:pPr algn="l" indent="0" marL="0">
+              <a:lnSpc>
+                <a:spcPts val="1620"/>
+              </a:lnSpc>
+              <a:spcAft>
+                <a:spcPts val="300"/>
+              </a:spcAft>
+              <a:buNone/>
+            </a:pPr>
+            <a:r>
+              <a:rPr lang="en-US" sz="1200" i="1" dirty="0">
+                <a:solidFill>
+                  <a:srgbClr val="1C2833"/>
+                </a:solidFill>
+                <a:latin typeface="Arial" pitchFamily="34" charset="0"/>
+                <a:ea typeface="Arial" pitchFamily="34" charset="-122"/>
+                <a:cs typeface="Arial" pitchFamily="34" charset="-120"/>
+              </a:rPr>
+              <a:t>Convergent chemistry</a:t>
+            </a:r>
+            <a:pPr algn="l" indent="0" marL="0">
+              <a:lnSpc>
+                <a:spcPts val="1620"/>
+              </a:lnSpc>
+              <a:spcAft>
+                <a:spcPts val="300"/>
+              </a:spcAft>
+              <a:buNone/>
+            </a:pPr>
+            <a:r>
+              <a:rPr lang="en-US" sz="1200" dirty="0">
+                <a:solidFill>
+                  <a:srgbClr val="1C2833"/>
+                </a:solidFill>
+                <a:latin typeface="Arial" pitchFamily="34" charset="0"/>
+                <a:ea typeface="Arial" pitchFamily="34" charset="-122"/>
+                <a:cs typeface="Arial" pitchFamily="34" charset="-120"/>
+              </a:rPr>
+              <a:t> — find one other example of two unrelated plant families producing the same compound (e.g. cinnamaldehyde in cinnamon and in some flowers; geraniol in geranium, lemongrass, rose). Sketch the molecular structure of thymol if you can.</a:t>
+            </a:r>
+            <a:endParaRPr lang="en-US" sz="1200" dirty="0"/>
+          </a:p>
+          <a:p>
+            <a:pPr algn="l" marL="342900" indent="-342900">
+              <a:lnSpc>
+                <a:spcPts val="1620"/>
+              </a:lnSpc>
+              <a:spcAft>
+                <a:spcPts val="300"/>
+              </a:spcAft>
+              <a:buSzPct val="100000"/>
+              <a:buChar char="•"/>
+            </a:pPr>
+            <a:r>
+              <a:rPr lang="en-US" sz="1200" b="1" dirty="0">
+                <a:solidFill>
+                  <a:srgbClr val="1C2833"/>
+                </a:solidFill>
+                <a:latin typeface="Arial" pitchFamily="34" charset="0"/>
+                <a:ea typeface="Arial" pitchFamily="34" charset="-122"/>
+                <a:cs typeface="Arial" pitchFamily="34" charset="-120"/>
+              </a:rPr>
+              <a:t>One tier down:</a:t>
+            </a:r>
+            <a:pPr algn="l" indent="0" marL="0">
+              <a:lnSpc>
+                <a:spcPts val="1620"/>
+              </a:lnSpc>
+              <a:spcAft>
+                <a:spcPts val="300"/>
+              </a:spcAft>
+              <a:buNone/>
+            </a:pPr>
+            <a:r>
+              <a:rPr lang="en-US" sz="1200" dirty="0">
+                <a:solidFill>
+                  <a:srgbClr val="1C2833"/>
+                </a:solidFill>
+                <a:latin typeface="Arial" pitchFamily="34" charset="0"/>
+                <a:ea typeface="Arial" pitchFamily="34" charset="-122"/>
+                <a:cs typeface="Arial" pitchFamily="34" charset="-120"/>
+              </a:rPr>
+              <a:t> Focus on identifying ajwain seeds by smell and naming the compound "thymol."</a:t>
+            </a:r>
+            <a:endParaRPr lang="en-US" sz="1200" dirty="0"/>
+          </a:p>
+        </p:txBody>
+      </p:sp>
+      <p:sp>
+        <p:nvSpPr>
+          <p:cNvPr id="5" name="Text 3"/>
           <p:cNvSpPr/>
           <p:nvPr/>
         </p:nvSpPr>
@@ -3396,7 +7110,7 @@
                 <a:ea typeface="Georgia" pitchFamily="34" charset="-122"/>
                 <a:cs typeface="Georgia" pitchFamily="34" charset="-120"/>
               </a:rPr>
-              <a:t>Materials</a:t>
+              <a:t>Learning objective</a:t>
             </a:r>
             <a:endParaRPr lang="en-US" sz="1800" dirty="0"/>
           </a:p>
@@ -3411,7 +7125,7 @@
         <p:spPr>
           <a:xfrm>
             <a:off x="406301" y="870942"/>
-            <a:ext cx="8498026" cy="853083"/>
+            <a:ext cx="8498026" cy="426541"/>
           </a:xfrm>
           <a:prstGeom prst="rect">
             <a:avLst/>
@@ -3444,7 +7158,7 @@
                 <a:ea typeface="Arial" pitchFamily="34" charset="-122"/>
                 <a:cs typeface="Arial" pitchFamily="34" charset="-120"/>
               </a:rPr>
-              <a:t>– Small jar of whole ajwain seeds (one per pair, plus one display jar) – Pestle and mortar (if available) – A few sprigs of fresh ajwain leaf (</a:t>
+              <a:t>By the end of this lesson, students can identify </a:t>
             </a:r>
             <a:pPr algn="l" indent="0" marL="0">
               <a:lnSpc>
@@ -3467,7 +7181,7 @@
                 <a:ea typeface="Arial" pitchFamily="34" charset="-122"/>
                 <a:cs typeface="Arial" pitchFamily="34" charset="-120"/>
               </a:rPr>
-              <a:t>ajwain ka patta</a:t>
+              <a:t>yavānī</a:t>
             </a:r>
             <a:pPr algn="l" indent="0" marL="0">
               <a:lnSpc>
@@ -3490,7 +7204,703 @@
                 <a:ea typeface="Arial" pitchFamily="34" charset="-122"/>
                 <a:cs typeface="Arial" pitchFamily="34" charset="-120"/>
               </a:rPr>
-              <a:t> — sometimes called Indian borage / Cuban oregano — different plant but commonly confused; clarify if you bring it) – Optional: dried thyme (the European cousin chemistry-wise) for the smell-bridge – Small bowl of warm water + a teaspoon of ajwain for the demo – Whiteboard</a:t>
+              <a:t> (</a:t>
+            </a:r>
+            <a:pPr algn="l" indent="0" marL="0">
+              <a:lnSpc>
+                <a:spcPts val="1680"/>
+              </a:lnSpc>
+              <a:spcBef>
+                <a:spcPts val="300"/>
+              </a:spcBef>
+              <a:spcAft>
+                <a:spcPts val="300"/>
+              </a:spcAft>
+              <a:buNone/>
+            </a:pPr>
+            <a:r>
+              <a:rPr lang="en-US" sz="1200" i="1" dirty="0">
+                <a:solidFill>
+                  <a:srgbClr val="1C2833"/>
+                </a:solidFill>
+                <a:latin typeface="Arial" pitchFamily="34" charset="0"/>
+                <a:ea typeface="Arial" pitchFamily="34" charset="-122"/>
+                <a:cs typeface="Arial" pitchFamily="34" charset="-120"/>
+              </a:rPr>
+              <a:t>Trachyspermum ammi</a:t>
+            </a:r>
+            <a:pPr algn="l" indent="0" marL="0">
+              <a:lnSpc>
+                <a:spcPts val="1680"/>
+              </a:lnSpc>
+              <a:spcBef>
+                <a:spcPts val="300"/>
+              </a:spcBef>
+              <a:spcAft>
+                <a:spcPts val="300"/>
+              </a:spcAft>
+              <a:buNone/>
+            </a:pPr>
+            <a:r>
+              <a:rPr lang="en-US" sz="1200" dirty="0">
+                <a:solidFill>
+                  <a:srgbClr val="1C2833"/>
+                </a:solidFill>
+                <a:latin typeface="Arial" pitchFamily="34" charset="0"/>
+                <a:ea typeface="Arial" pitchFamily="34" charset="-122"/>
+                <a:cs typeface="Arial" pitchFamily="34" charset="-120"/>
+              </a:rPr>
+              <a:t>) by seed appearance and crushed-seed smell, name </a:t>
+            </a:r>
+            <a:pPr algn="l" indent="0" marL="0">
+              <a:lnSpc>
+                <a:spcPts val="1680"/>
+              </a:lnSpc>
+              <a:spcBef>
+                <a:spcPts val="300"/>
+              </a:spcBef>
+              <a:spcAft>
+                <a:spcPts val="300"/>
+              </a:spcAft>
+              <a:buNone/>
+            </a:pPr>
+            <a:r>
+              <a:rPr lang="en-US" sz="1200" b="1" dirty="0">
+                <a:solidFill>
+                  <a:srgbClr val="1C2833"/>
+                </a:solidFill>
+                <a:latin typeface="Arial" pitchFamily="34" charset="0"/>
+                <a:ea typeface="Arial" pitchFamily="34" charset="-122"/>
+                <a:cs typeface="Arial" pitchFamily="34" charset="-120"/>
+              </a:rPr>
+              <a:t>thymol</a:t>
+            </a:r>
+            <a:pPr algn="l" indent="0" marL="0">
+              <a:lnSpc>
+                <a:spcPts val="1680"/>
+              </a:lnSpc>
+              <a:spcBef>
+                <a:spcPts val="300"/>
+              </a:spcBef>
+              <a:spcAft>
+                <a:spcPts val="300"/>
+              </a:spcAft>
+              <a:buNone/>
+            </a:pPr>
+            <a:r>
+              <a:rPr lang="en-US" sz="1200" dirty="0">
+                <a:solidFill>
+                  <a:srgbClr val="1C2833"/>
+                </a:solidFill>
+                <a:latin typeface="Arial" pitchFamily="34" charset="0"/>
+                <a:ea typeface="Arial" pitchFamily="34" charset="-122"/>
+                <a:cs typeface="Arial" pitchFamily="34" charset="-120"/>
+              </a:rPr>
+              <a:t> as the principal volatile, and describe one common culinary use linked to traditional digestive support.</a:t>
+            </a:r>
+            <a:endParaRPr lang="en-US" sz="1200" dirty="0"/>
+          </a:p>
+        </p:txBody>
+      </p:sp>
+      <p:sp>
+        <p:nvSpPr>
+          <p:cNvPr id="5" name="Text 3"/>
+          <p:cNvSpPr/>
+          <p:nvPr/>
+        </p:nvSpPr>
+        <p:spPr>
+          <a:xfrm>
+            <a:off x="406301" y="4434929"/>
+            <a:ext cx="8498026" cy="213271"/>
+          </a:xfrm>
+          <a:prstGeom prst="rect">
+            <a:avLst/>
+          </a:prstGeom>
+          <a:noFill/>
+          <a:ln/>
+        </p:spPr>
+        <p:txBody>
+          <a:bodyPr wrap="square" lIns="0" tIns="0" rIns="0" bIns="0" rtlCol="0" anchor="t"/>
+          <a:lstStyle/>
+          <a:p>
+            <a:pPr algn="l" indent="0" marL="0">
+              <a:lnSpc>
+                <a:spcPts val="1680"/>
+              </a:lnSpc>
+              <a:spcBef>
+                <a:spcPts val="300"/>
+              </a:spcBef>
+              <a:spcAft>
+                <a:spcPts val="300"/>
+              </a:spcAft>
+              <a:buNone/>
+            </a:pPr>
+            <a:r>
+              <a:rPr lang="en-US" sz="1200" dirty="0">
+                <a:solidFill>
+                  <a:srgbClr val="1C2833"/>
+                </a:solidFill>
+                <a:latin typeface="Arial" pitchFamily="34" charset="0"/>
+                <a:ea typeface="Arial" pitchFamily="34" charset="-122"/>
+                <a:cs typeface="Arial" pitchFamily="34" charset="-120"/>
+              </a:rPr>
+              <a:t>Middle ·  · IKS Curriculum</a:t>
+            </a:r>
+            <a:endParaRPr lang="en-US" sz="1200" dirty="0"/>
+          </a:p>
+        </p:txBody>
+      </p:sp>
+    </p:spTree>
+  </p:cSld>
+  <p:clrMapOvr>
+    <a:masterClrMapping/>
+  </p:clrMapOvr>
+</p:sld>
+</file>
+
+<file path=ppt/slides/slide20.xml><?xml version="1.0" encoding="utf-8"?>
+<p:sld xmlns:a="http://schemas.openxmlformats.org/drawingml/2006/main" xmlns:r="http://schemas.openxmlformats.org/officeDocument/2006/relationships" xmlns:p="http://schemas.openxmlformats.org/presentationml/2006/main">
+  <p:cSld name="Slide 20">
+    <p:bg>
+      <p:bgPr>
+        <a:solidFill>
+          <a:srgbClr val="FFFFFF"/>
+        </a:solidFill>
+      </p:bgPr>
+    </p:bg>
+    <p:spTree>
+      <p:nvGrpSpPr>
+        <p:cNvPr id="1" name=""/>
+        <p:cNvGrpSpPr/>
+        <p:nvPr/>
+      </p:nvGrpSpPr>
+      <p:grpSpPr>
+        <a:xfrm>
+          <a:off x="0" y="0"/>
+          <a:ext cx="0" cy="0"/>
+          <a:chOff x="0" y="0"/>
+          <a:chExt cx="0" cy="0"/>
+        </a:xfrm>
+      </p:grpSpPr>
+      <p:sp>
+        <p:nvSpPr>
+          <p:cNvPr id="2" name="Text 0"/>
+          <p:cNvSpPr/>
+          <p:nvPr/>
+        </p:nvSpPr>
+        <p:spPr>
+          <a:xfrm>
+            <a:off x="0" y="0"/>
+            <a:ext cx="9144000" cy="101501"/>
+          </a:xfrm>
+          <a:prstGeom prst="rect">
+            <a:avLst/>
+          </a:prstGeom>
+          <a:solidFill>
+            <a:srgbClr val="277884"/>
+          </a:solidFill>
+          <a:ln/>
+        </p:spPr>
+        <p:txBody>
+          <a:bodyPr wrap="square" rtlCol="0" anchor="ctr"/>
+          <a:lstStyle/>
+          <a:p>
+            <a:pPr indent="0" marL="0">
+              <a:buNone/>
+            </a:pPr>
+            <a:endParaRPr lang="en-US" dirty="0"/>
+          </a:p>
+        </p:txBody>
+      </p:sp>
+      <p:sp>
+        <p:nvSpPr>
+          <p:cNvPr id="3" name="Text 1"/>
+          <p:cNvSpPr/>
+          <p:nvPr/>
+        </p:nvSpPr>
+        <p:spPr>
+          <a:xfrm>
+            <a:off x="406301" y="457051"/>
+            <a:ext cx="8498026" cy="274290"/>
+          </a:xfrm>
+          <a:prstGeom prst="rect">
+            <a:avLst/>
+          </a:prstGeom>
+          <a:noFill/>
+          <a:ln/>
+        </p:spPr>
+        <p:txBody>
+          <a:bodyPr wrap="square" lIns="0" tIns="0" rIns="0" bIns="0" rtlCol="0" anchor="t"/>
+          <a:lstStyle/>
+          <a:p>
+            <a:pPr algn="l" indent="0" marL="0">
+              <a:lnSpc>
+                <a:spcPts val="2160"/>
+              </a:lnSpc>
+              <a:spcBef>
+                <a:spcPts val="600"/>
+              </a:spcBef>
+              <a:spcAft>
+                <a:spcPts val="800"/>
+              </a:spcAft>
+              <a:buNone/>
+            </a:pPr>
+            <a:r>
+              <a:rPr lang="en-US" sz="1800" b="1" dirty="0">
+                <a:solidFill>
+                  <a:srgbClr val="FE4447"/>
+                </a:solidFill>
+                <a:latin typeface="Georgia" pitchFamily="34" charset="0"/>
+                <a:ea typeface="Georgia" pitchFamily="34" charset="-122"/>
+                <a:cs typeface="Georgia" pitchFamily="34" charset="-120"/>
+              </a:rPr>
+              <a:t>Teacher notes</a:t>
+            </a:r>
+            <a:endParaRPr lang="en-US" sz="1800" dirty="0"/>
+          </a:p>
+        </p:txBody>
+      </p:sp>
+      <p:sp>
+        <p:nvSpPr>
+          <p:cNvPr id="4" name="Text 2"/>
+          <p:cNvSpPr/>
+          <p:nvPr/>
+        </p:nvSpPr>
+        <p:spPr>
+          <a:xfrm>
+            <a:off x="634901" y="883593"/>
+            <a:ext cx="8102798" cy="1386483"/>
+          </a:xfrm>
+          <a:prstGeom prst="rect">
+            <a:avLst/>
+          </a:prstGeom>
+          <a:noFill/>
+          <a:ln/>
+        </p:spPr>
+        <p:txBody>
+          <a:bodyPr wrap="square" lIns="0" tIns="0" rIns="0" bIns="0" rtlCol="0" anchor="t"/>
+          <a:lstStyle/>
+          <a:p>
+            <a:pPr algn="l" marL="342900" indent="-342900">
+              <a:lnSpc>
+                <a:spcPts val="1620"/>
+              </a:lnSpc>
+              <a:spcAft>
+                <a:spcPts val="300"/>
+              </a:spcAft>
+              <a:buSzPct val="100000"/>
+              <a:buChar char="•"/>
+            </a:pPr>
+            <a:r>
+              <a:rPr lang="en-US" sz="1200" dirty="0">
+                <a:solidFill>
+                  <a:srgbClr val="1C2833"/>
+                </a:solidFill>
+                <a:latin typeface="Arial" pitchFamily="34" charset="0"/>
+                <a:ea typeface="Arial" pitchFamily="34" charset="-122"/>
+                <a:cs typeface="Arial" pitchFamily="34" charset="-120"/>
+              </a:rPr>
+              <a:t>The </a:t>
+            </a:r>
+            <a:pPr algn="l" indent="0" marL="0">
+              <a:lnSpc>
+                <a:spcPts val="1620"/>
+              </a:lnSpc>
+              <a:spcAft>
+                <a:spcPts val="300"/>
+              </a:spcAft>
+              <a:buNone/>
+            </a:pPr>
+            <a:r>
+              <a:rPr lang="en-US" sz="1200" b="1" dirty="0">
+                <a:solidFill>
+                  <a:srgbClr val="1C2833"/>
+                </a:solidFill>
+                <a:latin typeface="Arial" pitchFamily="34" charset="0"/>
+                <a:ea typeface="Arial" pitchFamily="34" charset="-122"/>
+                <a:cs typeface="Arial" pitchFamily="34" charset="-120"/>
+              </a:rPr>
+              <a:t>crushed-seed smell intensification</a:t>
+            </a:r>
+            <a:pPr algn="l" indent="0" marL="0">
+              <a:lnSpc>
+                <a:spcPts val="1620"/>
+              </a:lnSpc>
+              <a:spcAft>
+                <a:spcPts val="300"/>
+              </a:spcAft>
+              <a:buNone/>
+            </a:pPr>
+            <a:r>
+              <a:rPr lang="en-US" sz="1200" dirty="0">
+                <a:solidFill>
+                  <a:srgbClr val="1C2833"/>
+                </a:solidFill>
+                <a:latin typeface="Arial" pitchFamily="34" charset="0"/>
+                <a:ea typeface="Arial" pitchFamily="34" charset="-122"/>
+                <a:cs typeface="Arial" pitchFamily="34" charset="-120"/>
+              </a:rPr>
+              <a:t> is the most memorable hands-on of the day. Make sure every student gets to crush their own seeds. The "oh wow" reaction is the lesson.</a:t>
+            </a:r>
+            <a:endParaRPr lang="en-US" sz="1200" dirty="0"/>
+          </a:p>
+          <a:p>
+            <a:pPr algn="l" marL="342900" indent="-342900">
+              <a:lnSpc>
+                <a:spcPts val="1620"/>
+              </a:lnSpc>
+              <a:spcAft>
+                <a:spcPts val="300"/>
+              </a:spcAft>
+              <a:buSzPct val="100000"/>
+              <a:buChar char="•"/>
+            </a:pPr>
+            <a:r>
+              <a:rPr lang="en-US" sz="1200" dirty="0">
+                <a:solidFill>
+                  <a:srgbClr val="1C2833"/>
+                </a:solidFill>
+                <a:latin typeface="Arial" pitchFamily="34" charset="0"/>
+                <a:ea typeface="Arial" pitchFamily="34" charset="-122"/>
+                <a:cs typeface="Arial" pitchFamily="34" charset="-120"/>
+              </a:rPr>
+              <a:t>The Indian-borage / ajwain-leaf confusion is real and you'll get questions. Acknowledge — "the leaf you find in shops is from a different plant that smells similar" — but don't make the module about taxonomy.</a:t>
+            </a:r>
+            <a:endParaRPr lang="en-US" sz="1200" dirty="0"/>
+          </a:p>
+          <a:p>
+            <a:pPr algn="l" marL="342900" indent="-342900">
+              <a:lnSpc>
+                <a:spcPts val="1620"/>
+              </a:lnSpc>
+              <a:spcAft>
+                <a:spcPts val="300"/>
+              </a:spcAft>
+              <a:buSzPct val="100000"/>
+              <a:buChar char="•"/>
+            </a:pPr>
+            <a:r>
+              <a:rPr lang="en-US" sz="1200" dirty="0">
+                <a:solidFill>
+                  <a:srgbClr val="1C2833"/>
+                </a:solidFill>
+                <a:latin typeface="Arial" pitchFamily="34" charset="0"/>
+                <a:ea typeface="Arial" pitchFamily="34" charset="-122"/>
+                <a:cs typeface="Arial" pitchFamily="34" charset="-120"/>
+              </a:rPr>
+              <a:t>The ajwain-water demo is one of the safer cooking-adjacent demos. Even so: don't have students drink from a shared glass. Demonstrate; don't distribute.</a:t>
+            </a:r>
+            <a:endParaRPr lang="en-US" sz="1200" dirty="0"/>
+          </a:p>
+        </p:txBody>
+      </p:sp>
+      <p:sp>
+        <p:nvSpPr>
+          <p:cNvPr id="5" name="Text 3"/>
+          <p:cNvSpPr/>
+          <p:nvPr/>
+        </p:nvSpPr>
+        <p:spPr>
+          <a:xfrm>
+            <a:off x="406301" y="4434929"/>
+            <a:ext cx="8498026" cy="213271"/>
+          </a:xfrm>
+          <a:prstGeom prst="rect">
+            <a:avLst/>
+          </a:prstGeom>
+          <a:noFill/>
+          <a:ln/>
+        </p:spPr>
+        <p:txBody>
+          <a:bodyPr wrap="square" lIns="0" tIns="0" rIns="0" bIns="0" rtlCol="0" anchor="t"/>
+          <a:lstStyle/>
+          <a:p>
+            <a:pPr algn="l" indent="0" marL="0">
+              <a:lnSpc>
+                <a:spcPts val="1680"/>
+              </a:lnSpc>
+              <a:spcBef>
+                <a:spcPts val="300"/>
+              </a:spcBef>
+              <a:spcAft>
+                <a:spcPts val="300"/>
+              </a:spcAft>
+              <a:buNone/>
+            </a:pPr>
+            <a:r>
+              <a:rPr lang="en-US" sz="1200" dirty="0">
+                <a:solidFill>
+                  <a:srgbClr val="1C2833"/>
+                </a:solidFill>
+                <a:latin typeface="Arial" pitchFamily="34" charset="0"/>
+                <a:ea typeface="Arial" pitchFamily="34" charset="-122"/>
+                <a:cs typeface="Arial" pitchFamily="34" charset="-120"/>
+              </a:rPr>
+              <a:t>Middle ·  · IKS Curriculum</a:t>
+            </a:r>
+            <a:endParaRPr lang="en-US" sz="1200" dirty="0"/>
+          </a:p>
+        </p:txBody>
+      </p:sp>
+    </p:spTree>
+  </p:cSld>
+  <p:clrMapOvr>
+    <a:masterClrMapping/>
+  </p:clrMapOvr>
+</p:sld>
+</file>
+
+<file path=ppt/slides/slide21.xml><?xml version="1.0" encoding="utf-8"?>
+<p:sld xmlns:a="http://schemas.openxmlformats.org/drawingml/2006/main" xmlns:r="http://schemas.openxmlformats.org/officeDocument/2006/relationships" xmlns:p="http://schemas.openxmlformats.org/presentationml/2006/main">
+  <p:cSld name="Slide 21">
+    <p:bg>
+      <p:bgPr>
+        <a:solidFill>
+          <a:srgbClr val="FFFFFF"/>
+        </a:solidFill>
+      </p:bgPr>
+    </p:bg>
+    <p:spTree>
+      <p:nvGrpSpPr>
+        <p:cNvPr id="1" name=""/>
+        <p:cNvGrpSpPr/>
+        <p:nvPr/>
+      </p:nvGrpSpPr>
+      <p:grpSpPr>
+        <a:xfrm>
+          <a:off x="0" y="0"/>
+          <a:ext cx="0" cy="0"/>
+          <a:chOff x="0" y="0"/>
+          <a:chExt cx="0" cy="0"/>
+        </a:xfrm>
+      </p:grpSpPr>
+      <p:sp>
+        <p:nvSpPr>
+          <p:cNvPr id="2" name="Text 0"/>
+          <p:cNvSpPr/>
+          <p:nvPr/>
+        </p:nvSpPr>
+        <p:spPr>
+          <a:xfrm>
+            <a:off x="0" y="0"/>
+            <a:ext cx="9144000" cy="101501"/>
+          </a:xfrm>
+          <a:prstGeom prst="rect">
+            <a:avLst/>
+          </a:prstGeom>
+          <a:solidFill>
+            <a:srgbClr val="277884"/>
+          </a:solidFill>
+          <a:ln/>
+        </p:spPr>
+        <p:txBody>
+          <a:bodyPr wrap="square" rtlCol="0" anchor="ctr"/>
+          <a:lstStyle/>
+          <a:p>
+            <a:pPr indent="0" marL="0">
+              <a:buNone/>
+            </a:pPr>
+            <a:endParaRPr lang="en-US" dirty="0"/>
+          </a:p>
+        </p:txBody>
+      </p:sp>
+      <p:sp>
+        <p:nvSpPr>
+          <p:cNvPr id="3" name="Text 1"/>
+          <p:cNvSpPr/>
+          <p:nvPr/>
+        </p:nvSpPr>
+        <p:spPr>
+          <a:xfrm>
+            <a:off x="406301" y="457051"/>
+            <a:ext cx="8498026" cy="274290"/>
+          </a:xfrm>
+          <a:prstGeom prst="rect">
+            <a:avLst/>
+          </a:prstGeom>
+          <a:noFill/>
+          <a:ln/>
+        </p:spPr>
+        <p:txBody>
+          <a:bodyPr wrap="square" lIns="0" tIns="0" rIns="0" bIns="0" rtlCol="0" anchor="t"/>
+          <a:lstStyle/>
+          <a:p>
+            <a:pPr algn="l" indent="0" marL="0">
+              <a:lnSpc>
+                <a:spcPts val="2160"/>
+              </a:lnSpc>
+              <a:spcBef>
+                <a:spcPts val="600"/>
+              </a:spcBef>
+              <a:spcAft>
+                <a:spcPts val="800"/>
+              </a:spcAft>
+              <a:buNone/>
+            </a:pPr>
+            <a:r>
+              <a:rPr lang="en-US" sz="1800" b="1" dirty="0">
+                <a:solidFill>
+                  <a:srgbClr val="FE4447"/>
+                </a:solidFill>
+                <a:latin typeface="Georgia" pitchFamily="34" charset="0"/>
+                <a:ea typeface="Georgia" pitchFamily="34" charset="-122"/>
+                <a:cs typeface="Georgia" pitchFamily="34" charset="-120"/>
+              </a:rPr>
+              <a:t>Citation(s) used in this lesson</a:t>
+            </a:r>
+            <a:endParaRPr lang="en-US" sz="1800" dirty="0"/>
+          </a:p>
+        </p:txBody>
+      </p:sp>
+      <p:sp>
+        <p:nvSpPr>
+          <p:cNvPr id="4" name="Text 2"/>
+          <p:cNvSpPr/>
+          <p:nvPr/>
+        </p:nvSpPr>
+        <p:spPr>
+          <a:xfrm>
+            <a:off x="634901" y="883593"/>
+            <a:ext cx="8102798" cy="975122"/>
+          </a:xfrm>
+          <a:prstGeom prst="rect">
+            <a:avLst/>
+          </a:prstGeom>
+          <a:noFill/>
+          <a:ln/>
+        </p:spPr>
+        <p:txBody>
+          <a:bodyPr wrap="square" lIns="0" tIns="0" rIns="0" bIns="0" rtlCol="0" anchor="t"/>
+          <a:lstStyle/>
+          <a:p>
+            <a:pPr algn="l" marL="342900" indent="-342900">
+              <a:lnSpc>
+                <a:spcPts val="1620"/>
+              </a:lnSpc>
+              <a:spcAft>
+                <a:spcPts val="300"/>
+              </a:spcAft>
+              <a:buSzPct val="100000"/>
+              <a:buChar char="•"/>
+            </a:pPr>
+            <a:r>
+              <a:rPr lang="en-US" sz="1200" dirty="0">
+                <a:solidFill>
+                  <a:srgbClr val="1C2833"/>
+                </a:solidFill>
+                <a:latin typeface="Arial" pitchFamily="34" charset="0"/>
+                <a:ea typeface="Arial" pitchFamily="34" charset="-122"/>
+                <a:cs typeface="Arial" pitchFamily="34" charset="-120"/>
+              </a:rPr>
+              <a:t>Thymol as principal volatile in </a:t>
+            </a:r>
+            <a:pPr algn="l" indent="0" marL="0">
+              <a:lnSpc>
+                <a:spcPts val="1620"/>
+              </a:lnSpc>
+              <a:spcAft>
+                <a:spcPts val="300"/>
+              </a:spcAft>
+              <a:buNone/>
+            </a:pPr>
+            <a:r>
+              <a:rPr lang="en-US" sz="1200" i="1" dirty="0">
+                <a:solidFill>
+                  <a:srgbClr val="1C2833"/>
+                </a:solidFill>
+                <a:latin typeface="Arial" pitchFamily="34" charset="0"/>
+                <a:ea typeface="Arial" pitchFamily="34" charset="-122"/>
+                <a:cs typeface="Arial" pitchFamily="34" charset="-120"/>
+              </a:rPr>
+              <a:t>Trachyspermum ammi</a:t>
+            </a:r>
+            <a:pPr algn="l" indent="0" marL="0">
+              <a:lnSpc>
+                <a:spcPts val="1620"/>
+              </a:lnSpc>
+              <a:spcAft>
+                <a:spcPts val="300"/>
+              </a:spcAft>
+              <a:buNone/>
+            </a:pPr>
+            <a:r>
+              <a:rPr lang="en-US" sz="1200" dirty="0">
+                <a:solidFill>
+                  <a:srgbClr val="1C2833"/>
+                </a:solidFill>
+                <a:latin typeface="Arial" pitchFamily="34" charset="0"/>
+                <a:ea typeface="Arial" pitchFamily="34" charset="-122"/>
+                <a:cs typeface="Arial" pitchFamily="34" charset="-120"/>
+              </a:rPr>
+              <a:t>: standard ethnopharmacology / phytochemistry reference.</a:t>
+            </a:r>
+            <a:endParaRPr lang="en-US" sz="1200" dirty="0"/>
+          </a:p>
+          <a:p>
+            <a:pPr algn="l" marL="342900" indent="-342900">
+              <a:lnSpc>
+                <a:spcPts val="1620"/>
+              </a:lnSpc>
+              <a:spcAft>
+                <a:spcPts val="300"/>
+              </a:spcAft>
+              <a:buSzPct val="100000"/>
+              <a:buChar char="•"/>
+            </a:pPr>
+            <a:r>
+              <a:rPr lang="en-US" sz="1200" dirty="0">
+                <a:solidFill>
+                  <a:srgbClr val="1C2833"/>
+                </a:solidFill>
+                <a:latin typeface="Arial" pitchFamily="34" charset="0"/>
+                <a:ea typeface="Arial" pitchFamily="34" charset="-122"/>
+                <a:cs typeface="Arial" pitchFamily="34" charset="-120"/>
+              </a:rPr>
+              <a:t>Carminative mechanism of thymol: well-established at lab level; clinical evidence reviewed in standard ethnopharmacology journals. No specific paper cited.</a:t>
+            </a:r>
+            <a:endParaRPr lang="en-US" sz="1200" dirty="0"/>
+          </a:p>
+          <a:p>
+            <a:pPr algn="l" marL="342900" indent="-342900">
+              <a:lnSpc>
+                <a:spcPts val="1620"/>
+              </a:lnSpc>
+              <a:spcAft>
+                <a:spcPts val="300"/>
+              </a:spcAft>
+              <a:buSzPct val="100000"/>
+              <a:buChar char="•"/>
+            </a:pPr>
+            <a:r>
+              <a:rPr lang="en-US" sz="1200" i="1" dirty="0">
+                <a:solidFill>
+                  <a:srgbClr val="1C2833"/>
+                </a:solidFill>
+                <a:latin typeface="Arial" pitchFamily="34" charset="0"/>
+                <a:ea typeface="Arial" pitchFamily="34" charset="-122"/>
+                <a:cs typeface="Arial" pitchFamily="34" charset="-120"/>
+              </a:rPr>
+              <a:t>Yavānī</a:t>
+            </a:r>
+            <a:pPr algn="l" indent="0" marL="0">
+              <a:lnSpc>
+                <a:spcPts val="1620"/>
+              </a:lnSpc>
+              <a:spcAft>
+                <a:spcPts val="300"/>
+              </a:spcAft>
+              <a:buNone/>
+            </a:pPr>
+            <a:r>
+              <a:rPr lang="en-US" sz="1200" dirty="0">
+                <a:solidFill>
+                  <a:srgbClr val="1C2833"/>
+                </a:solidFill>
+                <a:latin typeface="Arial" pitchFamily="34" charset="0"/>
+                <a:ea typeface="Arial" pitchFamily="34" charset="-122"/>
+                <a:cs typeface="Arial" pitchFamily="34" charset="-120"/>
+              </a:rPr>
+              <a:t> in Ayurveda — standard nighantu references; chapter-level only.</a:t>
             </a:r>
             <a:endParaRPr lang="en-US" sz="1200" dirty="0"/>
           </a:p>
@@ -3648,7 +8058,7 @@
                 <a:ea typeface="Georgia" pitchFamily="34" charset="-122"/>
                 <a:cs typeface="Georgia" pitchFamily="34" charset="-120"/>
               </a:rPr>
-              <a:t>Vocabulary introduced today</a:t>
+              <a:t>Materials</a:t>
             </a:r>
             <a:endParaRPr lang="en-US" sz="1800" dirty="0"/>
           </a:p>
@@ -3663,7 +8073,7 @@
         <p:spPr>
           <a:xfrm>
             <a:off x="634901" y="883593"/>
-            <a:ext cx="8102798" cy="525661"/>
+            <a:ext cx="8102798" cy="1706463"/>
           </a:xfrm>
           <a:prstGeom prst="rect">
             <a:avLst/>
@@ -3686,26 +8096,6 @@
               <a:buChar char="•"/>
             </a:pPr>
             <a:r>
-              <a:rPr lang="en-US" sz="1200" i="1" dirty="0">
-                <a:solidFill>
-                  <a:srgbClr val="1C2833"/>
-                </a:solidFill>
-                <a:latin typeface="Arial" pitchFamily="34" charset="0"/>
-                <a:ea typeface="Arial" pitchFamily="34" charset="-122"/>
-                <a:cs typeface="Arial" pitchFamily="34" charset="-120"/>
-              </a:rPr>
-              <a:t>yavānī</a:t>
-            </a:r>
-            <a:pPr algn="l" indent="0" marL="0">
-              <a:lnSpc>
-                <a:spcPts val="1620"/>
-              </a:lnSpc>
-              <a:spcAft>
-                <a:spcPts val="300"/>
-              </a:spcAft>
-              <a:buNone/>
-            </a:pPr>
-            <a:r>
               <a:rPr lang="en-US" sz="1200" dirty="0">
                 <a:solidFill>
                   <a:srgbClr val="1C2833"/>
@@ -3714,47 +8104,7 @@
                 <a:ea typeface="Arial" pitchFamily="34" charset="-122"/>
                 <a:cs typeface="Arial" pitchFamily="34" charset="-120"/>
               </a:rPr>
-              <a:t> (IAST: yavānī; lit. "barley-like") — the Ayurvedic name for ajwain. Also called </a:t>
-            </a:r>
-            <a:pPr algn="l" indent="0" marL="0">
-              <a:lnSpc>
-                <a:spcPts val="1620"/>
-              </a:lnSpc>
-              <a:spcAft>
-                <a:spcPts val="300"/>
-              </a:spcAft>
-              <a:buNone/>
-            </a:pPr>
-            <a:r>
-              <a:rPr lang="en-US" sz="1200" i="1" dirty="0">
-                <a:solidFill>
-                  <a:srgbClr val="1C2833"/>
-                </a:solidFill>
-                <a:latin typeface="Arial" pitchFamily="34" charset="0"/>
-                <a:ea typeface="Arial" pitchFamily="34" charset="-122"/>
-                <a:cs typeface="Arial" pitchFamily="34" charset="-120"/>
-              </a:rPr>
-              <a:t>ajavāyana</a:t>
-            </a:r>
-            <a:pPr algn="l" indent="0" marL="0">
-              <a:lnSpc>
-                <a:spcPts val="1620"/>
-              </a:lnSpc>
-              <a:spcAft>
-                <a:spcPts val="300"/>
-              </a:spcAft>
-              <a:buNone/>
-            </a:pPr>
-            <a:r>
-              <a:rPr lang="en-US" sz="1200" dirty="0">
-                <a:solidFill>
-                  <a:srgbClr val="1C2833"/>
-                </a:solidFill>
-                <a:latin typeface="Arial" pitchFamily="34" charset="0"/>
-                <a:ea typeface="Arial" pitchFamily="34" charset="-122"/>
-                <a:cs typeface="Arial" pitchFamily="34" charset="-120"/>
-              </a:rPr>
-              <a:t> in some texts.</a:t>
+              <a:t>Small jar of whole ajwain seeds (one per pair, plus one display jar)</a:t>
             </a:r>
             <a:endParaRPr lang="en-US" sz="1200" dirty="0"/>
           </a:p>
@@ -3770,24 +8120,28 @@
               <a:buChar char="•"/>
             </a:pPr>
             <a:r>
-              <a:rPr lang="en-US" sz="1200" b="1" dirty="0">
-                <a:solidFill>
-                  <a:srgbClr val="1C2833"/>
-                </a:solidFill>
-                <a:latin typeface="Arial" pitchFamily="34" charset="0"/>
-                <a:ea typeface="Arial" pitchFamily="34" charset="-122"/>
-                <a:cs typeface="Arial" pitchFamily="34" charset="-120"/>
-              </a:rPr>
-              <a:t>Thymol</a:t>
-            </a:r>
-            <a:pPr algn="l" indent="0" marL="0">
+              <a:rPr lang="en-US" sz="1200" dirty="0">
+                <a:solidFill>
+                  <a:srgbClr val="1C2833"/>
+                </a:solidFill>
+                <a:latin typeface="Arial" pitchFamily="34" charset="0"/>
+                <a:ea typeface="Arial" pitchFamily="34" charset="-122"/>
+                <a:cs typeface="Arial" pitchFamily="34" charset="-120"/>
+              </a:rPr>
+              <a:t>Pestle and mortar (if available)</a:t>
+            </a:r>
+            <a:endParaRPr lang="en-US" sz="1200" dirty="0"/>
+          </a:p>
+          <a:p>
+            <a:pPr algn="l" marL="342900" indent="-342900">
               <a:lnSpc>
                 <a:spcPts val="1620"/>
               </a:lnSpc>
               <a:spcAft>
                 <a:spcPts val="300"/>
               </a:spcAft>
-              <a:buNone/>
+              <a:buSzPct val="100000"/>
+              <a:buChar char="•"/>
             </a:pPr>
             <a:r>
               <a:rPr lang="en-US" sz="1200" dirty="0">
@@ -3798,7 +8152,7 @@
                 <a:ea typeface="Arial" pitchFamily="34" charset="-122"/>
                 <a:cs typeface="Arial" pitchFamily="34" charset="-120"/>
               </a:rPr>
-              <a:t> — the principal volatile aromatic in ajwain seed. Same compound dominates thyme (</a:t>
+              <a:t>A few sprigs of fresh ajwain leaf (</a:t>
             </a:r>
             <a:pPr algn="l" indent="0" marL="0">
               <a:lnSpc>
@@ -3818,7 +8172,7 @@
                 <a:ea typeface="Arial" pitchFamily="34" charset="-122"/>
                 <a:cs typeface="Arial" pitchFamily="34" charset="-120"/>
               </a:rPr>
-              <a:t>Thymus vulgaris</a:t>
+              <a:t>ajwain ka patta</a:t>
             </a:r>
             <a:pPr algn="l" indent="0" marL="0">
               <a:lnSpc>
@@ -3838,7 +8192,79 @@
                 <a:ea typeface="Arial" pitchFamily="34" charset="-122"/>
                 <a:cs typeface="Arial" pitchFamily="34" charset="-120"/>
               </a:rPr>
-              <a:t>).</a:t>
+              <a:t> — sometimes called Indian borage / Cuban oregano — different plant but commonly confused; clarify if you bring it)</a:t>
+            </a:r>
+            <a:endParaRPr lang="en-US" sz="1200" dirty="0"/>
+          </a:p>
+          <a:p>
+            <a:pPr algn="l" marL="342900" indent="-342900">
+              <a:lnSpc>
+                <a:spcPts val="1620"/>
+              </a:lnSpc>
+              <a:spcAft>
+                <a:spcPts val="300"/>
+              </a:spcAft>
+              <a:buSzPct val="100000"/>
+              <a:buChar char="•"/>
+            </a:pPr>
+            <a:r>
+              <a:rPr lang="en-US" sz="1200" dirty="0">
+                <a:solidFill>
+                  <a:srgbClr val="1C2833"/>
+                </a:solidFill>
+                <a:latin typeface="Arial" pitchFamily="34" charset="0"/>
+                <a:ea typeface="Arial" pitchFamily="34" charset="-122"/>
+                <a:cs typeface="Arial" pitchFamily="34" charset="-120"/>
+              </a:rPr>
+              <a:t>Optional: dried thyme (the European cousin chemistry-wise) for the smell-bridge</a:t>
+            </a:r>
+            <a:endParaRPr lang="en-US" sz="1200" dirty="0"/>
+          </a:p>
+          <a:p>
+            <a:pPr algn="l" marL="342900" indent="-342900">
+              <a:lnSpc>
+                <a:spcPts val="1620"/>
+              </a:lnSpc>
+              <a:spcAft>
+                <a:spcPts val="300"/>
+              </a:spcAft>
+              <a:buSzPct val="100000"/>
+              <a:buChar char="•"/>
+            </a:pPr>
+            <a:r>
+              <a:rPr lang="en-US" sz="1200" dirty="0">
+                <a:solidFill>
+                  <a:srgbClr val="1C2833"/>
+                </a:solidFill>
+                <a:latin typeface="Arial" pitchFamily="34" charset="0"/>
+                <a:ea typeface="Arial" pitchFamily="34" charset="-122"/>
+                <a:cs typeface="Arial" pitchFamily="34" charset="-120"/>
+              </a:rPr>
+              <a:t>Small bowl of warm water + a teaspoon of ajwain for the demo</a:t>
+            </a:r>
+            <a:endParaRPr lang="en-US" sz="1200" dirty="0"/>
+          </a:p>
+          <a:p>
+            <a:pPr algn="l" marL="342900" indent="-342900">
+              <a:lnSpc>
+                <a:spcPts val="1620"/>
+              </a:lnSpc>
+              <a:spcAft>
+                <a:spcPts val="300"/>
+              </a:spcAft>
+              <a:buSzPct val="100000"/>
+              <a:buChar char="•"/>
+            </a:pPr>
+            <a:r>
+              <a:rPr lang="en-US" sz="1200" dirty="0">
+                <a:solidFill>
+                  <a:srgbClr val="1C2833"/>
+                </a:solidFill>
+                <a:latin typeface="Arial" pitchFamily="34" charset="0"/>
+                <a:ea typeface="Arial" pitchFamily="34" charset="-122"/>
+                <a:cs typeface="Arial" pitchFamily="34" charset="-120"/>
+              </a:rPr>
+              <a:t>Whiteboard</a:t>
             </a:r>
             <a:endParaRPr lang="en-US" sz="1200" dirty="0"/>
           </a:p>
@@ -3996,7 +8422,7 @@
                 <a:ea typeface="Georgia" pitchFamily="34" charset="-122"/>
                 <a:cs typeface="Georgia" pitchFamily="34" charset="-120"/>
               </a:rPr>
-              <a:t>Lesson flow</a:t>
+              <a:t>Vocabulary introduced today</a:t>
             </a:r>
             <a:endParaRPr lang="en-US" sz="1800" dirty="0"/>
           </a:p>
@@ -4005,6 +8431,196 @@
       <p:sp>
         <p:nvSpPr>
           <p:cNvPr id="4" name="Text 2"/>
+          <p:cNvSpPr/>
+          <p:nvPr/>
+        </p:nvSpPr>
+        <p:spPr>
+          <a:xfrm>
+            <a:off x="634901" y="883593"/>
+            <a:ext cx="8102798" cy="525661"/>
+          </a:xfrm>
+          <a:prstGeom prst="rect">
+            <a:avLst/>
+          </a:prstGeom>
+          <a:noFill/>
+          <a:ln/>
+        </p:spPr>
+        <p:txBody>
+          <a:bodyPr wrap="square" lIns="0" tIns="0" rIns="0" bIns="0" rtlCol="0" anchor="t"/>
+          <a:lstStyle/>
+          <a:p>
+            <a:pPr algn="l" marL="342900" indent="-342900">
+              <a:lnSpc>
+                <a:spcPts val="1620"/>
+              </a:lnSpc>
+              <a:spcAft>
+                <a:spcPts val="300"/>
+              </a:spcAft>
+              <a:buSzPct val="100000"/>
+              <a:buChar char="•"/>
+            </a:pPr>
+            <a:r>
+              <a:rPr lang="en-US" sz="1200" i="1" dirty="0">
+                <a:solidFill>
+                  <a:srgbClr val="1C2833"/>
+                </a:solidFill>
+                <a:latin typeface="Arial" pitchFamily="34" charset="0"/>
+                <a:ea typeface="Arial" pitchFamily="34" charset="-122"/>
+                <a:cs typeface="Arial" pitchFamily="34" charset="-120"/>
+              </a:rPr>
+              <a:t>yavānī</a:t>
+            </a:r>
+            <a:pPr algn="l" indent="0" marL="0">
+              <a:lnSpc>
+                <a:spcPts val="1620"/>
+              </a:lnSpc>
+              <a:spcAft>
+                <a:spcPts val="300"/>
+              </a:spcAft>
+              <a:buNone/>
+            </a:pPr>
+            <a:r>
+              <a:rPr lang="en-US" sz="1200" dirty="0">
+                <a:solidFill>
+                  <a:srgbClr val="1C2833"/>
+                </a:solidFill>
+                <a:latin typeface="Arial" pitchFamily="34" charset="0"/>
+                <a:ea typeface="Arial" pitchFamily="34" charset="-122"/>
+                <a:cs typeface="Arial" pitchFamily="34" charset="-120"/>
+              </a:rPr>
+              <a:t> (IAST: yavānī; lit. "barley-like") — the Ayurvedic name for ajwain. Also called </a:t>
+            </a:r>
+            <a:pPr algn="l" indent="0" marL="0">
+              <a:lnSpc>
+                <a:spcPts val="1620"/>
+              </a:lnSpc>
+              <a:spcAft>
+                <a:spcPts val="300"/>
+              </a:spcAft>
+              <a:buNone/>
+            </a:pPr>
+            <a:r>
+              <a:rPr lang="en-US" sz="1200" i="1" dirty="0">
+                <a:solidFill>
+                  <a:srgbClr val="1C2833"/>
+                </a:solidFill>
+                <a:latin typeface="Arial" pitchFamily="34" charset="0"/>
+                <a:ea typeface="Arial" pitchFamily="34" charset="-122"/>
+                <a:cs typeface="Arial" pitchFamily="34" charset="-120"/>
+              </a:rPr>
+              <a:t>ajavāyana</a:t>
+            </a:r>
+            <a:pPr algn="l" indent="0" marL="0">
+              <a:lnSpc>
+                <a:spcPts val="1620"/>
+              </a:lnSpc>
+              <a:spcAft>
+                <a:spcPts val="300"/>
+              </a:spcAft>
+              <a:buNone/>
+            </a:pPr>
+            <a:r>
+              <a:rPr lang="en-US" sz="1200" dirty="0">
+                <a:solidFill>
+                  <a:srgbClr val="1C2833"/>
+                </a:solidFill>
+                <a:latin typeface="Arial" pitchFamily="34" charset="0"/>
+                <a:ea typeface="Arial" pitchFamily="34" charset="-122"/>
+                <a:cs typeface="Arial" pitchFamily="34" charset="-120"/>
+              </a:rPr>
+              <a:t> in some texts.</a:t>
+            </a:r>
+            <a:endParaRPr lang="en-US" sz="1200" dirty="0"/>
+          </a:p>
+          <a:p>
+            <a:pPr algn="l" marL="342900" indent="-342900">
+              <a:lnSpc>
+                <a:spcPts val="1620"/>
+              </a:lnSpc>
+              <a:spcAft>
+                <a:spcPts val="300"/>
+              </a:spcAft>
+              <a:buSzPct val="100000"/>
+              <a:buChar char="•"/>
+            </a:pPr>
+            <a:r>
+              <a:rPr lang="en-US" sz="1200" b="1" dirty="0">
+                <a:solidFill>
+                  <a:srgbClr val="1C2833"/>
+                </a:solidFill>
+                <a:latin typeface="Arial" pitchFamily="34" charset="0"/>
+                <a:ea typeface="Arial" pitchFamily="34" charset="-122"/>
+                <a:cs typeface="Arial" pitchFamily="34" charset="-120"/>
+              </a:rPr>
+              <a:t>Thymol</a:t>
+            </a:r>
+            <a:pPr algn="l" indent="0" marL="0">
+              <a:lnSpc>
+                <a:spcPts val="1620"/>
+              </a:lnSpc>
+              <a:spcAft>
+                <a:spcPts val="300"/>
+              </a:spcAft>
+              <a:buNone/>
+            </a:pPr>
+            <a:r>
+              <a:rPr lang="en-US" sz="1200" dirty="0">
+                <a:solidFill>
+                  <a:srgbClr val="1C2833"/>
+                </a:solidFill>
+                <a:latin typeface="Arial" pitchFamily="34" charset="0"/>
+                <a:ea typeface="Arial" pitchFamily="34" charset="-122"/>
+                <a:cs typeface="Arial" pitchFamily="34" charset="-120"/>
+              </a:rPr>
+              <a:t> — the principal volatile aromatic in ajwain seed. Same compound dominates thyme (</a:t>
+            </a:r>
+            <a:pPr algn="l" indent="0" marL="0">
+              <a:lnSpc>
+                <a:spcPts val="1620"/>
+              </a:lnSpc>
+              <a:spcAft>
+                <a:spcPts val="300"/>
+              </a:spcAft>
+              <a:buNone/>
+            </a:pPr>
+            <a:r>
+              <a:rPr lang="en-US" sz="1200" i="1" dirty="0">
+                <a:solidFill>
+                  <a:srgbClr val="1C2833"/>
+                </a:solidFill>
+                <a:latin typeface="Arial" pitchFamily="34" charset="0"/>
+                <a:ea typeface="Arial" pitchFamily="34" charset="-122"/>
+                <a:cs typeface="Arial" pitchFamily="34" charset="-120"/>
+              </a:rPr>
+              <a:t>Thymus vulgaris</a:t>
+            </a:r>
+            <a:pPr algn="l" indent="0" marL="0">
+              <a:lnSpc>
+                <a:spcPts val="1620"/>
+              </a:lnSpc>
+              <a:spcAft>
+                <a:spcPts val="300"/>
+              </a:spcAft>
+              <a:buNone/>
+            </a:pPr>
+            <a:r>
+              <a:rPr lang="en-US" sz="1200" dirty="0">
+                <a:solidFill>
+                  <a:srgbClr val="1C2833"/>
+                </a:solidFill>
+                <a:latin typeface="Arial" pitchFamily="34" charset="0"/>
+                <a:ea typeface="Arial" pitchFamily="34" charset="-122"/>
+                <a:cs typeface="Arial" pitchFamily="34" charset="-120"/>
+              </a:rPr>
+              <a:t>).</a:t>
+            </a:r>
+            <a:endParaRPr lang="en-US" sz="1200" dirty="0"/>
+          </a:p>
+        </p:txBody>
+      </p:sp>
+      <p:sp>
+        <p:nvSpPr>
+          <p:cNvPr id="5" name="Text 3"/>
           <p:cNvSpPr/>
           <p:nvPr/>
         </p:nvSpPr>
@@ -4154,7 +8770,7 @@
                 <a:ea typeface="Georgia" pitchFamily="34" charset="-122"/>
                 <a:cs typeface="Georgia" pitchFamily="34" charset="-120"/>
               </a:rPr>
-              <a:t>Warm-up (5 min)</a:t>
+              <a:t>Lesson flow</a:t>
             </a:r>
             <a:endParaRPr lang="en-US" sz="1800" dirty="0"/>
           </a:p>
@@ -4163,219 +8779,6 @@
       <p:sp>
         <p:nvSpPr>
           <p:cNvPr id="4" name="Text 2"/>
-          <p:cNvSpPr/>
-          <p:nvPr/>
-        </p:nvSpPr>
-        <p:spPr>
-          <a:xfrm>
-            <a:off x="406301" y="870942"/>
-            <a:ext cx="8498026" cy="213271"/>
-          </a:xfrm>
-          <a:prstGeom prst="rect">
-            <a:avLst/>
-          </a:prstGeom>
-          <a:noFill/>
-          <a:ln/>
-        </p:spPr>
-        <p:txBody>
-          <a:bodyPr wrap="square" lIns="0" tIns="0" rIns="0" bIns="0" rtlCol="0" anchor="t"/>
-          <a:lstStyle/>
-          <a:p>
-            <a:pPr algn="l" indent="0" marL="0">
-              <a:lnSpc>
-                <a:spcPts val="1680"/>
-              </a:lnSpc>
-              <a:spcBef>
-                <a:spcPts val="300"/>
-              </a:spcBef>
-              <a:spcAft>
-                <a:spcPts val="300"/>
-              </a:spcAft>
-              <a:buNone/>
-            </a:pPr>
-            <a:r>
-              <a:rPr lang="en-US" sz="1200" dirty="0">
-                <a:solidFill>
-                  <a:srgbClr val="1C2833"/>
-                </a:solidFill>
-                <a:latin typeface="Arial" pitchFamily="34" charset="0"/>
-                <a:ea typeface="Arial" pitchFamily="34" charset="-122"/>
-                <a:cs typeface="Arial" pitchFamily="34" charset="-120"/>
-              </a:rPr>
-              <a:t>Hold up the jar of ajwain seeds. Pour a small amount into a tray.</a:t>
-            </a:r>
-            <a:endParaRPr lang="en-US" sz="1200" dirty="0"/>
-          </a:p>
-        </p:txBody>
-      </p:sp>
-      <p:sp>
-        <p:nvSpPr>
-          <p:cNvPr id="5" name="Text 3"/>
-          <p:cNvSpPr/>
-          <p:nvPr/>
-        </p:nvSpPr>
-        <p:spPr>
-          <a:xfrm>
-            <a:off x="406301" y="1160413"/>
-            <a:ext cx="8498026" cy="213271"/>
-          </a:xfrm>
-          <a:prstGeom prst="rect">
-            <a:avLst/>
-          </a:prstGeom>
-          <a:noFill/>
-          <a:ln/>
-        </p:spPr>
-        <p:txBody>
-          <a:bodyPr wrap="square" lIns="0" tIns="0" rIns="0" bIns="0" rtlCol="0" anchor="t"/>
-          <a:lstStyle/>
-          <a:p>
-            <a:pPr algn="l" indent="0" marL="0">
-              <a:lnSpc>
-                <a:spcPts val="1680"/>
-              </a:lnSpc>
-              <a:spcBef>
-                <a:spcPts val="300"/>
-              </a:spcBef>
-              <a:spcAft>
-                <a:spcPts val="300"/>
-              </a:spcAft>
-              <a:buNone/>
-            </a:pPr>
-            <a:r>
-              <a:rPr lang="en-US" sz="1200" i="1" dirty="0">
-                <a:solidFill>
-                  <a:srgbClr val="1C2833"/>
-                </a:solidFill>
-                <a:latin typeface="Arial" pitchFamily="34" charset="0"/>
-                <a:ea typeface="Arial" pitchFamily="34" charset="-122"/>
-                <a:cs typeface="Arial" pitchFamily="34" charset="-120"/>
-              </a:rPr>
-              <a:t>"What do these look like?"</a:t>
-            </a:r>
-            <a:pPr algn="l" indent="0" marL="0">
-              <a:lnSpc>
-                <a:spcPts val="1680"/>
-              </a:lnSpc>
-              <a:spcBef>
-                <a:spcPts val="300"/>
-              </a:spcBef>
-              <a:spcAft>
-                <a:spcPts val="300"/>
-              </a:spcAft>
-              <a:buNone/>
-            </a:pPr>
-            <a:r>
-              <a:rPr lang="en-US" sz="1200" dirty="0">
-                <a:solidFill>
-                  <a:srgbClr val="1C2833"/>
-                </a:solidFill>
-                <a:latin typeface="Arial" pitchFamily="34" charset="0"/>
-                <a:ea typeface="Arial" pitchFamily="34" charset="-122"/>
-                <a:cs typeface="Arial" pitchFamily="34" charset="-120"/>
-              </a:rPr>
-              <a:t> (Tiny, oval, brown-grey, ribbed.) </a:t>
-            </a:r>
-            <a:pPr algn="l" indent="0" marL="0">
-              <a:lnSpc>
-                <a:spcPts val="1680"/>
-              </a:lnSpc>
-              <a:spcBef>
-                <a:spcPts val="300"/>
-              </a:spcBef>
-              <a:spcAft>
-                <a:spcPts val="300"/>
-              </a:spcAft>
-              <a:buNone/>
-            </a:pPr>
-            <a:r>
-              <a:rPr lang="en-US" sz="1200" i="1" dirty="0">
-                <a:solidFill>
-                  <a:srgbClr val="1C2833"/>
-                </a:solidFill>
-                <a:latin typeface="Arial" pitchFamily="34" charset="0"/>
-                <a:ea typeface="Arial" pitchFamily="34" charset="-122"/>
-                <a:cs typeface="Arial" pitchFamily="34" charset="-120"/>
-              </a:rPr>
-              <a:t>"What do you smell?"</a:t>
-            </a:r>
-            <a:pPr algn="l" indent="0" marL="0">
-              <a:lnSpc>
-                <a:spcPts val="1680"/>
-              </a:lnSpc>
-              <a:spcBef>
-                <a:spcPts val="300"/>
-              </a:spcBef>
-              <a:spcAft>
-                <a:spcPts val="300"/>
-              </a:spcAft>
-              <a:buNone/>
-            </a:pPr>
-            <a:r>
-              <a:rPr lang="en-US" sz="1200" dirty="0">
-                <a:solidFill>
-                  <a:srgbClr val="1C2833"/>
-                </a:solidFill>
-                <a:latin typeface="Arial" pitchFamily="34" charset="0"/>
-                <a:ea typeface="Arial" pitchFamily="34" charset="-122"/>
-                <a:cs typeface="Arial" pitchFamily="34" charset="-120"/>
-              </a:rPr>
-              <a:t> (Sharp, warm, oregano-like / thyme-like.)</a:t>
-            </a:r>
-            <a:endParaRPr lang="en-US" sz="1200" dirty="0"/>
-          </a:p>
-        </p:txBody>
-      </p:sp>
-      <p:sp>
-        <p:nvSpPr>
-          <p:cNvPr id="6" name="Text 4"/>
-          <p:cNvSpPr/>
-          <p:nvPr/>
-        </p:nvSpPr>
-        <p:spPr>
-          <a:xfrm>
-            <a:off x="406301" y="1449884"/>
-            <a:ext cx="8498026" cy="426541"/>
-          </a:xfrm>
-          <a:prstGeom prst="rect">
-            <a:avLst/>
-          </a:prstGeom>
-          <a:noFill/>
-          <a:ln/>
-        </p:spPr>
-        <p:txBody>
-          <a:bodyPr wrap="square" lIns="0" tIns="0" rIns="0" bIns="0" rtlCol="0" anchor="t"/>
-          <a:lstStyle/>
-          <a:p>
-            <a:pPr algn="l" indent="0" marL="0">
-              <a:lnSpc>
-                <a:spcPts val="1680"/>
-              </a:lnSpc>
-              <a:spcBef>
-                <a:spcPts val="300"/>
-              </a:spcBef>
-              <a:spcAft>
-                <a:spcPts val="300"/>
-              </a:spcAft>
-              <a:buNone/>
-            </a:pPr>
-            <a:r>
-              <a:rPr lang="en-US" sz="1200" dirty="0">
-                <a:solidFill>
-                  <a:srgbClr val="1C2833"/>
-                </a:solidFill>
-                <a:latin typeface="Arial" pitchFamily="34" charset="0"/>
-                <a:ea typeface="Arial" pitchFamily="34" charset="-122"/>
-                <a:cs typeface="Arial" pitchFamily="34" charset="-120"/>
-              </a:rPr>
-              <a:t>Pass a small pile to each pair. They crush a few seeds with the back of a spoon (no chewing yet) and sniff. The smell intensifies dramatically when crushed — release of volatile thymol.</a:t>
-            </a:r>
-            <a:endParaRPr lang="en-US" sz="1200" dirty="0"/>
-          </a:p>
-        </p:txBody>
-      </p:sp>
-      <p:sp>
-        <p:nvSpPr>
-          <p:cNvPr id="7" name="Text 5"/>
           <p:cNvSpPr/>
           <p:nvPr/>
         </p:nvSpPr>
@@ -4525,7 +8928,7 @@
                 <a:ea typeface="Georgia" pitchFamily="34" charset="-122"/>
                 <a:cs typeface="Georgia" pitchFamily="34" charset="-120"/>
               </a:rPr>
-              <a:t>Activity (15 min) — Ajwain-water demo + Compare to thyme</a:t>
+              <a:t>Warm-up (5 min)</a:t>
             </a:r>
             <a:endParaRPr lang="en-US" sz="1800" dirty="0"/>
           </a:p>
@@ -4540,7 +8943,7 @@
         <p:spPr>
           <a:xfrm>
             <a:off x="406301" y="870942"/>
-            <a:ext cx="8498026" cy="639812"/>
+            <a:ext cx="8498026" cy="213271"/>
           </a:xfrm>
           <a:prstGeom prst="rect">
             <a:avLst/>
@@ -4565,29 +8968,6 @@
               <a:buNone/>
             </a:pPr>
             <a:r>
-              <a:rPr lang="en-US" sz="1200" b="1" dirty="0">
-                <a:solidFill>
-                  <a:srgbClr val="1C2833"/>
-                </a:solidFill>
-                <a:latin typeface="Arial" pitchFamily="34" charset="0"/>
-                <a:ea typeface="Arial" pitchFamily="34" charset="-122"/>
-                <a:cs typeface="Arial" pitchFamily="34" charset="-120"/>
-              </a:rPr>
-              <a:t>Demo (5 min):</a:t>
-            </a:r>
-            <a:pPr algn="l" indent="0" marL="0">
-              <a:lnSpc>
-                <a:spcPts val="1680"/>
-              </a:lnSpc>
-              <a:spcBef>
-                <a:spcPts val="300"/>
-              </a:spcBef>
-              <a:spcAft>
-                <a:spcPts val="300"/>
-              </a:spcAft>
-              <a:buNone/>
-            </a:pPr>
-            <a:r>
               <a:rPr lang="en-US" sz="1200" dirty="0">
                 <a:solidFill>
                   <a:srgbClr val="1C2833"/>
@@ -4596,7 +8976,7 @@
                 <a:ea typeface="Arial" pitchFamily="34" charset="-122"/>
                 <a:cs typeface="Arial" pitchFamily="34" charset="-120"/>
               </a:rPr>
-              <a:t> – Teacher places 1 tsp ajwain in a clear glass. Pours 200 ml hot (not boiling) water over it. Covers with a saucer. – Pass around the glass — observe the seeds float, the water gain colour, the smell rise. – 5 minutes later, uncover. The aroma is now intense. – This is the home remedy: strain and drink warm (for the demo, don't drink — just observe).</a:t>
+              <a:t>Hold up the jar of ajwain seeds. Pour a small amount into a tray.</a:t>
             </a:r>
             <a:endParaRPr lang="en-US" sz="1200" dirty="0"/>
           </a:p>
@@ -4610,8 +8990,8 @@
         </p:nvSpPr>
         <p:spPr>
           <a:xfrm>
-            <a:off x="406301" y="1586954"/>
-            <a:ext cx="8498026" cy="853083"/>
+            <a:off x="406301" y="1160413"/>
+            <a:ext cx="8498026" cy="213271"/>
           </a:xfrm>
           <a:prstGeom prst="rect">
             <a:avLst/>
@@ -4636,15 +9016,15 @@
               <a:buNone/>
             </a:pPr>
             <a:r>
-              <a:rPr lang="en-US" sz="1200" b="1" dirty="0">
-                <a:solidFill>
-                  <a:srgbClr val="1C2833"/>
-                </a:solidFill>
-                <a:latin typeface="Arial" pitchFamily="34" charset="0"/>
-                <a:ea typeface="Arial" pitchFamily="34" charset="-122"/>
-                <a:cs typeface="Arial" pitchFamily="34" charset="-120"/>
-              </a:rPr>
-              <a:t>Compare to thyme (5 min):</a:t>
+              <a:rPr lang="en-US" sz="1200" i="1" dirty="0">
+                <a:solidFill>
+                  <a:srgbClr val="1C2833"/>
+                </a:solidFill>
+                <a:latin typeface="Arial" pitchFamily="34" charset="0"/>
+                <a:ea typeface="Arial" pitchFamily="34" charset="-122"/>
+                <a:cs typeface="Arial" pitchFamily="34" charset="-120"/>
+              </a:rPr>
+              <a:t>"What do these look like?"</a:t>
             </a:r>
             <a:pPr algn="l" indent="0" marL="0">
               <a:lnSpc>
@@ -4667,7 +9047,7 @@
                 <a:ea typeface="Arial" pitchFamily="34" charset="-122"/>
                 <a:cs typeface="Arial" pitchFamily="34" charset="-120"/>
               </a:rPr>
-              <a:t> – Pass around dried thyme. Crush a small amount, smell. – The two herbs are unrelated botanically (different families) but share the same dominant volatile — </a:t>
+              <a:t> (Tiny, oval, brown-grey, ribbed.) </a:t>
             </a:r>
             <a:pPr algn="l" indent="0" marL="0">
               <a:lnSpc>
@@ -4682,15 +9062,15 @@
               <a:buNone/>
             </a:pPr>
             <a:r>
-              <a:rPr lang="en-US" sz="1200" b="1" dirty="0">
-                <a:solidFill>
-                  <a:srgbClr val="1C2833"/>
-                </a:solidFill>
-                <a:latin typeface="Arial" pitchFamily="34" charset="0"/>
-                <a:ea typeface="Arial" pitchFamily="34" charset="-122"/>
-                <a:cs typeface="Arial" pitchFamily="34" charset="-120"/>
-              </a:rPr>
-              <a:t>thymol</a:t>
+              <a:rPr lang="en-US" sz="1200" i="1" dirty="0">
+                <a:solidFill>
+                  <a:srgbClr val="1C2833"/>
+                </a:solidFill>
+                <a:latin typeface="Arial" pitchFamily="34" charset="0"/>
+                <a:ea typeface="Arial" pitchFamily="34" charset="-122"/>
+                <a:cs typeface="Arial" pitchFamily="34" charset="-120"/>
+              </a:rPr>
+              <a:t>"What do you smell?"</a:t>
             </a:r>
             <a:pPr algn="l" indent="0" marL="0">
               <a:lnSpc>
@@ -4713,53 +9093,7 @@
                 <a:ea typeface="Arial" pitchFamily="34" charset="-122"/>
                 <a:cs typeface="Arial" pitchFamily="34" charset="-120"/>
               </a:rPr>
-              <a:t>. This is a beautiful example of </a:t>
-            </a:r>
-            <a:pPr algn="l" indent="0" marL="0">
-              <a:lnSpc>
-                <a:spcPts val="1680"/>
-              </a:lnSpc>
-              <a:spcBef>
-                <a:spcPts val="300"/>
-              </a:spcBef>
-              <a:spcAft>
-                <a:spcPts val="300"/>
-              </a:spcAft>
-              <a:buNone/>
-            </a:pPr>
-            <a:r>
-              <a:rPr lang="en-US" sz="1200" i="1" dirty="0">
-                <a:solidFill>
-                  <a:srgbClr val="1C2833"/>
-                </a:solidFill>
-                <a:latin typeface="Arial" pitchFamily="34" charset="0"/>
-                <a:ea typeface="Arial" pitchFamily="34" charset="-122"/>
-                <a:cs typeface="Arial" pitchFamily="34" charset="-120"/>
-              </a:rPr>
-              <a:t>convergent chemistry</a:t>
-            </a:r>
-            <a:pPr algn="l" indent="0" marL="0">
-              <a:lnSpc>
-                <a:spcPts val="1680"/>
-              </a:lnSpc>
-              <a:spcBef>
-                <a:spcPts val="300"/>
-              </a:spcBef>
-              <a:spcAft>
-                <a:spcPts val="300"/>
-              </a:spcAft>
-              <a:buNone/>
-            </a:pPr>
-            <a:r>
-              <a:rPr lang="en-US" sz="1200" dirty="0">
-                <a:solidFill>
-                  <a:srgbClr val="1C2833"/>
-                </a:solidFill>
-                <a:latin typeface="Arial" pitchFamily="34" charset="0"/>
-                <a:ea typeface="Arial" pitchFamily="34" charset="-122"/>
-                <a:cs typeface="Arial" pitchFamily="34" charset="-120"/>
-              </a:rPr>
-              <a:t> — different plants evolving the same compound because it serves a similar purpose for the plant (defence against microbes and herbivores).</a:t>
+              <a:t> (Sharp, warm, oregano-like / thyme-like.)</a:t>
             </a:r>
             <a:endParaRPr lang="en-US" sz="1200" dirty="0"/>
           </a:p>
@@ -4773,7 +9107,7 @@
         </p:nvSpPr>
         <p:spPr>
           <a:xfrm>
-            <a:off x="406301" y="2516237"/>
+            <a:off x="406301" y="1449884"/>
             <a:ext cx="8498026" cy="426541"/>
           </a:xfrm>
           <a:prstGeom prst="rect">
@@ -4799,29 +9133,6 @@
               <a:buNone/>
             </a:pPr>
             <a:r>
-              <a:rPr lang="en-US" sz="1200" b="1" dirty="0">
-                <a:solidFill>
-                  <a:srgbClr val="1C2833"/>
-                </a:solidFill>
-                <a:latin typeface="Arial" pitchFamily="34" charset="0"/>
-                <a:ea typeface="Arial" pitchFamily="34" charset="-122"/>
-                <a:cs typeface="Arial" pitchFamily="34" charset="-120"/>
-              </a:rPr>
-              <a:t>Exit ticket (5 min):</a:t>
-            </a:r>
-            <a:pPr algn="l" indent="0" marL="0">
-              <a:lnSpc>
-                <a:spcPts val="1680"/>
-              </a:lnSpc>
-              <a:spcBef>
-                <a:spcPts val="300"/>
-              </a:spcBef>
-              <a:spcAft>
-                <a:spcPts val="300"/>
-              </a:spcAft>
-              <a:buNone/>
-            </a:pPr>
-            <a:r>
               <a:rPr lang="en-US" sz="1200" dirty="0">
                 <a:solidFill>
                   <a:srgbClr val="1C2833"/>
@@ -4830,30 +9141,7 @@
                 <a:ea typeface="Arial" pitchFamily="34" charset="-122"/>
                 <a:cs typeface="Arial" pitchFamily="34" charset="-120"/>
               </a:rPr>
-              <a:t> – On a slip: </a:t>
-            </a:r>
-            <a:pPr algn="l" indent="0" marL="0">
-              <a:lnSpc>
-                <a:spcPts val="1680"/>
-              </a:lnSpc>
-              <a:spcBef>
-                <a:spcPts val="300"/>
-              </a:spcBef>
-              <a:spcAft>
-                <a:spcPts val="300"/>
-              </a:spcAft>
-              <a:buNone/>
-            </a:pPr>
-            <a:r>
-              <a:rPr lang="en-US" sz="1200" i="1" dirty="0">
-                <a:solidFill>
-                  <a:srgbClr val="1C2833"/>
-                </a:solidFill>
-                <a:latin typeface="Arial" pitchFamily="34" charset="0"/>
-                <a:ea typeface="Arial" pitchFamily="34" charset="-122"/>
-                <a:cs typeface="Arial" pitchFamily="34" charset="-120"/>
-              </a:rPr>
-              <a:t>"Name today's herb in Sanskrit, its main compound, and one common Indian dish you've eaten it in."</a:t>
+              <a:t>Pass a small pile to each pair. They crush a few seeds with the back of a spoon (no chewing yet) and sniff. The smell intensifies dramatically when crushed — release of volatile thymol.</a:t>
             </a:r>
             <a:endParaRPr lang="en-US" sz="1200" dirty="0"/>
           </a:p>
@@ -5011,7 +9299,7 @@
                 <a:ea typeface="Georgia" pitchFamily="34" charset="-122"/>
                 <a:cs typeface="Georgia" pitchFamily="34" charset="-120"/>
               </a:rPr>
-              <a:t>Wrap-up (5 min)</a:t>
+              <a:t>Core (20 min)</a:t>
             </a:r>
             <a:endParaRPr lang="en-US" sz="1800" dirty="0"/>
           </a:p>
@@ -5025,8 +9313,8 @@
         </p:nvSpPr>
         <p:spPr>
           <a:xfrm>
-            <a:off x="406301" y="870942"/>
-            <a:ext cx="8498026" cy="426541"/>
+            <a:off x="634901" y="883593"/>
+            <a:ext cx="8102798" cy="281880"/>
           </a:xfrm>
           <a:prstGeom prst="rect">
             <a:avLst/>
@@ -5038,13 +9326,77 @@
           <a:bodyPr wrap="square" lIns="0" tIns="0" rIns="0" bIns="0" rtlCol="0" anchor="t"/>
           <a:lstStyle/>
           <a:p>
-            <a:pPr algn="l" indent="0" marL="0">
-              <a:lnSpc>
-                <a:spcPts val="1680"/>
-              </a:lnSpc>
-              <a:spcBef>
-                <a:spcPts val="300"/>
-              </a:spcBef>
+            <a:pPr algn="l" marL="342900" indent="-342900">
+              <a:lnSpc>
+                <a:spcPts val="1620"/>
+              </a:lnSpc>
+              <a:spcAft>
+                <a:spcPts val="300"/>
+              </a:spcAft>
+              <a:buSzPct val="100000"/>
+              <a:buChar char="•"/>
+            </a:pPr>
+            <a:r>
+              <a:rPr lang="en-US" sz="1200" b="1" dirty="0">
+                <a:solidFill>
+                  <a:srgbClr val="1C2833"/>
+                </a:solidFill>
+                <a:latin typeface="Arial" pitchFamily="34" charset="0"/>
+                <a:ea typeface="Arial" pitchFamily="34" charset="-122"/>
+                <a:cs typeface="Arial" pitchFamily="34" charset="-120"/>
+              </a:rPr>
+              <a:t>Identify it.</a:t>
+            </a:r>
+            <a:endParaRPr lang="en-US" sz="1200" dirty="0"/>
+          </a:p>
+        </p:txBody>
+      </p:sp>
+      <p:sp>
+        <p:nvSpPr>
+          <p:cNvPr id="5" name="Text 3"/>
+          <p:cNvSpPr/>
+          <p:nvPr/>
+        </p:nvSpPr>
+        <p:spPr>
+          <a:xfrm>
+            <a:off x="634901" y="1266974"/>
+            <a:ext cx="8102798" cy="975122"/>
+          </a:xfrm>
+          <a:prstGeom prst="rect">
+            <a:avLst/>
+          </a:prstGeom>
+          <a:noFill/>
+          <a:ln/>
+        </p:spPr>
+        <p:txBody>
+          <a:bodyPr wrap="square" lIns="0" tIns="0" rIns="0" bIns="0" rtlCol="0" anchor="t"/>
+          <a:lstStyle/>
+          <a:p>
+            <a:pPr algn="l" marL="342900" indent="-342900">
+              <a:lnSpc>
+                <a:spcPts val="1620"/>
+              </a:lnSpc>
+              <a:spcAft>
+                <a:spcPts val="300"/>
+              </a:spcAft>
+              <a:buSzPct val="100000"/>
+              <a:buChar char="•"/>
+            </a:pPr>
+            <a:r>
+              <a:rPr lang="en-US" sz="1200" i="1" dirty="0">
+                <a:solidFill>
+                  <a:srgbClr val="1C2833"/>
+                </a:solidFill>
+                <a:latin typeface="Arial" pitchFamily="34" charset="0"/>
+                <a:ea typeface="Arial" pitchFamily="34" charset="-122"/>
+                <a:cs typeface="Arial" pitchFamily="34" charset="-120"/>
+              </a:rPr>
+              <a:t>Yavānī</a:t>
+            </a:r>
+            <a:pPr algn="l" indent="0" marL="0">
+              <a:lnSpc>
+                <a:spcPts val="1620"/>
+              </a:lnSpc>
               <a:spcAft>
                 <a:spcPts val="300"/>
               </a:spcAft>
@@ -5059,38 +9411,103 @@
                 <a:ea typeface="Arial" pitchFamily="34" charset="-122"/>
                 <a:cs typeface="Arial" pitchFamily="34" charset="-120"/>
               </a:rPr>
-              <a:t>– Restate safety rule + the essential-oil warning ("the whole seed in food is fine; the essential oil is concentrated and not for school-age ingestion"). – Preview Day 7: </a:t>
-            </a:r>
-            <a:pPr algn="l" indent="0" marL="0">
-              <a:lnSpc>
-                <a:spcPts val="1680"/>
-              </a:lnSpc>
-              <a:spcBef>
-                <a:spcPts val="300"/>
-              </a:spcBef>
-              <a:spcAft>
-                <a:spcPts val="300"/>
-              </a:spcAft>
-              <a:buNone/>
-            </a:pPr>
-            <a:r>
-              <a:rPr lang="en-US" sz="1200" i="1" dirty="0">
-                <a:solidFill>
-                  <a:srgbClr val="1C2833"/>
-                </a:solidFill>
-                <a:latin typeface="Arial" pitchFamily="34" charset="0"/>
-                <a:ea typeface="Arial" pitchFamily="34" charset="-122"/>
-                <a:cs typeface="Arial" pitchFamily="34" charset="-120"/>
-              </a:rPr>
-              <a:t>"Tomorrow — mint. The cooling herb."</a:t>
+              <a:t> is a small annual herb in the Apiaceae family (same family as coriander, cumin, fennel, dill).</a:t>
             </a:r>
             <a:endParaRPr lang="en-US" sz="1200" dirty="0"/>
           </a:p>
-        </p:txBody>
-      </p:sp>
-      <p:sp>
-        <p:nvSpPr>
-          <p:cNvPr id="5" name="Text 3"/>
+          <a:p>
+            <a:pPr algn="l" marL="342900" indent="-342900">
+              <a:lnSpc>
+                <a:spcPts val="1620"/>
+              </a:lnSpc>
+              <a:spcAft>
+                <a:spcPts val="300"/>
+              </a:spcAft>
+              <a:buSzPct val="100000"/>
+              <a:buChar char="•"/>
+            </a:pPr>
+            <a:r>
+              <a:rPr lang="en-US" sz="1200" dirty="0">
+                <a:solidFill>
+                  <a:srgbClr val="1C2833"/>
+                </a:solidFill>
+                <a:latin typeface="Arial" pitchFamily="34" charset="0"/>
+                <a:ea typeface="Arial" pitchFamily="34" charset="-122"/>
+                <a:cs typeface="Arial" pitchFamily="34" charset="-120"/>
+              </a:rPr>
+              <a:t>The "seeds" sold in shops are technically </a:t>
+            </a:r>
+            <a:pPr algn="l" indent="0" marL="0">
+              <a:lnSpc>
+                <a:spcPts val="1620"/>
+              </a:lnSpc>
+              <a:spcAft>
+                <a:spcPts val="300"/>
+              </a:spcAft>
+              <a:buNone/>
+            </a:pPr>
+            <a:r>
+              <a:rPr lang="en-US" sz="1200" b="1" dirty="0">
+                <a:solidFill>
+                  <a:srgbClr val="1C2833"/>
+                </a:solidFill>
+                <a:latin typeface="Arial" pitchFamily="34" charset="0"/>
+                <a:ea typeface="Arial" pitchFamily="34" charset="-122"/>
+                <a:cs typeface="Arial" pitchFamily="34" charset="-120"/>
+              </a:rPr>
+              <a:t>fruits</a:t>
+            </a:r>
+            <a:pPr algn="l" indent="0" marL="0">
+              <a:lnSpc>
+                <a:spcPts val="1620"/>
+              </a:lnSpc>
+              <a:spcAft>
+                <a:spcPts val="300"/>
+              </a:spcAft>
+              <a:buNone/>
+            </a:pPr>
+            <a:r>
+              <a:rPr lang="en-US" sz="1200" dirty="0">
+                <a:solidFill>
+                  <a:srgbClr val="1C2833"/>
+                </a:solidFill>
+                <a:latin typeface="Arial" pitchFamily="34" charset="0"/>
+                <a:ea typeface="Arial" pitchFamily="34" charset="-122"/>
+                <a:cs typeface="Arial" pitchFamily="34" charset="-120"/>
+              </a:rPr>
+              <a:t> (small schizocarps), about 2 mm long, oval, ridged, greyish-brown.</a:t>
+            </a:r>
+            <a:endParaRPr lang="en-US" sz="1200" dirty="0"/>
+          </a:p>
+          <a:p>
+            <a:pPr algn="l" marL="342900" indent="-342900">
+              <a:lnSpc>
+                <a:spcPts val="1620"/>
+              </a:lnSpc>
+              <a:spcAft>
+                <a:spcPts val="300"/>
+              </a:spcAft>
+              <a:buSzPct val="100000"/>
+              <a:buChar char="•"/>
+            </a:pPr>
+            <a:r>
+              <a:rPr lang="en-US" sz="1200" dirty="0">
+                <a:solidFill>
+                  <a:srgbClr val="1C2833"/>
+                </a:solidFill>
+                <a:latin typeface="Arial" pitchFamily="34" charset="0"/>
+                <a:ea typeface="Arial" pitchFamily="34" charset="-122"/>
+                <a:cs typeface="Arial" pitchFamily="34" charset="-120"/>
+              </a:rPr>
+              <a:t>Crushed, they release a strong thyme-like aroma. The smell is the chemistry — thymol is volatile, so crushing exposes more of it.</a:t>
+            </a:r>
+            <a:endParaRPr lang="en-US" sz="1200" dirty="0"/>
+          </a:p>
+        </p:txBody>
+      </p:sp>
+      <p:sp>
+        <p:nvSpPr>
+          <p:cNvPr id="6" name="Text 4"/>
           <p:cNvSpPr/>
           <p:nvPr/>
         </p:nvSpPr>
@@ -5240,7 +9657,7 @@
                 <a:ea typeface="Georgia" pitchFamily="34" charset="-122"/>
                 <a:cs typeface="Georgia" pitchFamily="34" charset="-120"/>
               </a:rPr>
-              <a:t>Student-facing content</a:t>
+              <a:t>Core (20 min) (cont.)</a:t>
             </a:r>
             <a:endParaRPr lang="en-US" sz="1800" dirty="0"/>
           </a:p>
@@ -5254,61 +9671,8 @@
         </p:nvSpPr>
         <p:spPr>
           <a:xfrm>
-            <a:off x="406301" y="883593"/>
-            <a:ext cx="8331398" cy="3843338"/>
-          </a:xfrm>
-          <a:prstGeom prst="rect">
-            <a:avLst/>
-          </a:prstGeom>
-          <a:solidFill>
-            <a:srgbClr val="F4F8F9"/>
-          </a:solidFill>
-          <a:ln/>
-        </p:spPr>
-        <p:txBody>
-          <a:bodyPr wrap="square" rtlCol="0" anchor="ctr"/>
-          <a:lstStyle/>
-          <a:p>
-            <a:pPr indent="0" marL="0">
-              <a:buNone/>
-            </a:pPr>
-            <a:endParaRPr lang="en-US" dirty="0"/>
-          </a:p>
-        </p:txBody>
-      </p:sp>
-      <p:sp>
-        <p:nvSpPr>
-          <p:cNvPr id="5" name="Shape 3"/>
-          <p:cNvSpPr/>
-          <p:nvPr/>
-        </p:nvSpPr>
-        <p:spPr>
-          <a:xfrm>
-            <a:off x="434876" y="883593"/>
-            <a:ext cx="0" cy="3843338"/>
-          </a:xfrm>
-          <a:prstGeom prst="line">
-            <a:avLst/>
-          </a:prstGeom>
-          <a:noFill/>
-          <a:ln w="57150">
-            <a:solidFill>
-              <a:srgbClr val="FE4447"/>
-            </a:solidFill>
-            <a:prstDash val="solid"/>
-          </a:ln>
-        </p:spPr>
-      </p:sp>
-      <p:sp>
-        <p:nvSpPr>
-          <p:cNvPr id="6" name="Text 4"/>
-          <p:cNvSpPr/>
-          <p:nvPr/>
-        </p:nvSpPr>
-        <p:spPr>
-          <a:xfrm>
-            <a:off x="692051" y="1074093"/>
-            <a:ext cx="7973389" cy="230981"/>
+            <a:off x="634901" y="883593"/>
+            <a:ext cx="8102798" cy="898922"/>
           </a:xfrm>
           <a:prstGeom prst="rect">
             <a:avLst/>
@@ -5320,836 +9684,100 @@
           <a:bodyPr wrap="square" lIns="0" tIns="0" rIns="0" bIns="0" rtlCol="0" anchor="t"/>
           <a:lstStyle/>
           <a:p>
-            <a:pPr algn="l" indent="0" marL="0">
-              <a:lnSpc>
-                <a:spcPts val="1820"/>
-              </a:lnSpc>
-              <a:spcBef>
-                <a:spcPts val="300"/>
-              </a:spcBef>
-              <a:spcAft>
-                <a:spcPts val="300"/>
-              </a:spcAft>
-              <a:buNone/>
-            </a:pPr>
-            <a:r>
-              <a:rPr lang="en-US" sz="1300" b="1" i="1" dirty="0">
-                <a:solidFill>
-                  <a:srgbClr val="1C2833"/>
-                </a:solidFill>
-                <a:latin typeface="Georgia" pitchFamily="34" charset="0"/>
-                <a:ea typeface="Georgia" pitchFamily="34" charset="-122"/>
-                <a:cs typeface="Georgia" pitchFamily="34" charset="-120"/>
-              </a:rPr>
-              <a:t>Yavānī</a:t>
-            </a:r>
-            <a:pPr algn="l" indent="0" marL="0">
-              <a:lnSpc>
-                <a:spcPts val="1820"/>
-              </a:lnSpc>
-              <a:spcBef>
-                <a:spcPts val="300"/>
-              </a:spcBef>
-              <a:spcAft>
-                <a:spcPts val="300"/>
-              </a:spcAft>
-              <a:buNone/>
-            </a:pPr>
-            <a:r>
-              <a:rPr lang="en-US" sz="1300" dirty="0">
-                <a:solidFill>
-                  <a:srgbClr val="1C2833"/>
-                </a:solidFill>
-                <a:latin typeface="Georgia" pitchFamily="34" charset="0"/>
-                <a:ea typeface="Georgia" pitchFamily="34" charset="-122"/>
-                <a:cs typeface="Georgia" pitchFamily="34" charset="-120"/>
-              </a:rPr>
-              <a:t> (</a:t>
-            </a:r>
-            <a:pPr algn="l" indent="0" marL="0">
-              <a:lnSpc>
-                <a:spcPts val="1820"/>
-              </a:lnSpc>
-              <a:spcBef>
-                <a:spcPts val="300"/>
-              </a:spcBef>
-              <a:spcAft>
-                <a:spcPts val="300"/>
-              </a:spcAft>
-              <a:buNone/>
-            </a:pPr>
-            <a:r>
-              <a:rPr lang="en-US" sz="1300" i="1" dirty="0">
-                <a:solidFill>
-                  <a:srgbClr val="1C2833"/>
-                </a:solidFill>
-                <a:latin typeface="Georgia" pitchFamily="34" charset="0"/>
-                <a:ea typeface="Georgia" pitchFamily="34" charset="-122"/>
-                <a:cs typeface="Georgia" pitchFamily="34" charset="-120"/>
-              </a:rPr>
-              <a:t>Trachyspermum ammi</a:t>
-            </a:r>
-            <a:pPr algn="l" indent="0" marL="0">
-              <a:lnSpc>
-                <a:spcPts val="1820"/>
-              </a:lnSpc>
-              <a:spcBef>
-                <a:spcPts val="300"/>
-              </a:spcBef>
-              <a:spcAft>
-                <a:spcPts val="300"/>
-              </a:spcAft>
-              <a:buNone/>
-            </a:pPr>
-            <a:r>
-              <a:rPr lang="en-US" sz="1300" dirty="0">
-                <a:solidFill>
-                  <a:srgbClr val="1C2833"/>
-                </a:solidFill>
-                <a:latin typeface="Georgia" pitchFamily="34" charset="0"/>
-                <a:ea typeface="Georgia" pitchFamily="34" charset="-122"/>
-                <a:cs typeface="Georgia" pitchFamily="34" charset="-120"/>
-              </a:rPr>
-              <a:t>) — known in English as ajwain or carom seed.</a:t>
-            </a:r>
-            <a:endParaRPr lang="en-US" sz="1300" dirty="0"/>
-          </a:p>
-        </p:txBody>
-      </p:sp>
-      <p:sp>
-        <p:nvSpPr>
-          <p:cNvPr id="7" name="Text 5"/>
+            <a:pPr algn="l" marL="342900" indent="-342900">
+              <a:lnSpc>
+                <a:spcPts val="1620"/>
+              </a:lnSpc>
+              <a:spcAft>
+                <a:spcPts val="300"/>
+              </a:spcAft>
+              <a:buSzPct val="100000"/>
+              <a:buChar char="•"/>
+            </a:pPr>
+            <a:r>
+              <a:rPr lang="en-US" sz="1200" b="1" dirty="0">
+                <a:solidFill>
+                  <a:srgbClr val="1C2833"/>
+                </a:solidFill>
+                <a:latin typeface="Arial" pitchFamily="34" charset="0"/>
+                <a:ea typeface="Arial" pitchFamily="34" charset="-122"/>
+                <a:cs typeface="Arial" pitchFamily="34" charset="-120"/>
+              </a:rPr>
+              <a:t>The ajwain-leaf confusion (1 min).</a:t>
+            </a:r>
+            <a:pPr algn="l" indent="0" marL="0">
+              <a:lnSpc>
+                <a:spcPts val="1620"/>
+              </a:lnSpc>
+              <a:spcAft>
+                <a:spcPts val="300"/>
+              </a:spcAft>
+              <a:buNone/>
+            </a:pPr>
+            <a:r>
+              <a:rPr lang="en-US" sz="1200" dirty="0">
+                <a:solidFill>
+                  <a:srgbClr val="1C2833"/>
+                </a:solidFill>
+                <a:latin typeface="Arial" pitchFamily="34" charset="0"/>
+                <a:ea typeface="Arial" pitchFamily="34" charset="-122"/>
+                <a:cs typeface="Arial" pitchFamily="34" charset="-120"/>
+              </a:rPr>
+              <a:t> What's sold in Indian markets as "ajwain leaf" or "ajwain ka patta" is often </a:t>
+            </a:r>
+            <a:pPr algn="l" indent="0" marL="0">
+              <a:lnSpc>
+                <a:spcPts val="1620"/>
+              </a:lnSpc>
+              <a:spcAft>
+                <a:spcPts val="300"/>
+              </a:spcAft>
+              <a:buNone/>
+            </a:pPr>
+            <a:r>
+              <a:rPr lang="en-US" sz="1200" i="1" dirty="0">
+                <a:solidFill>
+                  <a:srgbClr val="1C2833"/>
+                </a:solidFill>
+                <a:latin typeface="Arial" pitchFamily="34" charset="0"/>
+                <a:ea typeface="Arial" pitchFamily="34" charset="-122"/>
+                <a:cs typeface="Arial" pitchFamily="34" charset="-120"/>
+              </a:rPr>
+              <a:t>Plectranthus amboinicus</a:t>
+            </a:r>
+            <a:pPr algn="l" indent="0" marL="0">
+              <a:lnSpc>
+                <a:spcPts val="1620"/>
+              </a:lnSpc>
+              <a:spcAft>
+                <a:spcPts val="300"/>
+              </a:spcAft>
+              <a:buNone/>
+            </a:pPr>
+            <a:r>
+              <a:rPr lang="en-US" sz="1200" dirty="0">
+                <a:solidFill>
+                  <a:srgbClr val="1C2833"/>
+                </a:solidFill>
+                <a:latin typeface="Arial" pitchFamily="34" charset="0"/>
+                <a:ea typeface="Arial" pitchFamily="34" charset="-122"/>
+                <a:cs typeface="Arial" pitchFamily="34" charset="-120"/>
+              </a:rPr>
+              <a:t> — Cuban oregano. It's a different plant, but it smells similar (both contain thymol-class compounds). Modern botany distinguishes them; in many kitchens they get used somewhat interchangeably. Note for clarity but don't dwell.</a:t>
+            </a:r>
+            <a:endParaRPr lang="en-US" sz="1200" dirty="0"/>
+          </a:p>
+        </p:txBody>
+      </p:sp>
+      <p:sp>
+        <p:nvSpPr>
+          <p:cNvPr id="5" name="Text 3"/>
           <p:cNvSpPr/>
           <p:nvPr/>
         </p:nvSpPr>
         <p:spPr>
           <a:xfrm>
-            <a:off x="692051" y="1343174"/>
-            <a:ext cx="7973389" cy="461963"/>
-          </a:xfrm>
-          <a:prstGeom prst="rect">
-            <a:avLst/>
-          </a:prstGeom>
-          <a:noFill/>
-          <a:ln/>
-        </p:spPr>
-        <p:txBody>
-          <a:bodyPr wrap="square" lIns="0" tIns="0" rIns="0" bIns="0" rtlCol="0" anchor="t"/>
-          <a:lstStyle/>
-          <a:p>
-            <a:pPr algn="l" indent="0" marL="0">
-              <a:lnSpc>
-                <a:spcPts val="1820"/>
-              </a:lnSpc>
-              <a:spcBef>
-                <a:spcPts val="300"/>
-              </a:spcBef>
-              <a:spcAft>
-                <a:spcPts val="300"/>
-              </a:spcAft>
-              <a:buNone/>
-            </a:pPr>
-            <a:r>
-              <a:rPr lang="en-US" sz="1300" b="1" i="1" dirty="0">
-                <a:solidFill>
-                  <a:srgbClr val="1C2833"/>
-                </a:solidFill>
-                <a:latin typeface="Georgia" pitchFamily="34" charset="0"/>
-                <a:ea typeface="Georgia" pitchFamily="34" charset="-122"/>
-                <a:cs typeface="Georgia" pitchFamily="34" charset="-120"/>
-              </a:rPr>
-              <a:t>What it is:</a:t>
-            </a:r>
-            <a:pPr algn="l" indent="0" marL="0">
-              <a:lnSpc>
-                <a:spcPts val="1820"/>
-              </a:lnSpc>
-              <a:spcBef>
-                <a:spcPts val="300"/>
-              </a:spcBef>
-              <a:spcAft>
-                <a:spcPts val="300"/>
-              </a:spcAft>
-              <a:buNone/>
-            </a:pPr>
-            <a:r>
-              <a:rPr lang="en-US" sz="1300" dirty="0">
-                <a:solidFill>
-                  <a:srgbClr val="1C2833"/>
-                </a:solidFill>
-                <a:latin typeface="Georgia" pitchFamily="34" charset="0"/>
-                <a:ea typeface="Georgia" pitchFamily="34" charset="-122"/>
-                <a:cs typeface="Georgia" pitchFamily="34" charset="-120"/>
-              </a:rPr>
-              <a:t> A small annual herb in the same family as coriander, cumin, and fennel (Apiaceae). The "seeds" you buy are technically tiny fruits.</a:t>
-            </a:r>
-            <a:endParaRPr lang="en-US" sz="1300" dirty="0"/>
-          </a:p>
-        </p:txBody>
-      </p:sp>
-      <p:sp>
-        <p:nvSpPr>
-          <p:cNvPr id="8" name="Text 6"/>
-          <p:cNvSpPr/>
-          <p:nvPr/>
-        </p:nvSpPr>
-        <p:spPr>
-          <a:xfrm>
-            <a:off x="692051" y="1843236"/>
-            <a:ext cx="7973389" cy="461963"/>
-          </a:xfrm>
-          <a:prstGeom prst="rect">
-            <a:avLst/>
-          </a:prstGeom>
-          <a:noFill/>
-          <a:ln/>
-        </p:spPr>
-        <p:txBody>
-          <a:bodyPr wrap="square" lIns="0" tIns="0" rIns="0" bIns="0" rtlCol="0" anchor="t"/>
-          <a:lstStyle/>
-          <a:p>
-            <a:pPr algn="l" indent="0" marL="0">
-              <a:lnSpc>
-                <a:spcPts val="1820"/>
-              </a:lnSpc>
-              <a:spcBef>
-                <a:spcPts val="300"/>
-              </a:spcBef>
-              <a:spcAft>
-                <a:spcPts val="300"/>
-              </a:spcAft>
-              <a:buNone/>
-            </a:pPr>
-            <a:r>
-              <a:rPr lang="en-US" sz="1300" b="1" i="1" dirty="0">
-                <a:solidFill>
-                  <a:srgbClr val="1C2833"/>
-                </a:solidFill>
-                <a:latin typeface="Georgia" pitchFamily="34" charset="0"/>
-                <a:ea typeface="Georgia" pitchFamily="34" charset="-122"/>
-                <a:cs typeface="Georgia" pitchFamily="34" charset="-120"/>
-              </a:rPr>
-              <a:t>How to identify:</a:t>
-            </a:r>
-            <a:pPr algn="l" indent="0" marL="0">
-              <a:lnSpc>
-                <a:spcPts val="1820"/>
-              </a:lnSpc>
-              <a:spcBef>
-                <a:spcPts val="300"/>
-              </a:spcBef>
-              <a:spcAft>
-                <a:spcPts val="300"/>
-              </a:spcAft>
-              <a:buNone/>
-            </a:pPr>
-            <a:r>
-              <a:rPr lang="en-US" sz="1300" dirty="0">
-                <a:solidFill>
-                  <a:srgbClr val="1C2833"/>
-                </a:solidFill>
-                <a:latin typeface="Georgia" pitchFamily="34" charset="0"/>
-                <a:ea typeface="Georgia" pitchFamily="34" charset="-122"/>
-                <a:cs typeface="Georgia" pitchFamily="34" charset="-120"/>
-              </a:rPr>
-              <a:t> Oval, ridged, greyish-brown, about 2 mm long. Strong thyme-like smell — much stronger when crushed.</a:t>
-            </a:r>
-            <a:endParaRPr lang="en-US" sz="1300" dirty="0"/>
-          </a:p>
-        </p:txBody>
-      </p:sp>
-      <p:sp>
-        <p:nvSpPr>
-          <p:cNvPr id="9" name="Text 7"/>
-          <p:cNvSpPr/>
-          <p:nvPr/>
-        </p:nvSpPr>
-        <p:spPr>
-          <a:xfrm>
-            <a:off x="692051" y="2343299"/>
-            <a:ext cx="7973389" cy="461963"/>
-          </a:xfrm>
-          <a:prstGeom prst="rect">
-            <a:avLst/>
-          </a:prstGeom>
-          <a:noFill/>
-          <a:ln/>
-        </p:spPr>
-        <p:txBody>
-          <a:bodyPr wrap="square" lIns="0" tIns="0" rIns="0" bIns="0" rtlCol="0" anchor="t"/>
-          <a:lstStyle/>
-          <a:p>
-            <a:pPr algn="l" indent="0" marL="0">
-              <a:lnSpc>
-                <a:spcPts val="1820"/>
-              </a:lnSpc>
-              <a:spcBef>
-                <a:spcPts val="300"/>
-              </a:spcBef>
-              <a:spcAft>
-                <a:spcPts val="300"/>
-              </a:spcAft>
-              <a:buNone/>
-            </a:pPr>
-            <a:r>
-              <a:rPr lang="en-US" sz="1300" b="1" i="1" dirty="0">
-                <a:solidFill>
-                  <a:srgbClr val="1C2833"/>
-                </a:solidFill>
-                <a:latin typeface="Georgia" pitchFamily="34" charset="0"/>
-                <a:ea typeface="Georgia" pitchFamily="34" charset="-122"/>
-                <a:cs typeface="Georgia" pitchFamily="34" charset="-120"/>
-              </a:rPr>
-              <a:t>What's inside:</a:t>
-            </a:r>
-            <a:pPr algn="l" indent="0" marL="0">
-              <a:lnSpc>
-                <a:spcPts val="1820"/>
-              </a:lnSpc>
-              <a:spcBef>
-                <a:spcPts val="300"/>
-              </a:spcBef>
-              <a:spcAft>
-                <a:spcPts val="300"/>
-              </a:spcAft>
-              <a:buNone/>
-            </a:pPr>
-            <a:r>
-              <a:rPr lang="en-US" sz="1300" dirty="0">
-                <a:solidFill>
-                  <a:srgbClr val="1C2833"/>
-                </a:solidFill>
-                <a:latin typeface="Georgia" pitchFamily="34" charset="0"/>
-                <a:ea typeface="Georgia" pitchFamily="34" charset="-122"/>
-                <a:cs typeface="Georgia" pitchFamily="34" charset="-120"/>
-              </a:rPr>
-              <a:t> </a:t>
-            </a:r>
-            <a:pPr algn="l" indent="0" marL="0">
-              <a:lnSpc>
-                <a:spcPts val="1820"/>
-              </a:lnSpc>
-              <a:spcBef>
-                <a:spcPts val="300"/>
-              </a:spcBef>
-              <a:spcAft>
-                <a:spcPts val="300"/>
-              </a:spcAft>
-              <a:buNone/>
-            </a:pPr>
-            <a:r>
-              <a:rPr lang="en-US" sz="1300" b="1" i="1" dirty="0">
-                <a:solidFill>
-                  <a:srgbClr val="1C2833"/>
-                </a:solidFill>
-                <a:latin typeface="Georgia" pitchFamily="34" charset="0"/>
-                <a:ea typeface="Georgia" pitchFamily="34" charset="-122"/>
-                <a:cs typeface="Georgia" pitchFamily="34" charset="-120"/>
-              </a:rPr>
-              <a:t>Thymol</a:t>
-            </a:r>
-            <a:pPr algn="l" indent="0" marL="0">
-              <a:lnSpc>
-                <a:spcPts val="1820"/>
-              </a:lnSpc>
-              <a:spcBef>
-                <a:spcPts val="300"/>
-              </a:spcBef>
-              <a:spcAft>
-                <a:spcPts val="300"/>
-              </a:spcAft>
-              <a:buNone/>
-            </a:pPr>
-            <a:r>
-              <a:rPr lang="en-US" sz="1300" dirty="0">
-                <a:solidFill>
-                  <a:srgbClr val="1C2833"/>
-                </a:solidFill>
-                <a:latin typeface="Georgia" pitchFamily="34" charset="0"/>
-                <a:ea typeface="Georgia" pitchFamily="34" charset="-122"/>
-                <a:cs typeface="Georgia" pitchFamily="34" charset="-120"/>
-              </a:rPr>
-              <a:t> — a phenolic monoterpenoid. Same dominant compound as European thyme — </a:t>
-            </a:r>
-            <a:pPr algn="l" indent="0" marL="0">
-              <a:lnSpc>
-                <a:spcPts val="1820"/>
-              </a:lnSpc>
-              <a:spcBef>
-                <a:spcPts val="300"/>
-              </a:spcBef>
-              <a:spcAft>
-                <a:spcPts val="300"/>
-              </a:spcAft>
-              <a:buNone/>
-            </a:pPr>
-            <a:r>
-              <a:rPr lang="en-US" sz="1300" i="1" dirty="0">
-                <a:solidFill>
-                  <a:srgbClr val="1C2833"/>
-                </a:solidFill>
-                <a:latin typeface="Georgia" pitchFamily="34" charset="0"/>
-                <a:ea typeface="Georgia" pitchFamily="34" charset="-122"/>
-                <a:cs typeface="Georgia" pitchFamily="34" charset="-120"/>
-              </a:rPr>
-              <a:t>convergent chemistry</a:t>
-            </a:r>
-            <a:pPr algn="l" indent="0" marL="0">
-              <a:lnSpc>
-                <a:spcPts val="1820"/>
-              </a:lnSpc>
-              <a:spcBef>
-                <a:spcPts val="300"/>
-              </a:spcBef>
-              <a:spcAft>
-                <a:spcPts val="300"/>
-              </a:spcAft>
-              <a:buNone/>
-            </a:pPr>
-            <a:r>
-              <a:rPr lang="en-US" sz="1300" dirty="0">
-                <a:solidFill>
-                  <a:srgbClr val="1C2833"/>
-                </a:solidFill>
-                <a:latin typeface="Georgia" pitchFamily="34" charset="0"/>
-                <a:ea typeface="Georgia" pitchFamily="34" charset="-122"/>
-                <a:cs typeface="Georgia" pitchFamily="34" charset="-120"/>
-              </a:rPr>
-              <a:t> between unrelated plants.</a:t>
-            </a:r>
-            <a:endParaRPr lang="en-US" sz="1300" dirty="0"/>
-          </a:p>
-        </p:txBody>
-      </p:sp>
-      <p:sp>
-        <p:nvSpPr>
-          <p:cNvPr id="10" name="Text 8"/>
-          <p:cNvSpPr/>
-          <p:nvPr/>
-        </p:nvSpPr>
-        <p:spPr>
-          <a:xfrm>
-            <a:off x="692051" y="2843361"/>
-            <a:ext cx="7973389" cy="461963"/>
-          </a:xfrm>
-          <a:prstGeom prst="rect">
-            <a:avLst/>
-          </a:prstGeom>
-          <a:noFill/>
-          <a:ln/>
-        </p:spPr>
-        <p:txBody>
-          <a:bodyPr wrap="square" lIns="0" tIns="0" rIns="0" bIns="0" rtlCol="0" anchor="t"/>
-          <a:lstStyle/>
-          <a:p>
-            <a:pPr algn="l" indent="0" marL="0">
-              <a:lnSpc>
-                <a:spcPts val="1820"/>
-              </a:lnSpc>
-              <a:spcBef>
-                <a:spcPts val="300"/>
-              </a:spcBef>
-              <a:spcAft>
-                <a:spcPts val="300"/>
-              </a:spcAft>
-              <a:buNone/>
-            </a:pPr>
-            <a:r>
-              <a:rPr lang="en-US" sz="1300" b="1" i="1" dirty="0">
-                <a:solidFill>
-                  <a:srgbClr val="1C2833"/>
-                </a:solidFill>
-                <a:latin typeface="Georgia" pitchFamily="34" charset="0"/>
-                <a:ea typeface="Georgia" pitchFamily="34" charset="-122"/>
-                <a:cs typeface="Georgia" pitchFamily="34" charset="-120"/>
-              </a:rPr>
-              <a:t>Traditional use:</a:t>
-            </a:r>
-            <a:pPr algn="l" indent="0" marL="0">
-              <a:lnSpc>
-                <a:spcPts val="1820"/>
-              </a:lnSpc>
-              <a:spcBef>
-                <a:spcPts val="300"/>
-              </a:spcBef>
-              <a:spcAft>
-                <a:spcPts val="300"/>
-              </a:spcAft>
-              <a:buNone/>
-            </a:pPr>
-            <a:r>
-              <a:rPr lang="en-US" sz="1300" dirty="0">
-                <a:solidFill>
-                  <a:srgbClr val="1C2833"/>
-                </a:solidFill>
-                <a:latin typeface="Georgia" pitchFamily="34" charset="0"/>
-                <a:ea typeface="Georgia" pitchFamily="34" charset="-122"/>
-                <a:cs typeface="Georgia" pitchFamily="34" charset="-120"/>
-              </a:rPr>
-              <a:t> Tempered into hot oil for parathas, savoury snacks. Ajwain water (steeped seeds in warm water) is a common Indian household remedy for indigestion.</a:t>
-            </a:r>
-            <a:endParaRPr lang="en-US" sz="1300" dirty="0"/>
-          </a:p>
-        </p:txBody>
-      </p:sp>
-      <p:sp>
-        <p:nvSpPr>
-          <p:cNvPr id="11" name="Text 9"/>
-          <p:cNvSpPr/>
-          <p:nvPr/>
-        </p:nvSpPr>
-        <p:spPr>
-          <a:xfrm>
-            <a:off x="692051" y="3343424"/>
-            <a:ext cx="7973389" cy="692944"/>
-          </a:xfrm>
-          <a:prstGeom prst="rect">
-            <a:avLst/>
-          </a:prstGeom>
-          <a:noFill/>
-          <a:ln/>
-        </p:spPr>
-        <p:txBody>
-          <a:bodyPr wrap="square" lIns="0" tIns="0" rIns="0" bIns="0" rtlCol="0" anchor="t"/>
-          <a:lstStyle/>
-          <a:p>
-            <a:pPr algn="l" indent="0" marL="0">
-              <a:lnSpc>
-                <a:spcPts val="1820"/>
-              </a:lnSpc>
-              <a:spcBef>
-                <a:spcPts val="300"/>
-              </a:spcBef>
-              <a:spcAft>
-                <a:spcPts val="300"/>
-              </a:spcAft>
-              <a:buNone/>
-            </a:pPr>
-            <a:r>
-              <a:rPr lang="en-US" sz="1300" b="1" i="1" dirty="0">
-                <a:solidFill>
-                  <a:srgbClr val="1C2833"/>
-                </a:solidFill>
-                <a:latin typeface="Georgia" pitchFamily="34" charset="0"/>
-                <a:ea typeface="Georgia" pitchFamily="34" charset="-122"/>
-                <a:cs typeface="Georgia" pitchFamily="34" charset="-120"/>
-              </a:rPr>
-              <a:t>Honest evidence:</a:t>
-            </a:r>
-            <a:pPr algn="l" indent="0" marL="0">
-              <a:lnSpc>
-                <a:spcPts val="1820"/>
-              </a:lnSpc>
-              <a:spcBef>
-                <a:spcPts val="300"/>
-              </a:spcBef>
-              <a:spcAft>
-                <a:spcPts val="300"/>
-              </a:spcAft>
-              <a:buNone/>
-            </a:pPr>
-            <a:r>
-              <a:rPr lang="en-US" sz="1300" dirty="0">
-                <a:solidFill>
-                  <a:srgbClr val="1C2833"/>
-                </a:solidFill>
-                <a:latin typeface="Georgia" pitchFamily="34" charset="0"/>
-                <a:ea typeface="Georgia" pitchFamily="34" charset="-122"/>
-                <a:cs typeface="Georgia" pitchFamily="34" charset="-120"/>
-              </a:rPr>
-              <a:t> Mechanism for carminative (anti-gas) action is well established. Clinical evidence for general indigestion is positive but small. </a:t>
-            </a:r>
-            <a:pPr algn="l" indent="0" marL="0">
-              <a:lnSpc>
-                <a:spcPts val="1820"/>
-              </a:lnSpc>
-              <a:spcBef>
-                <a:spcPts val="300"/>
-              </a:spcBef>
-              <a:spcAft>
-                <a:spcPts val="300"/>
-              </a:spcAft>
-              <a:buNone/>
-            </a:pPr>
-            <a:r>
-              <a:rPr lang="en-US" sz="1300" b="1" i="1" dirty="0">
-                <a:solidFill>
-                  <a:srgbClr val="1C2833"/>
-                </a:solidFill>
-                <a:latin typeface="Georgia" pitchFamily="34" charset="0"/>
-                <a:ea typeface="Georgia" pitchFamily="34" charset="-122"/>
-                <a:cs typeface="Georgia" pitchFamily="34" charset="-120"/>
-              </a:rPr>
-              <a:t>Essential oils are concentrated and not safe for ingestion in school-age use.</a:t>
-            </a:r>
-            <a:endParaRPr lang="en-US" sz="1300" dirty="0"/>
-          </a:p>
-        </p:txBody>
-      </p:sp>
-      <p:sp>
-        <p:nvSpPr>
-          <p:cNvPr id="12" name="Text 10"/>
-          <p:cNvSpPr/>
-          <p:nvPr/>
-        </p:nvSpPr>
-        <p:spPr>
-          <a:xfrm>
-            <a:off x="692051" y="4074468"/>
-            <a:ext cx="7973389" cy="461963"/>
-          </a:xfrm>
-          <a:prstGeom prst="rect">
-            <a:avLst/>
-          </a:prstGeom>
-          <a:noFill/>
-          <a:ln/>
-        </p:spPr>
-        <p:txBody>
-          <a:bodyPr wrap="square" lIns="0" tIns="0" rIns="0" bIns="0" rtlCol="0" anchor="t"/>
-          <a:lstStyle/>
-          <a:p>
-            <a:pPr algn="l" indent="0" marL="0">
-              <a:lnSpc>
-                <a:spcPts val="1820"/>
-              </a:lnSpc>
-              <a:spcBef>
-                <a:spcPts val="300"/>
-              </a:spcBef>
-              <a:spcAft>
-                <a:spcPts val="300"/>
-              </a:spcAft>
-              <a:buNone/>
-            </a:pPr>
-            <a:r>
-              <a:rPr lang="en-US" sz="1300" b="1" i="1" dirty="0">
-                <a:solidFill>
-                  <a:srgbClr val="1C2833"/>
-                </a:solidFill>
-                <a:latin typeface="Georgia" pitchFamily="34" charset="0"/>
-                <a:ea typeface="Georgia" pitchFamily="34" charset="-122"/>
-                <a:cs typeface="Georgia" pitchFamily="34" charset="-120"/>
-              </a:rPr>
-              <a:t>Ayurvedic frame:</a:t>
-            </a:r>
-            <a:pPr algn="l" indent="0" marL="0">
-              <a:lnSpc>
-                <a:spcPts val="1820"/>
-              </a:lnSpc>
-              <a:spcBef>
-                <a:spcPts val="300"/>
-              </a:spcBef>
-              <a:spcAft>
-                <a:spcPts val="300"/>
-              </a:spcAft>
-              <a:buNone/>
-            </a:pPr>
-            <a:r>
-              <a:rPr lang="en-US" sz="1300" dirty="0">
-                <a:solidFill>
-                  <a:srgbClr val="1C2833"/>
-                </a:solidFill>
-                <a:latin typeface="Georgia" pitchFamily="34" charset="0"/>
-                <a:ea typeface="Georgia" pitchFamily="34" charset="-122"/>
-                <a:cs typeface="Georgia" pitchFamily="34" charset="-120"/>
-              </a:rPr>
-              <a:t> </a:t>
-            </a:r>
-            <a:pPr algn="l" indent="0" marL="0">
-              <a:lnSpc>
-                <a:spcPts val="1820"/>
-              </a:lnSpc>
-              <a:spcBef>
-                <a:spcPts val="300"/>
-              </a:spcBef>
-              <a:spcAft>
-                <a:spcPts val="300"/>
-              </a:spcAft>
-              <a:buNone/>
-            </a:pPr>
-            <a:r>
-              <a:rPr lang="en-US" sz="1300" i="1" dirty="0">
-                <a:solidFill>
-                  <a:srgbClr val="1C2833"/>
-                </a:solidFill>
-                <a:latin typeface="Georgia" pitchFamily="34" charset="0"/>
-                <a:ea typeface="Georgia" pitchFamily="34" charset="-122"/>
-                <a:cs typeface="Georgia" pitchFamily="34" charset="-120"/>
-              </a:rPr>
-              <a:t>kaṭu-tikta</a:t>
-            </a:r>
-            <a:pPr algn="l" indent="0" marL="0">
-              <a:lnSpc>
-                <a:spcPts val="1820"/>
-              </a:lnSpc>
-              <a:spcBef>
-                <a:spcPts val="300"/>
-              </a:spcBef>
-              <a:spcAft>
-                <a:spcPts val="300"/>
-              </a:spcAft>
-              <a:buNone/>
-            </a:pPr>
-            <a:r>
-              <a:rPr lang="en-US" sz="1300" dirty="0">
-                <a:solidFill>
-                  <a:srgbClr val="1C2833"/>
-                </a:solidFill>
-                <a:latin typeface="Georgia" pitchFamily="34" charset="0"/>
-                <a:ea typeface="Georgia" pitchFamily="34" charset="-122"/>
-                <a:cs typeface="Georgia" pitchFamily="34" charset="-120"/>
-              </a:rPr>
-              <a:t> (pungent-bitter), </a:t>
-            </a:r>
-            <a:pPr algn="l" indent="0" marL="0">
-              <a:lnSpc>
-                <a:spcPts val="1820"/>
-              </a:lnSpc>
-              <a:spcBef>
-                <a:spcPts val="300"/>
-              </a:spcBef>
-              <a:spcAft>
-                <a:spcPts val="300"/>
-              </a:spcAft>
-              <a:buNone/>
-            </a:pPr>
-            <a:r>
-              <a:rPr lang="en-US" sz="1300" i="1" dirty="0">
-                <a:solidFill>
-                  <a:srgbClr val="1C2833"/>
-                </a:solidFill>
-                <a:latin typeface="Georgia" pitchFamily="34" charset="0"/>
-                <a:ea typeface="Georgia" pitchFamily="34" charset="-122"/>
-                <a:cs typeface="Georgia" pitchFamily="34" charset="-120"/>
-              </a:rPr>
-              <a:t>uṣṇa</a:t>
-            </a:r>
-            <a:pPr algn="l" indent="0" marL="0">
-              <a:lnSpc>
-                <a:spcPts val="1820"/>
-              </a:lnSpc>
-              <a:spcBef>
-                <a:spcPts val="300"/>
-              </a:spcBef>
-              <a:spcAft>
-                <a:spcPts val="300"/>
-              </a:spcAft>
-              <a:buNone/>
-            </a:pPr>
-            <a:r>
-              <a:rPr lang="en-US" sz="1300" dirty="0">
-                <a:solidFill>
-                  <a:srgbClr val="1C2833"/>
-                </a:solidFill>
-                <a:latin typeface="Georgia" pitchFamily="34" charset="0"/>
-                <a:ea typeface="Georgia" pitchFamily="34" charset="-122"/>
-                <a:cs typeface="Georgia" pitchFamily="34" charset="-120"/>
-              </a:rPr>
-              <a:t> (heating). Balances </a:t>
-            </a:r>
-            <a:pPr algn="l" indent="0" marL="0">
-              <a:lnSpc>
-                <a:spcPts val="1820"/>
-              </a:lnSpc>
-              <a:spcBef>
-                <a:spcPts val="300"/>
-              </a:spcBef>
-              <a:spcAft>
-                <a:spcPts val="300"/>
-              </a:spcAft>
-              <a:buNone/>
-            </a:pPr>
-            <a:r>
-              <a:rPr lang="en-US" sz="1300" i="1" dirty="0">
-                <a:solidFill>
-                  <a:srgbClr val="1C2833"/>
-                </a:solidFill>
-                <a:latin typeface="Georgia" pitchFamily="34" charset="0"/>
-                <a:ea typeface="Georgia" pitchFamily="34" charset="-122"/>
-                <a:cs typeface="Georgia" pitchFamily="34" charset="-120"/>
-              </a:rPr>
-              <a:t>vāta</a:t>
-            </a:r>
-            <a:pPr algn="l" indent="0" marL="0">
-              <a:lnSpc>
-                <a:spcPts val="1820"/>
-              </a:lnSpc>
-              <a:spcBef>
-                <a:spcPts val="300"/>
-              </a:spcBef>
-              <a:spcAft>
-                <a:spcPts val="300"/>
-              </a:spcAft>
-              <a:buNone/>
-            </a:pPr>
-            <a:r>
-              <a:rPr lang="en-US" sz="1300" dirty="0">
-                <a:solidFill>
-                  <a:srgbClr val="1C2833"/>
-                </a:solidFill>
-                <a:latin typeface="Georgia" pitchFamily="34" charset="0"/>
-                <a:ea typeface="Georgia" pitchFamily="34" charset="-122"/>
-                <a:cs typeface="Georgia" pitchFamily="34" charset="-120"/>
-              </a:rPr>
-              <a:t> and </a:t>
-            </a:r>
-            <a:pPr algn="l" indent="0" marL="0">
-              <a:lnSpc>
-                <a:spcPts val="1820"/>
-              </a:lnSpc>
-              <a:spcBef>
-                <a:spcPts val="300"/>
-              </a:spcBef>
-              <a:spcAft>
-                <a:spcPts val="300"/>
-              </a:spcAft>
-              <a:buNone/>
-            </a:pPr>
-            <a:r>
-              <a:rPr lang="en-US" sz="1300" i="1" dirty="0">
-                <a:solidFill>
-                  <a:srgbClr val="1C2833"/>
-                </a:solidFill>
-                <a:latin typeface="Georgia" pitchFamily="34" charset="0"/>
-                <a:ea typeface="Georgia" pitchFamily="34" charset="-122"/>
-                <a:cs typeface="Georgia" pitchFamily="34" charset="-120"/>
-              </a:rPr>
-              <a:t>kapha</a:t>
-            </a:r>
-            <a:pPr algn="l" indent="0" marL="0">
-              <a:lnSpc>
-                <a:spcPts val="1820"/>
-              </a:lnSpc>
-              <a:spcBef>
-                <a:spcPts val="300"/>
-              </a:spcBef>
-              <a:spcAft>
-                <a:spcPts val="300"/>
-              </a:spcAft>
-              <a:buNone/>
-            </a:pPr>
-            <a:r>
-              <a:rPr lang="en-US" sz="1300" dirty="0">
-                <a:solidFill>
-                  <a:srgbClr val="1C2833"/>
-                </a:solidFill>
-                <a:latin typeface="Georgia" pitchFamily="34" charset="0"/>
-                <a:ea typeface="Georgia" pitchFamily="34" charset="-122"/>
-                <a:cs typeface="Georgia" pitchFamily="34" charset="-120"/>
-              </a:rPr>
-              <a:t> via digestive stimulation.</a:t>
-            </a:r>
-            <a:endParaRPr lang="en-US" sz="1300" dirty="0"/>
-          </a:p>
-        </p:txBody>
-      </p:sp>
-      <p:sp>
-        <p:nvSpPr>
-          <p:cNvPr id="13" name="Text 11"/>
-          <p:cNvSpPr/>
-          <p:nvPr/>
-        </p:nvSpPr>
-        <p:spPr>
-          <a:xfrm>
-            <a:off x="406301" y="4891980"/>
+            <a:off x="406301" y="4434929"/>
             <a:ext cx="8498026" cy="213271"/>
           </a:xfrm>
           <a:prstGeom prst="rect">
@@ -6293,7 +9921,7 @@
                 <a:ea typeface="Georgia" pitchFamily="34" charset="-122"/>
                 <a:cs typeface="Georgia" pitchFamily="34" charset="-120"/>
               </a:rPr>
-              <a:t>Homework</a:t>
+              <a:t>Core (20 min) (cont.)</a:t>
             </a:r>
             <a:endParaRPr lang="en-US" sz="1800" dirty="0"/>
           </a:p>
@@ -6307,8 +9935,8 @@
         </p:nvSpPr>
         <p:spPr>
           <a:xfrm>
-            <a:off x="406301" y="870942"/>
-            <a:ext cx="8498026" cy="213271"/>
+            <a:off x="634901" y="883593"/>
+            <a:ext cx="8102798" cy="281880"/>
           </a:xfrm>
           <a:prstGeom prst="rect">
             <a:avLst/>
@@ -6320,13 +9948,31 @@
           <a:bodyPr wrap="square" lIns="0" tIns="0" rIns="0" bIns="0" rtlCol="0" anchor="t"/>
           <a:lstStyle/>
           <a:p>
-            <a:pPr algn="l" indent="0" marL="0">
-              <a:lnSpc>
-                <a:spcPts val="1680"/>
-              </a:lnSpc>
-              <a:spcBef>
-                <a:spcPts val="300"/>
-              </a:spcBef>
+            <a:pPr algn="l" marL="342900" indent="-342900">
+              <a:lnSpc>
+                <a:spcPts val="1620"/>
+              </a:lnSpc>
+              <a:spcAft>
+                <a:spcPts val="300"/>
+              </a:spcAft>
+              <a:buSzPct val="100000"/>
+              <a:buChar char="•"/>
+            </a:pPr>
+            <a:r>
+              <a:rPr lang="en-US" sz="1200" b="1" dirty="0">
+                <a:solidFill>
+                  <a:srgbClr val="1C2833"/>
+                </a:solidFill>
+                <a:latin typeface="Arial" pitchFamily="34" charset="0"/>
+                <a:ea typeface="Arial" pitchFamily="34" charset="-122"/>
+                <a:cs typeface="Arial" pitchFamily="34" charset="-120"/>
+              </a:rPr>
+              <a:t>What's inside.</a:t>
+            </a:r>
+            <a:pPr algn="l" indent="0" marL="0">
+              <a:lnSpc>
+                <a:spcPts val="1620"/>
+              </a:lnSpc>
               <a:spcAft>
                 <a:spcPts val="300"/>
               </a:spcAft>
@@ -6341,38 +9987,32 @@
                 <a:ea typeface="Arial" pitchFamily="34" charset="-122"/>
                 <a:cs typeface="Arial" pitchFamily="34" charset="-120"/>
               </a:rPr>
-              <a:t>– Find ajwain in your kitchen. Smell it. Then ask one adult: </a:t>
-            </a:r>
-            <a:pPr algn="l" indent="0" marL="0">
-              <a:lnSpc>
-                <a:spcPts val="1680"/>
-              </a:lnSpc>
-              <a:spcBef>
-                <a:spcPts val="300"/>
-              </a:spcBef>
-              <a:spcAft>
-                <a:spcPts val="300"/>
-              </a:spcAft>
-              <a:buNone/>
-            </a:pPr>
-            <a:r>
-              <a:rPr lang="en-US" sz="1200" i="1" dirty="0">
-                <a:solidFill>
-                  <a:srgbClr val="1C2833"/>
-                </a:solidFill>
-                <a:latin typeface="Arial" pitchFamily="34" charset="0"/>
-                <a:ea typeface="Arial" pitchFamily="34" charset="-122"/>
-                <a:cs typeface="Arial" pitchFamily="34" charset="-120"/>
-              </a:rPr>
-              <a:t>"What do you put ajwain in, and why?"</a:t>
-            </a:r>
-            <a:pPr algn="l" indent="0" marL="0">
-              <a:lnSpc>
-                <a:spcPts val="1680"/>
-              </a:lnSpc>
-              <a:spcBef>
-                <a:spcPts val="300"/>
-              </a:spcBef>
+              <a:t> Thymol is a </a:t>
+            </a:r>
+            <a:pPr algn="l" indent="0" marL="0">
+              <a:lnSpc>
+                <a:spcPts val="1620"/>
+              </a:lnSpc>
+              <a:spcAft>
+                <a:spcPts val="300"/>
+              </a:spcAft>
+              <a:buNone/>
+            </a:pPr>
+            <a:r>
+              <a:rPr lang="en-US" sz="1200" b="1" dirty="0">
+                <a:solidFill>
+                  <a:srgbClr val="1C2833"/>
+                </a:solidFill>
+                <a:latin typeface="Arial" pitchFamily="34" charset="0"/>
+                <a:ea typeface="Arial" pitchFamily="34" charset="-122"/>
+                <a:cs typeface="Arial" pitchFamily="34" charset="-120"/>
+              </a:rPr>
+              <a:t>phenolic monoterpenoid</a:t>
+            </a:r>
+            <a:pPr algn="l" indent="0" marL="0">
+              <a:lnSpc>
+                <a:spcPts val="1620"/>
+              </a:lnSpc>
               <a:spcAft>
                 <a:spcPts val="300"/>
               </a:spcAft>
@@ -6387,7 +10027,7 @@
                 <a:ea typeface="Arial" pitchFamily="34" charset="-122"/>
                 <a:cs typeface="Arial" pitchFamily="34" charset="-120"/>
               </a:rPr>
-              <a:t> Write down their answer.</a:t>
+              <a:t>, C₁₀H₁₄O — closely related to carvacrol. Properties:</a:t>
             </a:r>
             <a:endParaRPr lang="en-US" sz="1200" dirty="0"/>
           </a:p>
@@ -6396,6 +10036,160 @@
       <p:sp>
         <p:nvSpPr>
           <p:cNvPr id="5" name="Text 3"/>
+          <p:cNvSpPr/>
+          <p:nvPr/>
+        </p:nvSpPr>
+        <p:spPr>
+          <a:xfrm>
+            <a:off x="634901" y="1266974"/>
+            <a:ext cx="8102798" cy="975122"/>
+          </a:xfrm>
+          <a:prstGeom prst="rect">
+            <a:avLst/>
+          </a:prstGeom>
+          <a:noFill/>
+          <a:ln/>
+        </p:spPr>
+        <p:txBody>
+          <a:bodyPr wrap="square" lIns="0" tIns="0" rIns="0" bIns="0" rtlCol="0" anchor="t"/>
+          <a:lstStyle/>
+          <a:p>
+            <a:pPr algn="l" marL="342900" indent="-342900">
+              <a:lnSpc>
+                <a:spcPts val="1620"/>
+              </a:lnSpc>
+              <a:spcAft>
+                <a:spcPts val="300"/>
+              </a:spcAft>
+              <a:buSzPct val="100000"/>
+              <a:buChar char="•"/>
+            </a:pPr>
+            <a:r>
+              <a:rPr lang="en-US" sz="1200" b="1" dirty="0">
+                <a:solidFill>
+                  <a:srgbClr val="1C2833"/>
+                </a:solidFill>
+                <a:latin typeface="Arial" pitchFamily="34" charset="0"/>
+                <a:ea typeface="Arial" pitchFamily="34" charset="-122"/>
+                <a:cs typeface="Arial" pitchFamily="34" charset="-120"/>
+              </a:rPr>
+              <a:t>Antimicrobial</a:t>
+            </a:r>
+            <a:pPr algn="l" indent="0" marL="0">
+              <a:lnSpc>
+                <a:spcPts val="1620"/>
+              </a:lnSpc>
+              <a:spcAft>
+                <a:spcPts val="300"/>
+              </a:spcAft>
+              <a:buNone/>
+            </a:pPr>
+            <a:r>
+              <a:rPr lang="en-US" sz="1200" dirty="0">
+                <a:solidFill>
+                  <a:srgbClr val="1C2833"/>
+                </a:solidFill>
+                <a:latin typeface="Arial" pitchFamily="34" charset="0"/>
+                <a:ea typeface="Arial" pitchFamily="34" charset="-122"/>
+                <a:cs typeface="Arial" pitchFamily="34" charset="-120"/>
+              </a:rPr>
+              <a:t> in vitro — used historically in mouthwashes and antiseptic preparations (Listerine famously included thymol).</a:t>
+            </a:r>
+            <a:endParaRPr lang="en-US" sz="1200" dirty="0"/>
+          </a:p>
+          <a:p>
+            <a:pPr algn="l" marL="342900" indent="-342900">
+              <a:lnSpc>
+                <a:spcPts val="1620"/>
+              </a:lnSpc>
+              <a:spcAft>
+                <a:spcPts val="300"/>
+              </a:spcAft>
+              <a:buSzPct val="100000"/>
+              <a:buChar char="•"/>
+            </a:pPr>
+            <a:r>
+              <a:rPr lang="en-US" sz="1200" b="1" dirty="0">
+                <a:solidFill>
+                  <a:srgbClr val="1C2833"/>
+                </a:solidFill>
+                <a:latin typeface="Arial" pitchFamily="34" charset="0"/>
+                <a:ea typeface="Arial" pitchFamily="34" charset="-122"/>
+                <a:cs typeface="Arial" pitchFamily="34" charset="-120"/>
+              </a:rPr>
+              <a:t>Carminative</a:t>
+            </a:r>
+            <a:pPr algn="l" indent="0" marL="0">
+              <a:lnSpc>
+                <a:spcPts val="1620"/>
+              </a:lnSpc>
+              <a:spcAft>
+                <a:spcPts val="300"/>
+              </a:spcAft>
+              <a:buNone/>
+            </a:pPr>
+            <a:r>
+              <a:rPr lang="en-US" sz="1200" dirty="0">
+                <a:solidFill>
+                  <a:srgbClr val="1C2833"/>
+                </a:solidFill>
+                <a:latin typeface="Arial" pitchFamily="34" charset="0"/>
+                <a:ea typeface="Arial" pitchFamily="34" charset="-122"/>
+                <a:cs typeface="Arial" pitchFamily="34" charset="-120"/>
+              </a:rPr>
+              <a:t> — helps reduce intestinal gas. Mechanism likely involves smooth-muscle relaxation in the gut.</a:t>
+            </a:r>
+            <a:endParaRPr lang="en-US" sz="1200" dirty="0"/>
+          </a:p>
+          <a:p>
+            <a:pPr algn="l" marL="342900" indent="-342900">
+              <a:lnSpc>
+                <a:spcPts val="1620"/>
+              </a:lnSpc>
+              <a:spcAft>
+                <a:spcPts val="300"/>
+              </a:spcAft>
+              <a:buSzPct val="100000"/>
+              <a:buChar char="•"/>
+            </a:pPr>
+            <a:r>
+              <a:rPr lang="en-US" sz="1200" b="1" dirty="0">
+                <a:solidFill>
+                  <a:srgbClr val="1C2833"/>
+                </a:solidFill>
+                <a:latin typeface="Arial" pitchFamily="34" charset="0"/>
+                <a:ea typeface="Arial" pitchFamily="34" charset="-122"/>
+                <a:cs typeface="Arial" pitchFamily="34" charset="-120"/>
+              </a:rPr>
+              <a:t>Strong volatile</a:t>
+            </a:r>
+            <a:pPr algn="l" indent="0" marL="0">
+              <a:lnSpc>
+                <a:spcPts val="1620"/>
+              </a:lnSpc>
+              <a:spcAft>
+                <a:spcPts val="300"/>
+              </a:spcAft>
+              <a:buNone/>
+            </a:pPr>
+            <a:r>
+              <a:rPr lang="en-US" sz="1200" dirty="0">
+                <a:solidFill>
+                  <a:srgbClr val="1C2833"/>
+                </a:solidFill>
+                <a:latin typeface="Arial" pitchFamily="34" charset="0"/>
+                <a:ea typeface="Arial" pitchFamily="34" charset="-122"/>
+                <a:cs typeface="Arial" pitchFamily="34" charset="-120"/>
+              </a:rPr>
+              <a:t> — that's why a tightly closed spice jar holds the smell, and an open one fades in a few weeks.</a:t>
+            </a:r>
+            <a:endParaRPr lang="en-US" sz="1200" dirty="0"/>
+          </a:p>
+        </p:txBody>
+      </p:sp>
+      <p:sp>
+        <p:nvSpPr>
+          <p:cNvPr id="6" name="Text 4"/>
           <p:cNvSpPr/>
           <p:nvPr/>
         </p:nvSpPr>
